--- a/inbox/Application Aware Networking/Book_05_FedAAN_Network_Modernization.pptx
+++ b/inbox/Application Aware Networking/Book_05_FedAAN_Network_Modernization.pptx
@@ -32,9 +32,10 @@
     <p:sldId id="280" r:id="rId26"/>
     <p:sldId id="281" r:id="rId27"/>
     <p:sldId id="282" r:id="rId28"/>
+    <p:sldId id="283" r:id="rId29"/>
   </p:sldIdLst>
   <p:notesMasterIdLst>
-    <p:notesMasterId r:id="rId29"/>
+    <p:notesMasterId r:id="rId30"/>
   </p:notesMasterIdLst>
   <p:sldSz cx="9144000" cy="5143500"/>
   <p:notesSz cx="5143500" cy="9144000"/>
@@ -1596,8 +1597,8 @@
           <a:p>
             <a:r>
               <a:rPr lang="en-US" dirty="0"/>
-              <a:t>From Book 05's Federal Framework Alignment table — the defensibility slide: every concept in the forty-year narrative maps to a federal mandate and a standard. A reference table; walk two rows and let the audience read the rest. The rows worth voicing: 'separate truth from runtime enforcement' — the one-sentence thesis — maps to EO 14028 and OMB M-22-09, grounded in NIST SP 800-207's zero trust tenets; and 'continuous monitoring, automated KSI enforcement' maps to the FedRAMP 20x Consolidated Rules with the January 1, 2027 mandatory date, grounded in NIST SP 800-37's CA-7. Other mappings for questions: single source of truth (Evidence Act + Federal Data Strategy; CM-8, SI-12); application-aware per-transaction enforcement (M-22-09 §4; TIC 3.0 Use Cases E and F); phishing-resistant MFA and NTLM elimination (BOD 25-01; ZTMM Identity pillar); SD-WAN local breakout with SASE replacing VPN (TIC 3.0; ZTMM Networks pillar); unified DNS as a security control and IPAM as compliance evidence (FedRAMP Moderate SC-20/21, CM-8 — Book 01's controls); and gated actuation as the governance posture (FedRAMP ConMon; ZTMM Automation and Orchestration pillar). Everything at the Moderate baseline.
-Vendor sources: https://www.cisa.gov/sites/default/files/2023-04/zero_trust_maturity_model_v2_508.pdf | https://csrc.nist.gov/pubs/sp/800/53/r5/upd1/final</a:t>
+              <a:t>The federal compliance clock — added in the 2026-07-07 timeline pass; the fully-sourced version with the elapsed baseline lives in the Federal AAN / ConMon Gap Roadmap, the series' single source of truth for dates. Walk the rows: August 3 and 31, 2026 — FedRAMP 20x submission windows open, Class A first, then Class B and C, which is the GCC Moderate window (marketplace listings opened July 6; FedRAMP Ready went legacy July 28; temporary Rev5 conversion paths opened August 10). August 7, 2026 — BOD 26-04 (issued June 10, 2026) requires agency vulnerability-management policies to support risk-based remediation under its four-variable model: exposure, KEV listing, exploit automatability, and technical impact, with timelines from 3 days to deferral. September 21, 2026 — every FIPS 140-2 certificate moves to NIST's Historical List, ending new procurement reliance on 140-2-only validated modules; verify cryptographic modules are FIPS 140-3 tracked. December 7, 2026 — BOD 26-04's remediation timelines take force AND FedRAMP's Vulnerability Detection and Response / Vulnerability Evaluation and Reporting rules become mandatory: SBOM plus vendor disclosure. January 1, 2027 — the Consolidated Rules become mandatory for all FedRAMP systems, and CNSA 2.0's acquisition gate opens for National Security Systems (ML-KEM-1024, ML-DSA-87 — NSS-scoped, with the civilian trajectory following via M-23-02). June 11, 2027 — no new Rev5 certifications. Around August 2027 — the next scheduled NIST 800-53 release on the two-year cadence; note Release 5.2.0 (August 27, 2025) already added SA-15(13), SA-24, and SI-2(7), which are not yet mapped in the series' Parts 11/15 closure tables — a tracked action item. 2030/2035 — quantum-vulnerable cryptography is deprecated then prohibited; M-23-02's annual crypto inventories run to that horizon. The bottom bar reminds the audience of the mandates already in force: M-21-31 logging tiers, M-21-07 IPv6 targets, M-22-09 Zero Trust goals (past due but still measured, continued by M-24-14 and M-25-04), and BOD 25-01 SCuBA policies.
+Vendor sources: https://www.fedramp.gov/20x/ | https://www.cisa.gov/news-events/directives/bod-26-04-prioritizing-security-updates-based-risk | https://csrc.nist.gov/News/2025/nist-releases-revision-to-sp-800-53-controls | uiao repo: inbox/Application Aware Networking/federal-aan-conmon-gap-roadmap.md</a:t>
             </a:r>
             <a:endParaRPr lang="en-US" dirty="0"/>
           </a:p>
@@ -1685,8 +1686,8 @@
           <a:p>
             <a:r>
               <a:rPr lang="en-US" dirty="0"/>
-              <a:t>From Appendix A.1 — scoped explicitly to FedRAMP Moderate civilian agencies on M365 GCC; the appendix names the specific combination most such agencies encounter: Cisco Catalyst SD-WAN (the former Viptela platform, acquired 2017, rebranded 2023) plus Microsoft Intelligent Network Routing. Deployment models: on-premises managed (SD-WAN Manager self-hosted in the agency DC or GovCloud) or cloud-delivered (Cisco SaaS, which carries its own FedRAMP authorization surface — verify current status on the Marketplace). The four planes: Management — SD-WAN Manager (vManage), policy authoring, template deployment, telemetry aggregation, audit logging, the authoritative governance surface; Control — the vSmart Controller distributing routing policy via OMP, the fabric's BGP; Orchestration — the vBond Validator doing zero-touch provisioning and authenticating WAN Edges before they join, the single network-facing IP field offices reach to onboard; Data — the WAN Edge (cEdge/ISR/ASR) at the branch, the only plane user packets traverse. The boundary implication: only SD-WAN Manager is cloud-hosted SaaS in the cloud-delivered model; the data plane is hardware inside the agency boundary; control and orchestration run at the agency boundary or in GovCloud — the first question an AO must document. And the amber panel's caveat, common to all SD-WAN platforms: no user identity, no device posture, no data classification by itself — the SASE layer supplies those, and both must be present for the full AAN stack.
-Vendor sources: https://www.cisco.com/site/us/en/products/networking/wan/catalyst-sd-wan/index.html | uiao repo: inbox/Application Aware Networking/Book_05_FedAAN_Network_Modernization.qmd</a:t>
+              <a:t>From Book 05's Federal Framework Alignment table — the defensibility slide: every concept in the forty-year narrative maps to a federal mandate and a standard. A reference table; walk two rows and let the audience read the rest. The rows worth voicing: 'separate truth from runtime enforcement' — the one-sentence thesis — maps to EO 14028 and OMB M-22-09, grounded in NIST SP 800-207's zero trust tenets; and 'continuous monitoring, automated KSI enforcement' maps to the FedRAMP 20x Consolidated Rules with the January 1, 2027 mandatory date, grounded in NIST SP 800-37's CA-7. Other mappings for questions: single source of truth (Evidence Act + Federal Data Strategy; CM-8, SI-12); application-aware per-transaction enforcement (M-22-09 §4; TIC 3.0 Use Cases E and F); phishing-resistant MFA and NTLM elimination (BOD 25-01; ZTMM Identity pillar); SD-WAN local breakout with SASE replacing VPN (TIC 3.0; ZTMM Networks pillar); unified DNS as a security control and IPAM as compliance evidence (FedRAMP Moderate SC-20/21, CM-8 — Book 01's controls); and gated actuation as the governance posture (FedRAMP ConMon; ZTMM Automation and Orchestration pillar). Everything at the Moderate baseline.
+Vendor sources: https://www.cisa.gov/sites/default/files/2023-04/zero_trust_maturity_model_v2_508.pdf | https://csrc.nist.gov/pubs/sp/800/53/r5/upd1/final</a:t>
             </a:r>
             <a:endParaRPr lang="en-US" dirty="0"/>
           </a:p>
@@ -1774,8 +1775,8 @@
           <a:p>
             <a:r>
               <a:rPr lang="en-US" dirty="0"/>
-              <a:t>From Appendix A.2 — Microsoft Intelligent Network Routing is not a product name; it is the operational model through which Microsoft routes M365 traffic across its global private backbone (~200,000 km of dedicated fiber connecting Azure regions, edge PoPs, and peering sites). Once agency traffic reaches a Microsoft edge node, the rest of the journey rides that private backbone with active routing intelligence — congestion is rerouted automatically, in real time, with no agency action. The question federal architects regularly get wrong: where should agency SD-WAN terminate M365 traffic? The front door matters more than the destination: traffic entering at the geographically nearest PoP rides the backbone; traffic backhauled to a central DC first enters at a suboptimal PoP and forfeits the optimization. The physics in one sentence, verbatim: a Teams call from Portland that breaks out locally and enters Microsoft's Seattle PoP has lower latency than the same call backhauled to a DC-area connection entering Ashburn — even though Ashburn is geographically closer to the Teams infrastructure. The three published connectivity principles that drive SD-WAN configuration: local network egress for M365 (implemented as Cloud OnRamp for SaaS policy matching M365 prefixes to DIA/5G paths); avoid network hairpins (FedRAMP-compliant inspection at or near the breakout — Umbrella at the branch or the nearest SASE PoP); differentiate traffic categories (Optimize = Teams media and SharePoint, strictest handling: no inspection, no proxy, no detour; Allow = general M365; Default = standard inspection). TIC 3.0 permits the Optimize proxy exemption ONLY for that category and only to Microsoft-published prefixes.
-Vendor sources: https://learn.microsoft.com/en-us/microsoft-365/enterprise/microsoft-365-network-connectivity-principles | https://www.cisco.com/c/en/us/td/docs/routers/sdwan/configuration/cloudonramp/ios-xe-17/cloud-onramp-book-xe/cor-saas.html</a:t>
+              <a:t>From Appendix A.1 — scoped explicitly to FedRAMP Moderate civilian agencies on M365 GCC; the appendix names the specific combination most such agencies encounter: Cisco Catalyst SD-WAN (the former Viptela platform, acquired 2017, rebranded 2023) plus Microsoft Intelligent Network Routing. Deployment models: on-premises managed (SD-WAN Manager self-hosted in the agency DC or GovCloud) or cloud-delivered (Cisco SaaS, which carries its own FedRAMP authorization surface — verify current status on the Marketplace). The four planes: Management — SD-WAN Manager (vManage), policy authoring, template deployment, telemetry aggregation, audit logging, the authoritative governance surface; Control — the vSmart Controller distributing routing policy via OMP, the fabric's BGP; Orchestration — the vBond Validator doing zero-touch provisioning and authenticating WAN Edges before they join, the single network-facing IP field offices reach to onboard; Data — the WAN Edge (cEdge/ISR/ASR) at the branch, the only plane user packets traverse. The boundary implication: only SD-WAN Manager is cloud-hosted SaaS in the cloud-delivered model; the data plane is hardware inside the agency boundary; control and orchestration run at the agency boundary or in GovCloud — the first question an AO must document. And the amber panel's caveat, common to all SD-WAN platforms: no user identity, no device posture, no data classification by itself — the SASE layer supplies those, and both must be present for the full AAN stack.
+Vendor sources: https://www.cisco.com/site/us/en/products/networking/wan/catalyst-sd-wan/index.html | uiao repo: inbox/Application Aware Networking/Book_05_FedAAN_Network_Modernization.qmd</a:t>
             </a:r>
             <a:endParaRPr lang="en-US" dirty="0"/>
           </a:p>
@@ -1863,8 +1864,8 @@
           <a:p>
             <a:r>
               <a:rPr lang="en-US" dirty="0"/>
-              <a:t>From Appendix A.3 — the integration is Cisco SD-WAN Cloud OnRamp for SaaS, a native Catalyst SD-WAN feature. Mechanics: from each branch WAN Edge, Cloud OnRamp sends periodic HTTP probes to Microsoft's M365 service endpoints — the real front door, not a synthetic target — on every available transport simultaneously (MPLS, DIA, 5G, LEO). It maintains a per-transport quality score per M365 service, and when a Teams call begins, the WAN Edge steers it to whichever transport currently delivers the lowest latency to the Optimize endpoint, re-evaluated continuously rather than at session start only. The escalation ladder in the table: DIA local breakout is good (nearest front door, public internet hand-off); 5G local breakout good-to-excellent; MPLS with a non-MAPS carrier only moderate (the MPLS reach may re-introduce geographic suboptimality); MPLS with a Microsoft Azure Peering Service (MAPS) enrolled carrier is excellent — the carrier hands M365-bound traffic to Microsoft over a private BGP-peered connection, bypassing the public internet entirely while keeping the local-breakout benefit; Azure Virtual WAN integration is excellent for agencies already in Azure (branch IPsec to the nearest Azure region's VWan hub, then Microsoft backbone); and VWan plus MAPS together is optimal — dual private-backbone integration with maximum redundancy. For SSA the practical takeaways: carrier MAPS enrollment is a procurement question to ask NOW, and the Azure Virtual WAN path unifies the WAN topology for an agency already operating Azure Government.
-Vendor sources: https://www.cisco.com/c/en/us/td/docs/routers/sdwan/configuration/cloudonramp/ios-xe-17/cloud-onramp-book-xe/cor-saas.html | https://learn.microsoft.com/en-us/azure/peering-service/about</a:t>
+              <a:t>From Appendix A.2 — Microsoft Intelligent Network Routing is not a product name; it is the operational model through which Microsoft routes M365 traffic across its global private backbone (~200,000 km of dedicated fiber connecting Azure regions, edge PoPs, and peering sites). Once agency traffic reaches a Microsoft edge node, the rest of the journey rides that private backbone with active routing intelligence — congestion is rerouted automatically, in real time, with no agency action. The question federal architects regularly get wrong: where should agency SD-WAN terminate M365 traffic? The front door matters more than the destination: traffic entering at the geographically nearest PoP rides the backbone; traffic backhauled to a central DC first enters at a suboptimal PoP and forfeits the optimization. The physics in one sentence, verbatim: a Teams call from Portland that breaks out locally and enters Microsoft's Seattle PoP has lower latency than the same call backhauled to a DC-area connection entering Ashburn — even though Ashburn is geographically closer to the Teams infrastructure. The three published connectivity principles that drive SD-WAN configuration: local network egress for M365 (implemented as Cloud OnRamp for SaaS policy matching M365 prefixes to DIA/5G paths); avoid network hairpins (FedRAMP-compliant inspection at or near the breakout — Umbrella at the branch or the nearest SASE PoP); differentiate traffic categories (Optimize = Teams media and SharePoint, strictest handling: no inspection, no proxy, no detour; Allow = general M365; Default = standard inspection). TIC 3.0 permits the Optimize proxy exemption ONLY for that category and only to Microsoft-published prefixes.
+Vendor sources: https://learn.microsoft.com/en-us/microsoft-365/enterprise/microsoft-365-network-connectivity-principles | https://www.cisco.com/c/en/us/td/docs/routers/sdwan/configuration/cloudonramp/ios-xe-17/cloud-onramp-book-xe/cor-saas.html</a:t>
             </a:r>
             <a:endParaRPr lang="en-US" dirty="0"/>
           </a:p>
@@ -1952,8 +1953,8 @@
           <a:p>
             <a:r>
               <a:rPr lang="en-US" dirty="0"/>
-              <a:t>From Appendix A.4.1 — the boundary classification table an Authorizing Official needs first. Inside the boundary: the branch WAN Edge hardware (component inventory, CM-8 entry), a self-hosted SD-WAN Manager in GovCloud (full control inheritance), and the vSmart controller. Outside: the cloud-delivered SD-WAN Manager (external service — ISA required, and verify Cisco's current FedRAMP authorization status on the Marketplace before designing the boundary around it); Microsoft M365 GCC (FedRAMP-authorized external service, Microsoft CSP ISA and package reference); the Azure Virtual WAN hub if used (authorized external service with data-flow documentation); and the MAPS carrier hand-off point (carrier service agreement — no federal data at rest at the carrier POP). Cloud OnRamp probes are telemetry only — documented as monitoring telemetry, not a data flow, because no federal data rides in the probe. Land the red banner, verbatim from the book: agencies document the WAN Edge hardware and stop. They do not document the SD-WAN management plane as a separate component with its own authorization surface. If SD-WAN Manager is cloud-hosted by Cisco, it must either be covered by a FedRAMP-authorized Cisco offering or excluded from the boundary with an ISA documenting what data crosses to it — typically configuration and telemetry, not federal mission data. Also brief TIC 3.0 alignment (A.4.2) here if time allows: local breakout is Use Case E-aligned ONLY IF the branch security stack (Umbrella integration) is present, the proxy exemption is limited to the Optimize category, and path-decision plus DNS logs flow to the agency SIEM — the AU-12 evidence contract for the SD-WAN layer.
-Vendor sources: https://www.cisa.gov/resources-tools/programs/trusted-internet-connections-tic | https://www.cisco.com/site/us/en/products/networking/wan/catalyst-sd-wan/index.html</a:t>
+              <a:t>From Appendix A.3 — the integration is Cisco SD-WAN Cloud OnRamp for SaaS, a native Catalyst SD-WAN feature. Mechanics: from each branch WAN Edge, Cloud OnRamp sends periodic HTTP probes to Microsoft's M365 service endpoints — the real front door, not a synthetic target — on every available transport simultaneously (MPLS, DIA, 5G, LEO). It maintains a per-transport quality score per M365 service, and when a Teams call begins, the WAN Edge steers it to whichever transport currently delivers the lowest latency to the Optimize endpoint, re-evaluated continuously rather than at session start only. The escalation ladder in the table: DIA local breakout is good (nearest front door, public internet hand-off); 5G local breakout good-to-excellent; MPLS with a non-MAPS carrier only moderate (the MPLS reach may re-introduce geographic suboptimality); MPLS with a Microsoft Azure Peering Service (MAPS) enrolled carrier is excellent — the carrier hands M365-bound traffic to Microsoft over a private BGP-peered connection, bypassing the public internet entirely while keeping the local-breakout benefit; Azure Virtual WAN integration is excellent for agencies already in Azure (branch IPsec to the nearest Azure region's VWan hub, then Microsoft backbone); and VWan plus MAPS together is optimal — dual private-backbone integration with maximum redundancy. For SSA the practical takeaways: carrier MAPS enrollment is a procurement question to ask NOW, and the Azure Virtual WAN path unifies the WAN topology for an agency already operating Azure Government.
+Vendor sources: https://www.cisco.com/c/en/us/td/docs/routers/sdwan/configuration/cloudonramp/ios-xe-17/cloud-onramp-book-xe/cor-saas.html | https://learn.microsoft.com/en-us/azure/peering-service/about</a:t>
             </a:r>
             <a:endParaRPr lang="en-US" dirty="0"/>
           </a:p>
@@ -2041,8 +2042,8 @@
           <a:p>
             <a:r>
               <a:rPr lang="en-US" dirty="0"/>
-              <a:t>From Appendix A.4.3 and A.5 — all at the FedRAMP Moderate baseline. The nine controls: SC-8 via IPsec tunnels between all WAN Edges including DIA and 5G paths, cipher configurable to FIPS 140-3 validated AES-256-GCM; SC-20/21 via Umbrella DNS-over-HTTPS/TLS with all branch queries resolving through Umbrella; AC-4 via DPI application identification, per-application Cloud OnRamp path policy, and CASB data classification; AU-2/AU-12 via full flow telemetry (WAN Edge ID, source/destination, application ID, path selected, policy applied, timestamp) exported to the SIEM; CA-7 via continuous path-quality metrics and policy-deviation alerts; SI-4 via Cisco XDR/Cyber Vision behavioral anomaly detection plus Umbrella threat intelligence; CM-2 and CM-7 via SD-WAN Manager configuration templates that ARE the authoritative baseline — drift is detected and alerted, and templates enforce hardening (FIPS mode, no local management plane, SNMP off in favor of streaming telemetry); IR-4 via policy-push isolation of a branch or device within seconds, no physical access required. The KSI evidence contracts: KSI-CNA (Cloud OnRamp policy defines authorized M365 egress paths, deviations logged — JSON audit log); KSI-MLA (per-flow structured telemetry and alert correlation); KSI-SVC (configuration compliance against templates via the Manager REST API); KSI-CMT (timestamped change audit — who changed what from what prior state — plus dry-run validation and Git-versioned templates). Everything binds to AAN slot 03, the network control plane slot, in the series' conformance architecture — no additional slot binding required.
-Vendor sources: https://www.cisco.com/site/us/en/products/networking/wan/catalyst-sd-wan/index.html | https://www.fedramp.gov/20x/</a:t>
+              <a:t>From Appendix A.4.1 — the boundary classification table an Authorizing Official needs first. Inside the boundary: the branch WAN Edge hardware (component inventory, CM-8 entry), a self-hosted SD-WAN Manager in GovCloud (full control inheritance), and the vSmart controller. Outside: the cloud-delivered SD-WAN Manager (external service — ISA required, and verify Cisco's current FedRAMP authorization status on the Marketplace before designing the boundary around it); Microsoft M365 GCC (FedRAMP-authorized external service, Microsoft CSP ISA and package reference); the Azure Virtual WAN hub if used (authorized external service with data-flow documentation); and the MAPS carrier hand-off point (carrier service agreement — no federal data at rest at the carrier POP). Cloud OnRamp probes are telemetry only — documented as monitoring telemetry, not a data flow, because no federal data rides in the probe. Land the red banner, verbatim from the book: agencies document the WAN Edge hardware and stop. They do not document the SD-WAN management plane as a separate component with its own authorization surface. If SD-WAN Manager is cloud-hosted by Cisco, it must either be covered by a FedRAMP-authorized Cisco offering or excluded from the boundary with an ISA documenting what data crosses to it — typically configuration and telemetry, not federal mission data. Also brief TIC 3.0 alignment (A.4.2) here if time allows: local breakout is Use Case E-aligned ONLY IF the branch security stack (Umbrella integration) is present, the proxy exemption is limited to the Optimize category, and path-decision plus DNS logs flow to the agency SIEM — the AU-12 evidence contract for the SD-WAN layer.
+Vendor sources: https://www.cisa.gov/resources-tools/programs/trusted-internet-connections-tic | https://www.cisco.com/site/us/en/products/networking/wan/catalyst-sd-wan/index.html</a:t>
             </a:r>
             <a:endParaRPr lang="en-US" dirty="0"/>
           </a:p>
@@ -2130,8 +2131,8 @@
           <a:p>
             <a:r>
               <a:rPr lang="en-US" dirty="0"/>
-              <a:t>From Appendix A.6 — the greenfield FedRAMP Moderate sequence, six steps: (1) Boundary documentation — classify every SD-WAN component against the A.4.1 table; decide self-hosted versus cloud-delivered Manager and verify the cloud option's current FedRAMP Moderate authorization on the Marketplace BEFORE including it; draft ISAs for the external connections. (2) Baseline template development — per-branch-archetype cEdge templates enforcing FIPS mode, no local management plane, Umbrella DNS integration, AES-256-GCM minimum cipher, agency NTP, SNMP disabled in favor of streaming telemetry. (3) Cloud OnRamp policy for M365 — Microsoft's published Optimize and Allow endpoint lists for GCC; validate Teams media steers to the best-measured DIA/5G path and never through a proxy; configure the fallback so degraded local paths fail to MPLS rather than dropping sessions. (4) Umbrella DNS integration — all branch queries through Umbrella with no local-resolver fallback; malicious-domain blocking; CASB tenant restriction preventing personal-tenant use on government devices. (5) SIEM telemetry wiring — streaming export to Sentinel; verify receipt of flow events, policy change audit, path quality, and device compliance; confirm AU-12 evidence per flow. (6) FedRAMP 20x KSI validation — verify the SIEM receives every required structured event per the A.5 contracts, and that the evidence passes the format and completeness checks of the OSCAL bundle assessment-results generator. Voice the scope honesty verbatim: this is decision-maker orientation, not an engineering runbook — site surveys, carrier MAPS qualification, and template development belong to certified Catalyst SD-WAN engineers; the appendix supplies the compliance framing that should govern the engagement from day one.
-Vendor sources: https://www.cisco.com/c/en/us/td/docs/routers/sdwan/configuration/cloudonramp/ios-xe-17/cloud-onramp-book-xe/cor-saas.html | https://www.cisa.gov/resources-tools/programs/trusted-internet-connections-tic</a:t>
+              <a:t>From Appendix A.4.3 and A.5 — all at the FedRAMP Moderate baseline. The nine controls: SC-8 via IPsec tunnels between all WAN Edges including DIA and 5G paths, cipher configurable to FIPS 140-3 validated AES-256-GCM; SC-20/21 via Umbrella DNS-over-HTTPS/TLS with all branch queries resolving through Umbrella; AC-4 via DPI application identification, per-application Cloud OnRamp path policy, and CASB data classification; AU-2/AU-12 via full flow telemetry (WAN Edge ID, source/destination, application ID, path selected, policy applied, timestamp) exported to the SIEM; CA-7 via continuous path-quality metrics and policy-deviation alerts; SI-4 via Cisco XDR/Cyber Vision behavioral anomaly detection plus Umbrella threat intelligence; CM-2 and CM-7 via SD-WAN Manager configuration templates that ARE the authoritative baseline — drift is detected and alerted, and templates enforce hardening (FIPS mode, no local management plane, SNMP off in favor of streaming telemetry); IR-4 via policy-push isolation of a branch or device within seconds, no physical access required. The KSI evidence contracts: KSI-CNA (Cloud OnRamp policy defines authorized M365 egress paths, deviations logged — JSON audit log); KSI-MLA (per-flow structured telemetry and alert correlation); KSI-SVC (configuration compliance against templates via the Manager REST API); KSI-CMT (timestamped change audit — who changed what from what prior state — plus dry-run validation and Git-versioned templates). Everything binds to AAN slot 03, the network control plane slot, in the series' conformance architecture — no additional slot binding required.
+Vendor sources: https://www.cisco.com/site/us/en/products/networking/wan/catalyst-sd-wan/index.html | https://www.fedramp.gov/20x/</a:t>
             </a:r>
             <a:endParaRPr lang="en-US" dirty="0"/>
           </a:p>
@@ -2219,8 +2220,8 @@
           <a:p>
             <a:r>
               <a:rPr lang="en-US" dirty="0"/>
-              <a:t>Closing slide — the forty-year story compressed. The history: truth and enforcement lived in one box; decentralization fragmented the truth across twelve regions without replacing the source; the security era stacked middleboxes that broke the session-based model beneath them; and the cloud era scattered compute across four environments the twelve AD domains could not follow. The diagnosis is the one sentence: AD conflated the directory (truth) with the domain controller (the in-path enforcer) — every symptom in the story traces to it, and NIST SP 800-207 and OMB M-22-09 require the separation. The way forward is the four principles: restore a single source of truth (Book 04 built the feed); enforce application-aware, per-transaction policy (SD-WAN + SASE); move identity into tokens — which only works if the truth behind the authorization is correct (P3 depends on P1); and govern actively with a control plane over the data planes, at gated actuation — the posture an Authorizing Official can sign. The asks: the SD-WAN platform and Manager hosting decision (self-hosted versus Cisco SaaS changes the boundary documentation materially); the MAPS enrollment question to the MPLS carriers now, because it is a procurement lead-time item; TIC 3.0 Use Case E posture approval — branch security stack present, proxy exemption limited to the Optimize category, telemetry to the SIEM; and gated actuation adopted as the governance target maturity. All scoped to FedRAMP Moderate. The Date Code identifies this version; newest code wins. Next in the series: Book 06 develops the TIC 3.0 catalog mapping use case by use case.
-Vendor sources: https://csrc.nist.gov/pubs/sp/800/207/final | uiao repo: inbox/Application Aware Networking/Book_05_FedAAN_Network_Modernization.qmd</a:t>
+              <a:t>From Appendix A.6 — the greenfield FedRAMP Moderate sequence, six steps: (1) Boundary documentation — classify every SD-WAN component against the A.4.1 table; decide self-hosted versus cloud-delivered Manager and verify the cloud option's current FedRAMP Moderate authorization on the Marketplace BEFORE including it; draft ISAs for the external connections. (2) Baseline template development — per-branch-archetype cEdge templates enforcing FIPS mode, no local management plane, Umbrella DNS integration, AES-256-GCM minimum cipher, agency NTP, SNMP disabled in favor of streaming telemetry. (3) Cloud OnRamp policy for M365 — Microsoft's published Optimize and Allow endpoint lists for GCC; validate Teams media steers to the best-measured DIA/5G path and never through a proxy; configure the fallback so degraded local paths fail to MPLS rather than dropping sessions. (4) Umbrella DNS integration — all branch queries through Umbrella with no local-resolver fallback; malicious-domain blocking; CASB tenant restriction preventing personal-tenant use on government devices. (5) SIEM telemetry wiring — streaming export to Sentinel; verify receipt of flow events, policy change audit, path quality, and device compliance; confirm AU-12 evidence per flow. (6) FedRAMP 20x KSI validation — verify the SIEM receives every required structured event per the A.5 contracts, and that the evidence passes the format and completeness checks of the OSCAL bundle assessment-results generator. Voice the scope honesty verbatim: this is decision-maker orientation, not an engineering runbook — site surveys, carrier MAPS qualification, and template development belong to certified Catalyst SD-WAN engineers; the appendix supplies the compliance framing that should govern the engagement from day one.
+Vendor sources: https://www.cisco.com/c/en/us/td/docs/routers/sdwan/configuration/cloudonramp/ios-xe-17/cloud-onramp-book-xe/cor-saas.html | https://www.cisa.gov/resources-tools/programs/trusted-internet-connections-tic</a:t>
             </a:r>
             <a:endParaRPr lang="en-US" dirty="0"/>
           </a:p>
@@ -2244,6 +2245,95 @@
             <a:fld id="{F7021451-1387-4CA6-816F-3879F97B5CBC}" type="slidenum">
               <a:rPr lang="en-US"/>
               <a:t>27</a:t>
+            </a:fld>
+            <a:endParaRPr lang="en-US"/>
+          </a:p>
+        </p:txBody>
+      </p:sp>
+    </p:spTree>
+    <p:extLst>
+      <p:ext uri="{BB962C8B-B14F-4D97-AF65-F5344CB8AC3E}">
+        <p14:creationId xmlns:p14="http://schemas.microsoft.com/office/powerpoint/2010/main" val="1024086991"/>
+      </p:ext>
+    </p:extLst>
+  </p:cSld>
+  <p:clrMapOvr>
+    <a:masterClrMapping/>
+  </p:clrMapOvr>
+</p:notes>
+</file>
+
+<file path=ppt/notesSlides/notesSlide28.xml><?xml version="1.0" encoding="utf-8"?>
+<p:notes xmlns:a="http://schemas.openxmlformats.org/drawingml/2006/main" xmlns:r="http://schemas.openxmlformats.org/officeDocument/2006/relationships" xmlns:p="http://schemas.openxmlformats.org/presentationml/2006/main">
+  <p:cSld>
+    <p:spTree>
+      <p:nvGrpSpPr>
+        <p:cNvPr id="1" name=""/>
+        <p:cNvGrpSpPr/>
+        <p:nvPr/>
+      </p:nvGrpSpPr>
+      <p:grpSpPr>
+        <a:xfrm>
+          <a:off x="0" y="0"/>
+          <a:ext cx="0" cy="0"/>
+          <a:chOff x="0" y="0"/>
+          <a:chExt cx="0" cy="0"/>
+        </a:xfrm>
+      </p:grpSpPr>
+      <p:sp>
+        <p:nvSpPr>
+          <p:cNvPr id="2" name="Slide Image Placeholder 1"/>
+          <p:cNvSpPr>
+            <a:spLocks noGrp="1" noRot="1" noChangeAspect="1"/>
+          </p:cNvSpPr>
+          <p:nvPr>
+            <p:ph type="sldImg"/>
+          </p:nvPr>
+        </p:nvSpPr>
+        <p:spPr/>
+      </p:sp>
+      <p:sp>
+        <p:nvSpPr>
+          <p:cNvPr id="3" name="Notes Placeholder 2"/>
+          <p:cNvSpPr>
+            <a:spLocks noGrp="1"/>
+          </p:cNvSpPr>
+          <p:nvPr>
+            <p:ph type="body" idx="1"/>
+          </p:nvPr>
+        </p:nvSpPr>
+        <p:spPr/>
+        <p:txBody>
+          <a:bodyPr/>
+          <a:lstStyle/>
+          <a:p>
+            <a:r>
+              <a:rPr lang="en-US" dirty="0"/>
+              <a:t>Closing slide — the forty-year story compressed. The history: truth and enforcement lived in one box; decentralization fragmented the truth across twelve regions without replacing the source; the security era stacked middleboxes that broke the session-based model beneath them; and the cloud era scattered compute across four environments the twelve AD domains could not follow. The diagnosis is the one sentence: AD conflated the directory (truth) with the domain controller (the in-path enforcer) — every symptom in the story traces to it, and NIST SP 800-207 and OMB M-22-09 require the separation. The way forward is the four principles: restore a single source of truth (Book 04 built the feed); enforce application-aware, per-transaction policy (SD-WAN + SASE); move identity into tokens — which only works if the truth behind the authorization is correct (P3 depends on P1); and govern actively with a control plane over the data planes, at gated actuation — the posture an Authorizing Official can sign. The asks: the SD-WAN platform and Manager hosting decision (self-hosted versus Cisco SaaS changes the boundary documentation materially); the MAPS enrollment question to the MPLS carriers now, because it is a procurement lead-time item; TIC 3.0 Use Case E posture approval — branch security stack present, proxy exemption limited to the Optimize category, telemetry to the SIEM; and gated actuation adopted as the governance target maturity. All scoped to FedRAMP Moderate. The Date Code identifies this version; newest code wins. Next in the series: Book 06 develops the TIC 3.0 catalog mapping use case by use case.
+Vendor sources: https://csrc.nist.gov/pubs/sp/800/207/final | uiao repo: inbox/Application Aware Networking/Book_05_FedAAN_Network_Modernization.qmd</a:t>
+            </a:r>
+            <a:endParaRPr lang="en-US" dirty="0"/>
+          </a:p>
+        </p:txBody>
+      </p:sp>
+      <p:sp>
+        <p:nvSpPr>
+          <p:cNvPr id="4" name="Slide Number Placeholder 3"/>
+          <p:cNvSpPr>
+            <a:spLocks noGrp="1"/>
+          </p:cNvSpPr>
+          <p:nvPr>
+            <p:ph type="sldNum" sz="quarter" idx="10"/>
+          </p:nvPr>
+        </p:nvSpPr>
+        <p:spPr/>
+        <p:txBody>
+          <a:bodyPr/>
+          <a:lstStyle/>
+          <a:p>
+            <a:fld id="{F7021451-1387-4CA6-816F-3879F97B5CBC}" type="slidenum">
+              <a:rPr lang="en-US"/>
+              <a:t>28</a:t>
             </a:fld>
             <a:endParaRPr lang="en-US"/>
           </a:p>
@@ -3850,7 +3940,7 @@
                 <a:ea typeface="Arial" pitchFamily="34" charset="-122"/>
                 <a:cs typeface="Arial" pitchFamily="34" charset="-120"/>
               </a:rPr>
-              <a:t>Date Code: 2026-07-07 11:36 ET</a:t>
+              <a:t>Date Code: 2026-07-07 11:57 ET</a:t>
             </a:r>
             <a:endParaRPr lang="en-US" sz="1000" dirty="0"/>
           </a:p>
@@ -4065,7 +4155,7 @@
                 <a:ea typeface="Arial" pitchFamily="34" charset="-122"/>
                 <a:cs typeface="Arial" pitchFamily="34" charset="-120"/>
               </a:rPr>
-              <a:t>Federal AAN — Book 05 Network Modernization · CSI Team Draft — Internal · FedRAMP Moderate · Date Code 2026-07-07 11:36 ET</a:t>
+              <a:t>Federal AAN — Book 05 Network Modernization · CSI Team Draft — Internal · FedRAMP Moderate · Date Code 2026-07-07 11:57 ET</a:t>
             </a:r>
             <a:endParaRPr lang="en-US" sz="800" dirty="0"/>
           </a:p>
@@ -4721,7 +4811,7 @@
                 <a:ea typeface="Arial" pitchFamily="34" charset="-122"/>
                 <a:cs typeface="Arial" pitchFamily="34" charset="-120"/>
               </a:rPr>
-              <a:t>Federal AAN — Book 05 Network Modernization · CSI Team Draft — Internal · FedRAMP Moderate · Date Code 2026-07-07 11:36 ET</a:t>
+              <a:t>Federal AAN — Book 05 Network Modernization · CSI Team Draft — Internal · FedRAMP Moderate · Date Code 2026-07-07 11:57 ET</a:t>
             </a:r>
             <a:endParaRPr lang="en-US" sz="800" dirty="0"/>
           </a:p>
@@ -5677,7 +5767,7 @@
                 <a:ea typeface="Arial" pitchFamily="34" charset="-122"/>
                 <a:cs typeface="Arial" pitchFamily="34" charset="-120"/>
               </a:rPr>
-              <a:t>Federal AAN — Book 05 Network Modernization · CSI Team Draft — Internal · FedRAMP Moderate · Date Code 2026-07-07 11:36 ET</a:t>
+              <a:t>Federal AAN — Book 05 Network Modernization · CSI Team Draft — Internal · FedRAMP Moderate · Date Code 2026-07-07 11:57 ET</a:t>
             </a:r>
             <a:endParaRPr lang="en-US" sz="800" dirty="0"/>
           </a:p>
@@ -7610,7 +7700,7 @@
                 <a:ea typeface="Arial" pitchFamily="34" charset="-122"/>
                 <a:cs typeface="Arial" pitchFamily="34" charset="-120"/>
               </a:rPr>
-              <a:t>Federal AAN — Book 05 Network Modernization · CSI Team Draft — Internal · FedRAMP Moderate · Date Code 2026-07-07 11:36 ET</a:t>
+              <a:t>Federal AAN — Book 05 Network Modernization · CSI Team Draft — Internal · FedRAMP Moderate · Date Code 2026-07-07 11:57 ET</a:t>
             </a:r>
             <a:endParaRPr lang="en-US" sz="800" dirty="0"/>
           </a:p>
@@ -9557,7 +9647,7 @@
                 <a:ea typeface="Arial" pitchFamily="34" charset="-122"/>
                 <a:cs typeface="Arial" pitchFamily="34" charset="-120"/>
               </a:rPr>
-              <a:t>Federal AAN — Book 05 Network Modernization · CSI Team Draft — Internal · FedRAMP Moderate · Date Code 2026-07-07 11:36 ET</a:t>
+              <a:t>Federal AAN — Book 05 Network Modernization · CSI Team Draft — Internal · FedRAMP Moderate · Date Code 2026-07-07 11:57 ET</a:t>
             </a:r>
             <a:endParaRPr lang="en-US" sz="800" dirty="0"/>
           </a:p>
@@ -11490,7 +11580,7 @@
                 <a:ea typeface="Arial" pitchFamily="34" charset="-122"/>
                 <a:cs typeface="Arial" pitchFamily="34" charset="-120"/>
               </a:rPr>
-              <a:t>Federal AAN — Book 05 Network Modernization · CSI Team Draft — Internal · FedRAMP Moderate · Date Code 2026-07-07 11:36 ET</a:t>
+              <a:t>Federal AAN — Book 05 Network Modernization · CSI Team Draft — Internal · FedRAMP Moderate · Date Code 2026-07-07 11:57 ET</a:t>
             </a:r>
             <a:endParaRPr lang="en-US" sz="800" dirty="0"/>
           </a:p>
@@ -12268,7 +12358,7 @@
                 <a:ea typeface="Arial" pitchFamily="34" charset="-122"/>
                 <a:cs typeface="Arial" pitchFamily="34" charset="-120"/>
               </a:rPr>
-              <a:t>Federal AAN — Book 05 Network Modernization · CSI Team Draft — Internal · FedRAMP Moderate · Date Code 2026-07-07 11:36 ET</a:t>
+              <a:t>Federal AAN — Book 05 Network Modernization · CSI Team Draft — Internal · FedRAMP Moderate · Date Code 2026-07-07 11:57 ET</a:t>
             </a:r>
             <a:endParaRPr lang="en-US" sz="800" dirty="0"/>
           </a:p>
@@ -13046,7 +13136,7 @@
                 <a:ea typeface="Arial" pitchFamily="34" charset="-122"/>
                 <a:cs typeface="Arial" pitchFamily="34" charset="-120"/>
               </a:rPr>
-              <a:t>Federal AAN — Book 05 Network Modernization · CSI Team Draft — Internal · FedRAMP Moderate · Date Code 2026-07-07 11:36 ET</a:t>
+              <a:t>Federal AAN — Book 05 Network Modernization · CSI Team Draft — Internal · FedRAMP Moderate · Date Code 2026-07-07 11:57 ET</a:t>
             </a:r>
             <a:endParaRPr lang="en-US" sz="800" dirty="0"/>
           </a:p>
@@ -13824,7 +13914,7 @@
                 <a:ea typeface="Arial" pitchFamily="34" charset="-122"/>
                 <a:cs typeface="Arial" pitchFamily="34" charset="-120"/>
               </a:rPr>
-              <a:t>Federal AAN — Book 05 Network Modernization · CSI Team Draft — Internal · FedRAMP Moderate · Date Code 2026-07-07 11:36 ET</a:t>
+              <a:t>Federal AAN — Book 05 Network Modernization · CSI Team Draft — Internal · FedRAMP Moderate · Date Code 2026-07-07 11:57 ET</a:t>
             </a:r>
             <a:endParaRPr lang="en-US" sz="800" dirty="0"/>
           </a:p>
@@ -14602,7 +14692,7 @@
                 <a:ea typeface="Arial" pitchFamily="34" charset="-122"/>
                 <a:cs typeface="Arial" pitchFamily="34" charset="-120"/>
               </a:rPr>
-              <a:t>Federal AAN — Book 05 Network Modernization · CSI Team Draft — Internal · FedRAMP Moderate · Date Code 2026-07-07 11:36 ET</a:t>
+              <a:t>Federal AAN — Book 05 Network Modernization · CSI Team Draft — Internal · FedRAMP Moderate · Date Code 2026-07-07 11:57 ET</a:t>
             </a:r>
             <a:endParaRPr lang="en-US" sz="800" dirty="0"/>
           </a:p>
@@ -15780,7 +15870,7 @@
                 <a:ea typeface="Arial" pitchFamily="34" charset="-122"/>
                 <a:cs typeface="Arial" pitchFamily="34" charset="-120"/>
               </a:rPr>
-              <a:t>Federal AAN — Book 05 Network Modernization · CSI Team Draft — Internal · FedRAMP Moderate · Date Code 2026-07-07 11:36 ET</a:t>
+              <a:t>Federal AAN — Book 05 Network Modernization · CSI Team Draft — Internal · FedRAMP Moderate · Date Code 2026-07-07 11:57 ET</a:t>
             </a:r>
             <a:endParaRPr lang="en-US" sz="800" dirty="0"/>
           </a:p>
@@ -16825,7 +16915,7 @@
                 <a:ea typeface="Arial" pitchFamily="34" charset="-122"/>
                 <a:cs typeface="Arial" pitchFamily="34" charset="-120"/>
               </a:rPr>
-              <a:t>EVERY CLAIM HAS A MANDATE</a:t>
+              <a:t>THE FEDERAL COMPLIANCE CLOCK</a:t>
             </a:r>
             <a:endParaRPr lang="en-US" sz="1100" dirty="0"/>
           </a:p>
@@ -16856,7 +16946,7 @@
               <a:buNone/>
             </a:pPr>
             <a:r>
-              <a:rPr lang="en-US" sz="2200" b="1" dirty="0">
+              <a:rPr lang="en-US" sz="2400" b="1" dirty="0">
                 <a:solidFill>
                   <a:srgbClr val="1F3A5F"/>
                 </a:solidFill>
@@ -16864,9 +16954,9 @@
                 <a:ea typeface="Arial" pitchFamily="34" charset="-122"/>
                 <a:cs typeface="Arial" pitchFamily="34" charset="-120"/>
               </a:rPr>
-              <a:t>Federal framework alignment — the narrative mapped to policy</a:t>
-            </a:r>
-            <a:endParaRPr lang="en-US" sz="2200" dirty="0"/>
+              <a:t>Every deadline running against these controls</a:t>
+            </a:r>
+            <a:endParaRPr lang="en-US" sz="2400" dirty="0"/>
           </a:p>
         </p:txBody>
       </p:sp>
@@ -16903,7 +16993,7 @@
                 <a:ea typeface="Arial" pitchFamily="34" charset="-122"/>
                 <a:cs typeface="Arial" pitchFamily="34" charset="-120"/>
               </a:rPr>
-              <a:t>Federal AAN — Book 05 Network Modernization · CSI Team Draft — Internal · FedRAMP Moderate · Date Code 2026-07-07 11:36 ET</a:t>
+              <a:t>Federal AAN — Book 05 Network Modernization · CSI Team Draft — Internal · FedRAMP Moderate · Date Code 2026-07-07 11:57 ET</a:t>
             </a:r>
             <a:endParaRPr lang="en-US" sz="800" dirty="0"/>
           </a:p>
@@ -16948,9 +17038,1008 @@
           </a:p>
         </p:txBody>
       </p:sp>
+      <p:sp>
+        <p:nvSpPr>
+          <p:cNvPr id="6" name="Shape 4"/>
+          <p:cNvSpPr/>
+          <p:nvPr/>
+        </p:nvSpPr>
+        <p:spPr>
+          <a:xfrm>
+            <a:off x="658368" y="1271016"/>
+            <a:ext cx="118872" cy="118872"/>
+          </a:xfrm>
+          <a:prstGeom prst="ellipse">
+            <a:avLst/>
+          </a:prstGeom>
+          <a:solidFill>
+            <a:srgbClr val="1A9E8F"/>
+          </a:solidFill>
+          <a:ln/>
+        </p:spPr>
+      </p:sp>
+      <p:sp>
+        <p:nvSpPr>
+          <p:cNvPr id="7" name="Text 5"/>
+          <p:cNvSpPr/>
+          <p:nvPr/>
+        </p:nvSpPr>
+        <p:spPr>
+          <a:xfrm>
+            <a:off x="896112" y="1225296"/>
+            <a:ext cx="7818120" cy="365760"/>
+          </a:xfrm>
+          <a:prstGeom prst="rect">
+            <a:avLst/>
+          </a:prstGeom>
+          <a:noFill/>
+          <a:ln/>
+        </p:spPr>
+        <p:txBody>
+          <a:bodyPr wrap="square" lIns="0" tIns="0" rIns="0" bIns="0" rtlCol="0" anchor="t"/>
+          <a:lstStyle/>
+          <a:p>
+            <a:pPr indent="0" marL="0">
+              <a:buNone/>
+            </a:pPr>
+            <a:r>
+              <a:rPr lang="en-US" sz="1000" b="1" dirty="0">
+                <a:solidFill>
+                  <a:srgbClr val="1A9E8F"/>
+                </a:solidFill>
+                <a:latin typeface="Arial" pitchFamily="34" charset="0"/>
+                <a:ea typeface="Arial" pitchFamily="34" charset="-122"/>
+                <a:cs typeface="Arial" pitchFamily="34" charset="-120"/>
+              </a:rPr>
+              <a:t>Aug 3 / 31, 2026  </a:t>
+            </a:r>
+            <a:pPr indent="0" marL="0">
+              <a:buNone/>
+            </a:pPr>
+            <a:r>
+              <a:rPr lang="en-US" sz="950" dirty="0">
+                <a:solidFill>
+                  <a:srgbClr val="1E293B"/>
+                </a:solidFill>
+                <a:latin typeface="Arial" pitchFamily="34" charset="0"/>
+                <a:ea typeface="Arial" pitchFamily="34" charset="-122"/>
+                <a:cs typeface="Arial" pitchFamily="34" charset="-120"/>
+              </a:rPr>
+              <a:t>FedRAMP 20x opens — Class A, then Class B + C: the GCC Moderate window</a:t>
+            </a:r>
+            <a:endParaRPr lang="en-US" sz="1000" dirty="0"/>
+          </a:p>
+        </p:txBody>
+      </p:sp>
+      <p:sp>
+        <p:nvSpPr>
+          <p:cNvPr id="8" name="Shape 6"/>
+          <p:cNvSpPr/>
+          <p:nvPr/>
+        </p:nvSpPr>
+        <p:spPr>
+          <a:xfrm>
+            <a:off x="713232" y="1408176"/>
+            <a:ext cx="0" cy="256032"/>
+          </a:xfrm>
+          <a:prstGeom prst="line">
+            <a:avLst/>
+          </a:prstGeom>
+          <a:noFill/>
+          <a:ln w="19050">
+            <a:solidFill>
+              <a:srgbClr val="C9D4E0"/>
+            </a:solidFill>
+            <a:prstDash val="solid"/>
+          </a:ln>
+        </p:spPr>
+      </p:sp>
+      <p:sp>
+        <p:nvSpPr>
+          <p:cNvPr id="9" name="Shape 7"/>
+          <p:cNvSpPr/>
+          <p:nvPr/>
+        </p:nvSpPr>
+        <p:spPr>
+          <a:xfrm>
+            <a:off x="658368" y="1673352"/>
+            <a:ext cx="118872" cy="118872"/>
+          </a:xfrm>
+          <a:prstGeom prst="ellipse">
+            <a:avLst/>
+          </a:prstGeom>
+          <a:solidFill>
+            <a:srgbClr val="D4860B"/>
+          </a:solidFill>
+          <a:ln/>
+        </p:spPr>
+      </p:sp>
+      <p:sp>
+        <p:nvSpPr>
+          <p:cNvPr id="10" name="Text 8"/>
+          <p:cNvSpPr/>
+          <p:nvPr/>
+        </p:nvSpPr>
+        <p:spPr>
+          <a:xfrm>
+            <a:off x="896112" y="1627632"/>
+            <a:ext cx="7818120" cy="365760"/>
+          </a:xfrm>
+          <a:prstGeom prst="rect">
+            <a:avLst/>
+          </a:prstGeom>
+          <a:noFill/>
+          <a:ln/>
+        </p:spPr>
+        <p:txBody>
+          <a:bodyPr wrap="square" lIns="0" tIns="0" rIns="0" bIns="0" rtlCol="0" anchor="t"/>
+          <a:lstStyle/>
+          <a:p>
+            <a:pPr indent="0" marL="0">
+              <a:buNone/>
+            </a:pPr>
+            <a:r>
+              <a:rPr lang="en-US" sz="1000" b="1" dirty="0">
+                <a:solidFill>
+                  <a:srgbClr val="D4860B"/>
+                </a:solidFill>
+                <a:latin typeface="Arial" pitchFamily="34" charset="0"/>
+                <a:ea typeface="Arial" pitchFamily="34" charset="-122"/>
+                <a:cs typeface="Arial" pitchFamily="34" charset="-120"/>
+              </a:rPr>
+              <a:t>Aug 7, 2026  </a:t>
+            </a:r>
+            <a:pPr indent="0" marL="0">
+              <a:buNone/>
+            </a:pPr>
+            <a:r>
+              <a:rPr lang="en-US" sz="950" dirty="0">
+                <a:solidFill>
+                  <a:srgbClr val="1E293B"/>
+                </a:solidFill>
+                <a:latin typeface="Arial" pitchFamily="34" charset="0"/>
+                <a:ea typeface="Arial" pitchFamily="34" charset="-122"/>
+                <a:cs typeface="Arial" pitchFamily="34" charset="-120"/>
+              </a:rPr>
+              <a:t>BOD 26-04: agency vulnerability-management policies must support risk-based remediation</a:t>
+            </a:r>
+            <a:endParaRPr lang="en-US" sz="1000" dirty="0"/>
+          </a:p>
+        </p:txBody>
+      </p:sp>
+      <p:sp>
+        <p:nvSpPr>
+          <p:cNvPr id="11" name="Shape 9"/>
+          <p:cNvSpPr/>
+          <p:nvPr/>
+        </p:nvSpPr>
+        <p:spPr>
+          <a:xfrm>
+            <a:off x="713232" y="1810512"/>
+            <a:ext cx="0" cy="256032"/>
+          </a:xfrm>
+          <a:prstGeom prst="line">
+            <a:avLst/>
+          </a:prstGeom>
+          <a:noFill/>
+          <a:ln w="19050">
+            <a:solidFill>
+              <a:srgbClr val="C9D4E0"/>
+            </a:solidFill>
+            <a:prstDash val="solid"/>
+          </a:ln>
+        </p:spPr>
+      </p:sp>
+      <p:sp>
+        <p:nvSpPr>
+          <p:cNvPr id="12" name="Shape 10"/>
+          <p:cNvSpPr/>
+          <p:nvPr/>
+        </p:nvSpPr>
+        <p:spPr>
+          <a:xfrm>
+            <a:off x="658368" y="2075688"/>
+            <a:ext cx="118872" cy="118872"/>
+          </a:xfrm>
+          <a:prstGeom prst="ellipse">
+            <a:avLst/>
+          </a:prstGeom>
+          <a:solidFill>
+            <a:srgbClr val="C0392B"/>
+          </a:solidFill>
+          <a:ln/>
+        </p:spPr>
+      </p:sp>
+      <p:sp>
+        <p:nvSpPr>
+          <p:cNvPr id="13" name="Text 11"/>
+          <p:cNvSpPr/>
+          <p:nvPr/>
+        </p:nvSpPr>
+        <p:spPr>
+          <a:xfrm>
+            <a:off x="896112" y="2029968"/>
+            <a:ext cx="7818120" cy="365760"/>
+          </a:xfrm>
+          <a:prstGeom prst="rect">
+            <a:avLst/>
+          </a:prstGeom>
+          <a:noFill/>
+          <a:ln/>
+        </p:spPr>
+        <p:txBody>
+          <a:bodyPr wrap="square" lIns="0" tIns="0" rIns="0" bIns="0" rtlCol="0" anchor="t"/>
+          <a:lstStyle/>
+          <a:p>
+            <a:pPr indent="0" marL="0">
+              <a:buNone/>
+            </a:pPr>
+            <a:r>
+              <a:rPr lang="en-US" sz="1000" b="1" dirty="0">
+                <a:solidFill>
+                  <a:srgbClr val="C0392B"/>
+                </a:solidFill>
+                <a:latin typeface="Arial" pitchFamily="34" charset="0"/>
+                <a:ea typeface="Arial" pitchFamily="34" charset="-122"/>
+                <a:cs typeface="Arial" pitchFamily="34" charset="-120"/>
+              </a:rPr>
+              <a:t>Sep 21, 2026  </a:t>
+            </a:r>
+            <a:pPr indent="0" marL="0">
+              <a:buNone/>
+            </a:pPr>
+            <a:r>
+              <a:rPr lang="en-US" sz="950" dirty="0">
+                <a:solidFill>
+                  <a:srgbClr val="1E293B"/>
+                </a:solidFill>
+                <a:latin typeface="Arial" pitchFamily="34" charset="0"/>
+                <a:ea typeface="Arial" pitchFamily="34" charset="-122"/>
+                <a:cs typeface="Arial" pitchFamily="34" charset="-120"/>
+              </a:rPr>
+              <a:t>FIPS 140-2 certificates move to NIST's Historical List — verify FIPS 140-3 tracking (SC-13)</a:t>
+            </a:r>
+            <a:endParaRPr lang="en-US" sz="1000" dirty="0"/>
+          </a:p>
+        </p:txBody>
+      </p:sp>
+      <p:sp>
+        <p:nvSpPr>
+          <p:cNvPr id="14" name="Shape 12"/>
+          <p:cNvSpPr/>
+          <p:nvPr/>
+        </p:nvSpPr>
+        <p:spPr>
+          <a:xfrm>
+            <a:off x="713232" y="2212848"/>
+            <a:ext cx="0" cy="256032"/>
+          </a:xfrm>
+          <a:prstGeom prst="line">
+            <a:avLst/>
+          </a:prstGeom>
+          <a:noFill/>
+          <a:ln w="19050">
+            <a:solidFill>
+              <a:srgbClr val="C9D4E0"/>
+            </a:solidFill>
+            <a:prstDash val="solid"/>
+          </a:ln>
+        </p:spPr>
+      </p:sp>
+      <p:sp>
+        <p:nvSpPr>
+          <p:cNvPr id="15" name="Shape 13"/>
+          <p:cNvSpPr/>
+          <p:nvPr/>
+        </p:nvSpPr>
+        <p:spPr>
+          <a:xfrm>
+            <a:off x="658368" y="2478024"/>
+            <a:ext cx="118872" cy="118872"/>
+          </a:xfrm>
+          <a:prstGeom prst="ellipse">
+            <a:avLst/>
+          </a:prstGeom>
+          <a:solidFill>
+            <a:srgbClr val="C0392B"/>
+          </a:solidFill>
+          <a:ln/>
+        </p:spPr>
+      </p:sp>
+      <p:sp>
+        <p:nvSpPr>
+          <p:cNvPr id="16" name="Text 14"/>
+          <p:cNvSpPr/>
+          <p:nvPr/>
+        </p:nvSpPr>
+        <p:spPr>
+          <a:xfrm>
+            <a:off x="896112" y="2432304"/>
+            <a:ext cx="7818120" cy="365760"/>
+          </a:xfrm>
+          <a:prstGeom prst="rect">
+            <a:avLst/>
+          </a:prstGeom>
+          <a:noFill/>
+          <a:ln/>
+        </p:spPr>
+        <p:txBody>
+          <a:bodyPr wrap="square" lIns="0" tIns="0" rIns="0" bIns="0" rtlCol="0" anchor="t"/>
+          <a:lstStyle/>
+          <a:p>
+            <a:pPr indent="0" marL="0">
+              <a:buNone/>
+            </a:pPr>
+            <a:r>
+              <a:rPr lang="en-US" sz="1000" b="1" dirty="0">
+                <a:solidFill>
+                  <a:srgbClr val="C0392B"/>
+                </a:solidFill>
+                <a:latin typeface="Arial" pitchFamily="34" charset="0"/>
+                <a:ea typeface="Arial" pitchFamily="34" charset="-122"/>
+                <a:cs typeface="Arial" pitchFamily="34" charset="-120"/>
+              </a:rPr>
+              <a:t>Dec 7, 2026  </a:t>
+            </a:r>
+            <a:pPr indent="0" marL="0">
+              <a:buNone/>
+            </a:pPr>
+            <a:r>
+              <a:rPr lang="en-US" sz="950" dirty="0">
+                <a:solidFill>
+                  <a:srgbClr val="1E293B"/>
+                </a:solidFill>
+                <a:latin typeface="Arial" pitchFamily="34" charset="0"/>
+                <a:ea typeface="Arial" pitchFamily="34" charset="-122"/>
+                <a:cs typeface="Arial" pitchFamily="34" charset="-120"/>
+              </a:rPr>
+              <a:t>BOD 26-04 remediation timelines in force + FedRAMP VDR/VER mandatory (SBOM + vendor disclosure)</a:t>
+            </a:r>
+            <a:endParaRPr lang="en-US" sz="1000" dirty="0"/>
+          </a:p>
+        </p:txBody>
+      </p:sp>
+      <p:sp>
+        <p:nvSpPr>
+          <p:cNvPr id="17" name="Shape 15"/>
+          <p:cNvSpPr/>
+          <p:nvPr/>
+        </p:nvSpPr>
+        <p:spPr>
+          <a:xfrm>
+            <a:off x="713232" y="2615184"/>
+            <a:ext cx="0" cy="256032"/>
+          </a:xfrm>
+          <a:prstGeom prst="line">
+            <a:avLst/>
+          </a:prstGeom>
+          <a:noFill/>
+          <a:ln w="19050">
+            <a:solidFill>
+              <a:srgbClr val="C9D4E0"/>
+            </a:solidFill>
+            <a:prstDash val="solid"/>
+          </a:ln>
+        </p:spPr>
+      </p:sp>
+      <p:sp>
+        <p:nvSpPr>
+          <p:cNvPr id="18" name="Shape 16"/>
+          <p:cNvSpPr/>
+          <p:nvPr/>
+        </p:nvSpPr>
+        <p:spPr>
+          <a:xfrm>
+            <a:off x="658368" y="2880360"/>
+            <a:ext cx="118872" cy="118872"/>
+          </a:xfrm>
+          <a:prstGeom prst="ellipse">
+            <a:avLst/>
+          </a:prstGeom>
+          <a:solidFill>
+            <a:srgbClr val="1F3A5F"/>
+          </a:solidFill>
+          <a:ln/>
+        </p:spPr>
+      </p:sp>
+      <p:sp>
+        <p:nvSpPr>
+          <p:cNvPr id="19" name="Text 17"/>
+          <p:cNvSpPr/>
+          <p:nvPr/>
+        </p:nvSpPr>
+        <p:spPr>
+          <a:xfrm>
+            <a:off x="896112" y="2834640"/>
+            <a:ext cx="7818120" cy="365760"/>
+          </a:xfrm>
+          <a:prstGeom prst="rect">
+            <a:avLst/>
+          </a:prstGeom>
+          <a:noFill/>
+          <a:ln/>
+        </p:spPr>
+        <p:txBody>
+          <a:bodyPr wrap="square" lIns="0" tIns="0" rIns="0" bIns="0" rtlCol="0" anchor="t"/>
+          <a:lstStyle/>
+          <a:p>
+            <a:pPr indent="0" marL="0">
+              <a:buNone/>
+            </a:pPr>
+            <a:r>
+              <a:rPr lang="en-US" sz="1000" b="1" dirty="0">
+                <a:solidFill>
+                  <a:srgbClr val="1F3A5F"/>
+                </a:solidFill>
+                <a:latin typeface="Arial" pitchFamily="34" charset="0"/>
+                <a:ea typeface="Arial" pitchFamily="34" charset="-122"/>
+                <a:cs typeface="Arial" pitchFamily="34" charset="-120"/>
+              </a:rPr>
+              <a:t>Jan 1, 2027  </a:t>
+            </a:r>
+            <a:pPr indent="0" marL="0">
+              <a:buNone/>
+            </a:pPr>
+            <a:r>
+              <a:rPr lang="en-US" sz="950" dirty="0">
+                <a:solidFill>
+                  <a:srgbClr val="1E293B"/>
+                </a:solidFill>
+                <a:latin typeface="Arial" pitchFamily="34" charset="0"/>
+                <a:ea typeface="Arial" pitchFamily="34" charset="-122"/>
+                <a:cs typeface="Arial" pitchFamily="34" charset="-120"/>
+              </a:rPr>
+              <a:t>FedRAMP CR26 mandatory for all · CNSA 2.0 acquisition gate (NSS-scoped; civilian PQC follows)</a:t>
+            </a:r>
+            <a:endParaRPr lang="en-US" sz="1000" dirty="0"/>
+          </a:p>
+        </p:txBody>
+      </p:sp>
+      <p:sp>
+        <p:nvSpPr>
+          <p:cNvPr id="20" name="Shape 18"/>
+          <p:cNvSpPr/>
+          <p:nvPr/>
+        </p:nvSpPr>
+        <p:spPr>
+          <a:xfrm>
+            <a:off x="713232" y="3017520"/>
+            <a:ext cx="0" cy="256032"/>
+          </a:xfrm>
+          <a:prstGeom prst="line">
+            <a:avLst/>
+          </a:prstGeom>
+          <a:noFill/>
+          <a:ln w="19050">
+            <a:solidFill>
+              <a:srgbClr val="C9D4E0"/>
+            </a:solidFill>
+            <a:prstDash val="solid"/>
+          </a:ln>
+        </p:spPr>
+      </p:sp>
+      <p:sp>
+        <p:nvSpPr>
+          <p:cNvPr id="21" name="Shape 19"/>
+          <p:cNvSpPr/>
+          <p:nvPr/>
+        </p:nvSpPr>
+        <p:spPr>
+          <a:xfrm>
+            <a:off x="658368" y="3282696"/>
+            <a:ext cx="118872" cy="118872"/>
+          </a:xfrm>
+          <a:prstGeom prst="ellipse">
+            <a:avLst/>
+          </a:prstGeom>
+          <a:solidFill>
+            <a:srgbClr val="1F3A5F"/>
+          </a:solidFill>
+          <a:ln/>
+        </p:spPr>
+      </p:sp>
+      <p:sp>
+        <p:nvSpPr>
+          <p:cNvPr id="22" name="Text 20"/>
+          <p:cNvSpPr/>
+          <p:nvPr/>
+        </p:nvSpPr>
+        <p:spPr>
+          <a:xfrm>
+            <a:off x="896112" y="3236976"/>
+            <a:ext cx="7818120" cy="365760"/>
+          </a:xfrm>
+          <a:prstGeom prst="rect">
+            <a:avLst/>
+          </a:prstGeom>
+          <a:noFill/>
+          <a:ln/>
+        </p:spPr>
+        <p:txBody>
+          <a:bodyPr wrap="square" lIns="0" tIns="0" rIns="0" bIns="0" rtlCol="0" anchor="t"/>
+          <a:lstStyle/>
+          <a:p>
+            <a:pPr indent="0" marL="0">
+              <a:buNone/>
+            </a:pPr>
+            <a:r>
+              <a:rPr lang="en-US" sz="1000" b="1" dirty="0">
+                <a:solidFill>
+                  <a:srgbClr val="1F3A5F"/>
+                </a:solidFill>
+                <a:latin typeface="Arial" pitchFamily="34" charset="0"/>
+                <a:ea typeface="Arial" pitchFamily="34" charset="-122"/>
+                <a:cs typeface="Arial" pitchFamily="34" charset="-120"/>
+              </a:rPr>
+              <a:t>Jun 11, 2027  </a:t>
+            </a:r>
+            <a:pPr indent="0" marL="0">
+              <a:buNone/>
+            </a:pPr>
+            <a:r>
+              <a:rPr lang="en-US" sz="950" dirty="0">
+                <a:solidFill>
+                  <a:srgbClr val="1E293B"/>
+                </a:solidFill>
+                <a:latin typeface="Arial" pitchFamily="34" charset="0"/>
+                <a:ea typeface="Arial" pitchFamily="34" charset="-122"/>
+                <a:cs typeface="Arial" pitchFamily="34" charset="-120"/>
+              </a:rPr>
+              <a:t>No new Rev5 certifications accepted</a:t>
+            </a:r>
+            <a:endParaRPr lang="en-US" sz="1000" dirty="0"/>
+          </a:p>
+        </p:txBody>
+      </p:sp>
+      <p:sp>
+        <p:nvSpPr>
+          <p:cNvPr id="23" name="Shape 21"/>
+          <p:cNvSpPr/>
+          <p:nvPr/>
+        </p:nvSpPr>
+        <p:spPr>
+          <a:xfrm>
+            <a:off x="713232" y="3419856"/>
+            <a:ext cx="0" cy="256032"/>
+          </a:xfrm>
+          <a:prstGeom prst="line">
+            <a:avLst/>
+          </a:prstGeom>
+          <a:noFill/>
+          <a:ln w="19050">
+            <a:solidFill>
+              <a:srgbClr val="C9D4E0"/>
+            </a:solidFill>
+            <a:prstDash val="solid"/>
+          </a:ln>
+        </p:spPr>
+      </p:sp>
+      <p:sp>
+        <p:nvSpPr>
+          <p:cNvPr id="24" name="Shape 22"/>
+          <p:cNvSpPr/>
+          <p:nvPr/>
+        </p:nvSpPr>
+        <p:spPr>
+          <a:xfrm>
+            <a:off x="658368" y="3685032"/>
+            <a:ext cx="118872" cy="118872"/>
+          </a:xfrm>
+          <a:prstGeom prst="ellipse">
+            <a:avLst/>
+          </a:prstGeom>
+          <a:solidFill>
+            <a:srgbClr val="D4860B"/>
+          </a:solidFill>
+          <a:ln/>
+        </p:spPr>
+      </p:sp>
+      <p:sp>
+        <p:nvSpPr>
+          <p:cNvPr id="25" name="Text 23"/>
+          <p:cNvSpPr/>
+          <p:nvPr/>
+        </p:nvSpPr>
+        <p:spPr>
+          <a:xfrm>
+            <a:off x="896112" y="3639312"/>
+            <a:ext cx="7818120" cy="365760"/>
+          </a:xfrm>
+          <a:prstGeom prst="rect">
+            <a:avLst/>
+          </a:prstGeom>
+          <a:noFill/>
+          <a:ln/>
+        </p:spPr>
+        <p:txBody>
+          <a:bodyPr wrap="square" lIns="0" tIns="0" rIns="0" bIns="0" rtlCol="0" anchor="t"/>
+          <a:lstStyle/>
+          <a:p>
+            <a:pPr indent="0" marL="0">
+              <a:buNone/>
+            </a:pPr>
+            <a:r>
+              <a:rPr lang="en-US" sz="1000" b="1" dirty="0">
+                <a:solidFill>
+                  <a:srgbClr val="D4860B"/>
+                </a:solidFill>
+                <a:latin typeface="Arial" pitchFamily="34" charset="0"/>
+                <a:ea typeface="Arial" pitchFamily="34" charset="-122"/>
+                <a:cs typeface="Arial" pitchFamily="34" charset="-120"/>
+              </a:rPr>
+              <a:t>~Aug 2027  </a:t>
+            </a:r>
+            <a:pPr indent="0" marL="0">
+              <a:buNone/>
+            </a:pPr>
+            <a:r>
+              <a:rPr lang="en-US" sz="950" dirty="0">
+                <a:solidFill>
+                  <a:srgbClr val="1E293B"/>
+                </a:solidFill>
+                <a:latin typeface="Arial" pitchFamily="34" charset="0"/>
+                <a:ea typeface="Arial" pitchFamily="34" charset="-122"/>
+                <a:cs typeface="Arial" pitchFamily="34" charset="-120"/>
+              </a:rPr>
+              <a:t>Next scheduled NIST 800-53 release — 5.2.0 (Aug 2025) already added SA-15(13), SA-24, SI-2(7)</a:t>
+            </a:r>
+            <a:endParaRPr lang="en-US" sz="1000" dirty="0"/>
+          </a:p>
+        </p:txBody>
+      </p:sp>
+      <p:sp>
+        <p:nvSpPr>
+          <p:cNvPr id="26" name="Shape 24"/>
+          <p:cNvSpPr/>
+          <p:nvPr/>
+        </p:nvSpPr>
+        <p:spPr>
+          <a:xfrm>
+            <a:off x="713232" y="3822192"/>
+            <a:ext cx="0" cy="256032"/>
+          </a:xfrm>
+          <a:prstGeom prst="line">
+            <a:avLst/>
+          </a:prstGeom>
+          <a:noFill/>
+          <a:ln w="19050">
+            <a:solidFill>
+              <a:srgbClr val="C9D4E0"/>
+            </a:solidFill>
+            <a:prstDash val="solid"/>
+          </a:ln>
+        </p:spPr>
+      </p:sp>
+      <p:sp>
+        <p:nvSpPr>
+          <p:cNvPr id="27" name="Shape 25"/>
+          <p:cNvSpPr/>
+          <p:nvPr/>
+        </p:nvSpPr>
+        <p:spPr>
+          <a:xfrm>
+            <a:off x="658368" y="4087368"/>
+            <a:ext cx="118872" cy="118872"/>
+          </a:xfrm>
+          <a:prstGeom prst="ellipse">
+            <a:avLst/>
+          </a:prstGeom>
+          <a:solidFill>
+            <a:srgbClr val="5B6B7C"/>
+          </a:solidFill>
+          <a:ln/>
+        </p:spPr>
+      </p:sp>
+      <p:sp>
+        <p:nvSpPr>
+          <p:cNvPr id="28" name="Text 26"/>
+          <p:cNvSpPr/>
+          <p:nvPr/>
+        </p:nvSpPr>
+        <p:spPr>
+          <a:xfrm>
+            <a:off x="896112" y="4041648"/>
+            <a:ext cx="7818120" cy="365760"/>
+          </a:xfrm>
+          <a:prstGeom prst="rect">
+            <a:avLst/>
+          </a:prstGeom>
+          <a:noFill/>
+          <a:ln/>
+        </p:spPr>
+        <p:txBody>
+          <a:bodyPr wrap="square" lIns="0" tIns="0" rIns="0" bIns="0" rtlCol="0" anchor="t"/>
+          <a:lstStyle/>
+          <a:p>
+            <a:pPr indent="0" marL="0">
+              <a:buNone/>
+            </a:pPr>
+            <a:r>
+              <a:rPr lang="en-US" sz="1000" b="1" dirty="0">
+                <a:solidFill>
+                  <a:srgbClr val="5B6B7C"/>
+                </a:solidFill>
+                <a:latin typeface="Arial" pitchFamily="34" charset="0"/>
+                <a:ea typeface="Arial" pitchFamily="34" charset="-122"/>
+                <a:cs typeface="Arial" pitchFamily="34" charset="-120"/>
+              </a:rPr>
+              <a:t>2030 / 2035  </a:t>
+            </a:r>
+            <a:pPr indent="0" marL="0">
+              <a:buNone/>
+            </a:pPr>
+            <a:r>
+              <a:rPr lang="en-US" sz="950" dirty="0">
+                <a:solidFill>
+                  <a:srgbClr val="1E293B"/>
+                </a:solidFill>
+                <a:latin typeface="Arial" pitchFamily="34" charset="0"/>
+                <a:ea typeface="Arial" pitchFamily="34" charset="-122"/>
+                <a:cs typeface="Arial" pitchFamily="34" charset="-120"/>
+              </a:rPr>
+              <a:t>Quantum-vulnerable cryptography deprecated, then prohibited — M-23-02 inventories run to the horizon</a:t>
+            </a:r>
+            <a:endParaRPr lang="en-US" sz="1000" dirty="0"/>
+          </a:p>
+        </p:txBody>
+      </p:sp>
+      <p:sp>
+        <p:nvSpPr>
+          <p:cNvPr id="29" name="Shape 27"/>
+          <p:cNvSpPr/>
+          <p:nvPr/>
+        </p:nvSpPr>
+        <p:spPr>
+          <a:xfrm>
+            <a:off x="502920" y="4462272"/>
+            <a:ext cx="8229600" cy="365760"/>
+          </a:xfrm>
+          <a:prstGeom prst="roundRect">
+            <a:avLst>
+              <a:gd name="adj" fmla="val 17500"/>
+            </a:avLst>
+          </a:prstGeom>
+          <a:solidFill>
+            <a:srgbClr val="EDF3F9"/>
+          </a:solidFill>
+          <a:ln w="9525">
+            <a:solidFill>
+              <a:srgbClr val="C9D4E0"/>
+            </a:solidFill>
+            <a:prstDash val="solid"/>
+          </a:ln>
+        </p:spPr>
+      </p:sp>
+      <p:sp>
+        <p:nvSpPr>
+          <p:cNvPr id="30" name="Text 28"/>
+          <p:cNvSpPr/>
+          <p:nvPr/>
+        </p:nvSpPr>
+        <p:spPr>
+          <a:xfrm>
+            <a:off x="731520" y="4462272"/>
+            <a:ext cx="7772400" cy="365760"/>
+          </a:xfrm>
+          <a:prstGeom prst="rect">
+            <a:avLst/>
+          </a:prstGeom>
+          <a:noFill/>
+          <a:ln/>
+        </p:spPr>
+        <p:txBody>
+          <a:bodyPr wrap="square" lIns="0" tIns="0" rIns="0" bIns="0" rtlCol="0" anchor="ctr"/>
+          <a:lstStyle/>
+          <a:p>
+            <a:pPr indent="0" marL="0">
+              <a:buNone/>
+            </a:pPr>
+            <a:r>
+              <a:rPr lang="en-US" sz="850" b="1" dirty="0">
+                <a:solidFill>
+                  <a:srgbClr val="1F3A5F"/>
+                </a:solidFill>
+                <a:latin typeface="Arial" pitchFamily="34" charset="0"/>
+                <a:ea typeface="Arial" pitchFamily="34" charset="-122"/>
+                <a:cs typeface="Arial" pitchFamily="34" charset="-120"/>
+              </a:rPr>
+              <a:t>SSOT for federal dates: the Federal AAN / ConMon Gap Roadmap (verified 2026-07-07). Already in force: M-21-31 logging, M-21-07 IPv6, M-22-09 Zero Trust (continued by M-24-14 / M-25-04), BOD 25-01 SCuBA.</a:t>
+            </a:r>
+            <a:endParaRPr lang="en-US" sz="850" dirty="0"/>
+          </a:p>
+        </p:txBody>
+      </p:sp>
+    </p:spTree>
+  </p:cSld>
+  <p:clrMapOvr>
+    <a:masterClrMapping/>
+  </p:clrMapOvr>
+</p:sld>
+</file>
+
+<file path=ppt/slides/slide21.xml><?xml version="1.0" encoding="utf-8"?>
+<p:sld xmlns:a="http://schemas.openxmlformats.org/drawingml/2006/main" xmlns:r="http://schemas.openxmlformats.org/officeDocument/2006/relationships" xmlns:p="http://schemas.openxmlformats.org/presentationml/2006/main">
+  <p:cSld name="Slide 21">
+    <p:bg>
+      <p:bgPr>
+        <a:solidFill>
+          <a:srgbClr val="FFFFFF"/>
+        </a:solidFill>
+      </p:bgPr>
+    </p:bg>
+    <p:spTree>
+      <p:nvGrpSpPr>
+        <p:cNvPr id="1" name=""/>
+        <p:cNvGrpSpPr/>
+        <p:nvPr/>
+      </p:nvGrpSpPr>
+      <p:grpSpPr>
+        <a:xfrm>
+          <a:off x="0" y="0"/>
+          <a:ext cx="0" cy="0"/>
+          <a:chOff x="0" y="0"/>
+          <a:chExt cx="0" cy="0"/>
+        </a:xfrm>
+      </p:grpSpPr>
+      <p:sp>
+        <p:nvSpPr>
+          <p:cNvPr id="2" name="Text 0"/>
+          <p:cNvSpPr/>
+          <p:nvPr/>
+        </p:nvSpPr>
+        <p:spPr>
+          <a:xfrm>
+            <a:off x="502920" y="256032"/>
+            <a:ext cx="8229600" cy="274320"/>
+          </a:xfrm>
+          <a:prstGeom prst="rect">
+            <a:avLst/>
+          </a:prstGeom>
+          <a:noFill/>
+          <a:ln/>
+        </p:spPr>
+        <p:txBody>
+          <a:bodyPr wrap="square" lIns="0" tIns="0" rIns="0" bIns="0" rtlCol="0" anchor="ctr"/>
+          <a:lstStyle/>
+          <a:p>
+            <a:pPr indent="0" marL="0">
+              <a:buNone/>
+            </a:pPr>
+            <a:r>
+              <a:rPr lang="en-US" sz="1100" b="1" spc="200" kern="0" dirty="0">
+                <a:solidFill>
+                  <a:srgbClr val="1A9E8F"/>
+                </a:solidFill>
+                <a:latin typeface="Arial" pitchFamily="34" charset="0"/>
+                <a:ea typeface="Arial" pitchFamily="34" charset="-122"/>
+                <a:cs typeface="Arial" pitchFamily="34" charset="-120"/>
+              </a:rPr>
+              <a:t>EVERY CLAIM HAS A MANDATE</a:t>
+            </a:r>
+            <a:endParaRPr lang="en-US" sz="1100" dirty="0"/>
+          </a:p>
+        </p:txBody>
+      </p:sp>
+      <p:sp>
+        <p:nvSpPr>
+          <p:cNvPr id="3" name="Text 1"/>
+          <p:cNvSpPr/>
+          <p:nvPr/>
+        </p:nvSpPr>
+        <p:spPr>
+          <a:xfrm>
+            <a:off x="502920" y="512064"/>
+            <a:ext cx="8138160" cy="566928"/>
+          </a:xfrm>
+          <a:prstGeom prst="rect">
+            <a:avLst/>
+          </a:prstGeom>
+          <a:noFill/>
+          <a:ln/>
+        </p:spPr>
+        <p:txBody>
+          <a:bodyPr wrap="square" lIns="0" tIns="0" rIns="0" bIns="0" rtlCol="0" anchor="ctr"/>
+          <a:lstStyle/>
+          <a:p>
+            <a:pPr indent="0" marL="0">
+              <a:buNone/>
+            </a:pPr>
+            <a:r>
+              <a:rPr lang="en-US" sz="2200" b="1" dirty="0">
+                <a:solidFill>
+                  <a:srgbClr val="1F3A5F"/>
+                </a:solidFill>
+                <a:latin typeface="Arial" pitchFamily="34" charset="0"/>
+                <a:ea typeface="Arial" pitchFamily="34" charset="-122"/>
+                <a:cs typeface="Arial" pitchFamily="34" charset="-120"/>
+              </a:rPr>
+              <a:t>Federal framework alignment — the narrative mapped to policy</a:t>
+            </a:r>
+            <a:endParaRPr lang="en-US" sz="2200" dirty="0"/>
+          </a:p>
+        </p:txBody>
+      </p:sp>
+      <p:sp>
+        <p:nvSpPr>
+          <p:cNvPr id="4" name="Text 2"/>
+          <p:cNvSpPr/>
+          <p:nvPr/>
+        </p:nvSpPr>
+        <p:spPr>
+          <a:xfrm>
+            <a:off x="502920" y="4864608"/>
+            <a:ext cx="7315200" cy="219456"/>
+          </a:xfrm>
+          <a:prstGeom prst="rect">
+            <a:avLst/>
+          </a:prstGeom>
+          <a:noFill/>
+          <a:ln/>
+        </p:spPr>
+        <p:txBody>
+          <a:bodyPr wrap="square" lIns="0" tIns="0" rIns="0" bIns="0" rtlCol="0" anchor="ctr"/>
+          <a:lstStyle/>
+          <a:p>
+            <a:pPr indent="0" marL="0">
+              <a:buNone/>
+            </a:pPr>
+            <a:r>
+              <a:rPr lang="en-US" sz="800" dirty="0">
+                <a:solidFill>
+                  <a:srgbClr val="5B6B7C"/>
+                </a:solidFill>
+                <a:latin typeface="Arial" pitchFamily="34" charset="0"/>
+                <a:ea typeface="Arial" pitchFamily="34" charset="-122"/>
+                <a:cs typeface="Arial" pitchFamily="34" charset="-120"/>
+              </a:rPr>
+              <a:t>Federal AAN — Book 05 Network Modernization · CSI Team Draft — Internal · FedRAMP Moderate · Date Code 2026-07-07 11:57 ET</a:t>
+            </a:r>
+            <a:endParaRPr lang="en-US" sz="800" dirty="0"/>
+          </a:p>
+        </p:txBody>
+      </p:sp>
+      <p:sp>
+        <p:nvSpPr>
+          <p:cNvPr id="5" name="Text 3"/>
+          <p:cNvSpPr/>
+          <p:nvPr/>
+        </p:nvSpPr>
+        <p:spPr>
+          <a:xfrm>
+            <a:off x="8412480" y="4864608"/>
+            <a:ext cx="320040" cy="219456"/>
+          </a:xfrm>
+          <a:prstGeom prst="rect">
+            <a:avLst/>
+          </a:prstGeom>
+          <a:noFill/>
+          <a:ln/>
+        </p:spPr>
+        <p:txBody>
+          <a:bodyPr wrap="square" lIns="0" tIns="0" rIns="0" bIns="0" rtlCol="0" anchor="ctr"/>
+          <a:lstStyle/>
+          <a:p>
+            <a:pPr algn="r" indent="0" marL="0">
+              <a:buNone/>
+            </a:pPr>
+            <a:r>
+              <a:rPr lang="en-US" sz="800" dirty="0">
+                <a:solidFill>
+                  <a:srgbClr val="5B6B7C"/>
+                </a:solidFill>
+                <a:latin typeface="Arial" pitchFamily="34" charset="0"/>
+                <a:ea typeface="Arial" pitchFamily="34" charset="-122"/>
+                <a:cs typeface="Arial" pitchFamily="34" charset="-120"/>
+              </a:rPr>
+              <a:t>21</a:t>
+            </a:r>
+            <a:endParaRPr lang="en-US" sz="800" dirty="0"/>
+          </a:p>
+        </p:txBody>
+      </p:sp>
       <p:graphicFrame>
         <p:nvGraphicFramePr>
-          <p:cNvPr id="21" name="Table 0"/>
+          <p:cNvPr id="22" name="Table 0"/>
           <p:cNvGraphicFramePr>
             <a:graphicFrameLocks noGrp="1"/>
           </p:cNvGraphicFramePr>
@@ -18841,9 +19930,9 @@
 </p:sld>
 </file>
 
-<file path=ppt/slides/slide21.xml><?xml version="1.0" encoding="utf-8"?>
+<file path=ppt/slides/slide22.xml><?xml version="1.0" encoding="utf-8"?>
 <p:sld xmlns:a="http://schemas.openxmlformats.org/drawingml/2006/main" xmlns:r="http://schemas.openxmlformats.org/officeDocument/2006/relationships" xmlns:p="http://schemas.openxmlformats.org/presentationml/2006/main">
-  <p:cSld name="Slide 21">
+  <p:cSld name="Slide 22">
     <p:bg>
       <p:bgPr>
         <a:solidFill>
@@ -18976,7 +20065,7 @@
                 <a:ea typeface="Arial" pitchFamily="34" charset="-122"/>
                 <a:cs typeface="Arial" pitchFamily="34" charset="-120"/>
               </a:rPr>
-              <a:t>Federal AAN — Book 05 Network Modernization · CSI Team Draft — Internal · FedRAMP Moderate · Date Code 2026-07-07 11:36 ET</a:t>
+              <a:t>Federal AAN — Book 05 Network Modernization · CSI Team Draft — Internal · FedRAMP Moderate · Date Code 2026-07-07 11:57 ET</a:t>
             </a:r>
             <a:endParaRPr lang="en-US" sz="800" dirty="0"/>
           </a:p>
@@ -19015,7 +20104,7 @@
                 <a:ea typeface="Arial" pitchFamily="34" charset="-122"/>
                 <a:cs typeface="Arial" pitchFamily="34" charset="-120"/>
               </a:rPr>
-              <a:t>21</a:t>
+              <a:t>22</a:t>
             </a:r>
             <a:endParaRPr lang="en-US" sz="800" dirty="0"/>
           </a:p>
@@ -19023,7 +20112,7 @@
       </p:sp>
       <p:graphicFrame>
         <p:nvGraphicFramePr>
-          <p:cNvPr id="22" name="Table 0"/>
+          <p:cNvPr id="23" name="Table 0"/>
           <p:cNvGraphicFramePr>
             <a:graphicFrameLocks noGrp="1"/>
           </p:cNvGraphicFramePr>
@@ -20170,679 +21259,6 @@
 </p:sld>
 </file>
 
-<file path=ppt/slides/slide22.xml><?xml version="1.0" encoding="utf-8"?>
-<p:sld xmlns:a="http://schemas.openxmlformats.org/drawingml/2006/main" xmlns:r="http://schemas.openxmlformats.org/officeDocument/2006/relationships" xmlns:p="http://schemas.openxmlformats.org/presentationml/2006/main">
-  <p:cSld name="Slide 22">
-    <p:bg>
-      <p:bgPr>
-        <a:solidFill>
-          <a:srgbClr val="FFFFFF"/>
-        </a:solidFill>
-      </p:bgPr>
-    </p:bg>
-    <p:spTree>
-      <p:nvGrpSpPr>
-        <p:cNvPr id="1" name=""/>
-        <p:cNvGrpSpPr/>
-        <p:nvPr/>
-      </p:nvGrpSpPr>
-      <p:grpSpPr>
-        <a:xfrm>
-          <a:off x="0" y="0"/>
-          <a:ext cx="0" cy="0"/>
-          <a:chOff x="0" y="0"/>
-          <a:chExt cx="0" cy="0"/>
-        </a:xfrm>
-      </p:grpSpPr>
-      <p:sp>
-        <p:nvSpPr>
-          <p:cNvPr id="2" name="Text 0"/>
-          <p:cNvSpPr/>
-          <p:nvPr/>
-        </p:nvSpPr>
-        <p:spPr>
-          <a:xfrm>
-            <a:off x="502920" y="256032"/>
-            <a:ext cx="8229600" cy="274320"/>
-          </a:xfrm>
-          <a:prstGeom prst="rect">
-            <a:avLst/>
-          </a:prstGeom>
-          <a:noFill/>
-          <a:ln/>
-        </p:spPr>
-        <p:txBody>
-          <a:bodyPr wrap="square" lIns="0" tIns="0" rIns="0" bIns="0" rtlCol="0" anchor="ctr"/>
-          <a:lstStyle/>
-          <a:p>
-            <a:pPr indent="0" marL="0">
-              <a:buNone/>
-            </a:pPr>
-            <a:r>
-              <a:rPr lang="en-US" sz="1100" b="1" spc="200" kern="0" dirty="0">
-                <a:solidFill>
-                  <a:srgbClr val="1A9E8F"/>
-                </a:solidFill>
-                <a:latin typeface="Arial" pitchFamily="34" charset="0"/>
-                <a:ea typeface="Arial" pitchFamily="34" charset="-122"/>
-                <a:cs typeface="Arial" pitchFamily="34" charset="-120"/>
-              </a:rPr>
-              <a:t>APPENDIX — THE MICROSOFT HALF</a:t>
-            </a:r>
-            <a:endParaRPr lang="en-US" sz="1100" dirty="0"/>
-          </a:p>
-        </p:txBody>
-      </p:sp>
-      <p:sp>
-        <p:nvSpPr>
-          <p:cNvPr id="3" name="Text 1"/>
-          <p:cNvSpPr/>
-          <p:nvPr/>
-        </p:nvSpPr>
-        <p:spPr>
-          <a:xfrm>
-            <a:off x="502920" y="512064"/>
-            <a:ext cx="8138160" cy="566928"/>
-          </a:xfrm>
-          <a:prstGeom prst="rect">
-            <a:avLst/>
-          </a:prstGeom>
-          <a:noFill/>
-          <a:ln/>
-        </p:spPr>
-        <p:txBody>
-          <a:bodyPr wrap="square" lIns="0" tIns="0" rIns="0" bIns="0" rtlCol="0" anchor="ctr"/>
-          <a:lstStyle/>
-          <a:p>
-            <a:pPr indent="0" marL="0">
-              <a:buNone/>
-            </a:pPr>
-            <a:r>
-              <a:rPr lang="en-US" sz="2300" b="1" dirty="0">
-                <a:solidFill>
-                  <a:srgbClr val="1F3A5F"/>
-                </a:solidFill>
-                <a:latin typeface="Arial" pitchFamily="34" charset="0"/>
-                <a:ea typeface="Arial" pitchFamily="34" charset="-122"/>
-                <a:cs typeface="Arial" pitchFamily="34" charset="-120"/>
-              </a:rPr>
-              <a:t>INR: the front door matters more than the destination</a:t>
-            </a:r>
-            <a:endParaRPr lang="en-US" sz="2300" dirty="0"/>
-          </a:p>
-        </p:txBody>
-      </p:sp>
-      <p:sp>
-        <p:nvSpPr>
-          <p:cNvPr id="4" name="Text 2"/>
-          <p:cNvSpPr/>
-          <p:nvPr/>
-        </p:nvSpPr>
-        <p:spPr>
-          <a:xfrm>
-            <a:off x="502920" y="4864608"/>
-            <a:ext cx="7315200" cy="219456"/>
-          </a:xfrm>
-          <a:prstGeom prst="rect">
-            <a:avLst/>
-          </a:prstGeom>
-          <a:noFill/>
-          <a:ln/>
-        </p:spPr>
-        <p:txBody>
-          <a:bodyPr wrap="square" lIns="0" tIns="0" rIns="0" bIns="0" rtlCol="0" anchor="ctr"/>
-          <a:lstStyle/>
-          <a:p>
-            <a:pPr indent="0" marL="0">
-              <a:buNone/>
-            </a:pPr>
-            <a:r>
-              <a:rPr lang="en-US" sz="800" dirty="0">
-                <a:solidFill>
-                  <a:srgbClr val="5B6B7C"/>
-                </a:solidFill>
-                <a:latin typeface="Arial" pitchFamily="34" charset="0"/>
-                <a:ea typeface="Arial" pitchFamily="34" charset="-122"/>
-                <a:cs typeface="Arial" pitchFamily="34" charset="-120"/>
-              </a:rPr>
-              <a:t>Federal AAN — Book 05 Network Modernization · CSI Team Draft — Internal · FedRAMP Moderate · Date Code 2026-07-07 11:36 ET</a:t>
-            </a:r>
-            <a:endParaRPr lang="en-US" sz="800" dirty="0"/>
-          </a:p>
-        </p:txBody>
-      </p:sp>
-      <p:sp>
-        <p:nvSpPr>
-          <p:cNvPr id="5" name="Text 3"/>
-          <p:cNvSpPr/>
-          <p:nvPr/>
-        </p:nvSpPr>
-        <p:spPr>
-          <a:xfrm>
-            <a:off x="8412480" y="4864608"/>
-            <a:ext cx="320040" cy="219456"/>
-          </a:xfrm>
-          <a:prstGeom prst="rect">
-            <a:avLst/>
-          </a:prstGeom>
-          <a:noFill/>
-          <a:ln/>
-        </p:spPr>
-        <p:txBody>
-          <a:bodyPr wrap="square" lIns="0" tIns="0" rIns="0" bIns="0" rtlCol="0" anchor="ctr"/>
-          <a:lstStyle/>
-          <a:p>
-            <a:pPr algn="r" indent="0" marL="0">
-              <a:buNone/>
-            </a:pPr>
-            <a:r>
-              <a:rPr lang="en-US" sz="800" dirty="0">
-                <a:solidFill>
-                  <a:srgbClr val="5B6B7C"/>
-                </a:solidFill>
-                <a:latin typeface="Arial" pitchFamily="34" charset="0"/>
-                <a:ea typeface="Arial" pitchFamily="34" charset="-122"/>
-                <a:cs typeface="Arial" pitchFamily="34" charset="-120"/>
-              </a:rPr>
-              <a:t>22</a:t>
-            </a:r>
-            <a:endParaRPr lang="en-US" sz="800" dirty="0"/>
-          </a:p>
-        </p:txBody>
-      </p:sp>
-      <p:sp>
-        <p:nvSpPr>
-          <p:cNvPr id="6" name="Shape 4"/>
-          <p:cNvSpPr/>
-          <p:nvPr/>
-        </p:nvSpPr>
-        <p:spPr>
-          <a:xfrm>
-            <a:off x="502920" y="1280160"/>
-            <a:ext cx="4041648" cy="2103120"/>
-          </a:xfrm>
-          <a:prstGeom prst="roundRect">
-            <a:avLst>
-              <a:gd name="adj" fmla="val 3043"/>
-            </a:avLst>
-          </a:prstGeom>
-          <a:solidFill>
-            <a:srgbClr val="FFFFFF"/>
-          </a:solidFill>
-          <a:ln w="9525">
-            <a:solidFill>
-              <a:srgbClr val="C9D4E0"/>
-            </a:solidFill>
-            <a:prstDash val="solid"/>
-          </a:ln>
-          <a:effectLst>
-            <a:outerShdw sx="100000" sy="100000" kx="0" ky="0" algn="bl" rotWithShape="0" blurRad="88900" dist="25400" dir="2700000">
-              <a:srgbClr val="000000">
-                <a:alpha val="14000"/>
-              </a:srgbClr>
-            </a:outerShdw>
-          </a:effectLst>
-        </p:spPr>
-      </p:sp>
-      <p:sp>
-        <p:nvSpPr>
-          <p:cNvPr id="7" name="Shape 5"/>
-          <p:cNvSpPr/>
-          <p:nvPr/>
-        </p:nvSpPr>
-        <p:spPr>
-          <a:xfrm>
-            <a:off x="630936" y="1408176"/>
-            <a:ext cx="3785616" cy="402336"/>
-          </a:xfrm>
-          <a:prstGeom prst="roundRect">
-            <a:avLst>
-              <a:gd name="adj" fmla="val 13636"/>
-            </a:avLst>
-          </a:prstGeom>
-          <a:solidFill>
-            <a:srgbClr val="F9EAE8"/>
-          </a:solidFill>
-          <a:ln/>
-        </p:spPr>
-      </p:sp>
-      <p:sp>
-        <p:nvSpPr>
-          <p:cNvPr id="8" name="Text 6"/>
-          <p:cNvSpPr/>
-          <p:nvPr/>
-        </p:nvSpPr>
-        <p:spPr>
-          <a:xfrm>
-            <a:off x="758952" y="1408176"/>
-            <a:ext cx="3584448" cy="402336"/>
-          </a:xfrm>
-          <a:prstGeom prst="rect">
-            <a:avLst/>
-          </a:prstGeom>
-          <a:noFill/>
-          <a:ln/>
-        </p:spPr>
-        <p:txBody>
-          <a:bodyPr wrap="square" lIns="0" tIns="0" rIns="0" bIns="0" rtlCol="0" anchor="ctr"/>
-          <a:lstStyle/>
-          <a:p>
-            <a:pPr indent="0" marL="0">
-              <a:buNone/>
-            </a:pPr>
-            <a:r>
-              <a:rPr lang="en-US" sz="1250" b="1" dirty="0">
-                <a:solidFill>
-                  <a:srgbClr val="C0392B"/>
-                </a:solidFill>
-                <a:latin typeface="Arial" pitchFamily="34" charset="0"/>
-                <a:ea typeface="Arial" pitchFamily="34" charset="-122"/>
-                <a:cs typeface="Arial" pitchFamily="34" charset="-120"/>
-              </a:rPr>
-              <a:t>Legacy backhaul</a:t>
-            </a:r>
-            <a:endParaRPr lang="en-US" sz="1250" dirty="0"/>
-          </a:p>
-        </p:txBody>
-      </p:sp>
-      <p:sp>
-        <p:nvSpPr>
-          <p:cNvPr id="9" name="Text 7"/>
-          <p:cNvSpPr/>
-          <p:nvPr/>
-        </p:nvSpPr>
-        <p:spPr>
-          <a:xfrm>
-            <a:off x="685800" y="1920240"/>
-            <a:ext cx="3694176" cy="1335024"/>
-          </a:xfrm>
-          <a:prstGeom prst="rect">
-            <a:avLst/>
-          </a:prstGeom>
-          <a:noFill/>
-          <a:ln/>
-        </p:spPr>
-        <p:txBody>
-          <a:bodyPr wrap="square" lIns="0" tIns="0" rIns="0" bIns="0" rtlCol="0" anchor="ctr"/>
-          <a:lstStyle/>
-          <a:p>
-            <a:pPr marL="342900" indent="-342900">
-              <a:spcAft>
-                <a:spcPts val="600"/>
-              </a:spcAft>
-              <a:buSzPct val="100000"/>
-              <a:buChar char="•"/>
-            </a:pPr>
-            <a:r>
-              <a:rPr lang="en-US" sz="950" dirty="0">
-                <a:solidFill>
-                  <a:srgbClr val="1E293B"/>
-                </a:solidFill>
-                <a:latin typeface="Arial" pitchFamily="34" charset="0"/>
-                <a:ea typeface="Arial" pitchFamily="34" charset="-122"/>
-                <a:cs typeface="Arial" pitchFamily="34" charset="-120"/>
-              </a:rPr>
-              <a:t>Portland office → MPLS → agency DC in Washington → internet</a:t>
-            </a:r>
-            <a:endParaRPr lang="en-US" sz="950" dirty="0"/>
-          </a:p>
-          <a:p>
-            <a:pPr marL="342900" indent="-342900">
-              <a:spcAft>
-                <a:spcPts val="600"/>
-              </a:spcAft>
-              <a:buSzPct val="100000"/>
-              <a:buChar char="•"/>
-            </a:pPr>
-            <a:r>
-              <a:rPr lang="en-US" sz="950" dirty="0">
-                <a:solidFill>
-                  <a:srgbClr val="1E293B"/>
-                </a:solidFill>
-                <a:latin typeface="Arial" pitchFamily="34" charset="0"/>
-                <a:ea typeface="Arial" pitchFamily="34" charset="-122"/>
-                <a:cs typeface="Arial" pitchFamily="34" charset="-120"/>
-              </a:rPr>
-              <a:t>Enters Microsoft at a geographically suboptimal PoP (Ashburn)</a:t>
-            </a:r>
-            <a:endParaRPr lang="en-US" sz="950" dirty="0"/>
-          </a:p>
-          <a:p>
-            <a:pPr marL="342900" indent="-342900">
-              <a:spcAft>
-                <a:spcPts val="600"/>
-              </a:spcAft>
-              <a:buSzPct val="100000"/>
-              <a:buChar char="•"/>
-            </a:pPr>
-            <a:r>
-              <a:rPr lang="en-US" sz="950" dirty="0">
-                <a:solidFill>
-                  <a:srgbClr val="1E293B"/>
-                </a:solidFill>
-                <a:latin typeface="Arial" pitchFamily="34" charset="0"/>
-                <a:ea typeface="Arial" pitchFamily="34" charset="-122"/>
-                <a:cs typeface="Arial" pitchFamily="34" charset="-120"/>
-              </a:rPr>
-              <a:t>Forfeits the backbone optimization entirely</a:t>
-            </a:r>
-            <a:endParaRPr lang="en-US" sz="950" dirty="0"/>
-          </a:p>
-          <a:p>
-            <a:pPr marL="342900" indent="-342900">
-              <a:spcAft>
-                <a:spcPts val="600"/>
-              </a:spcAft>
-              <a:buSzPct val="100000"/>
-              <a:buChar char="•"/>
-            </a:pPr>
-            <a:r>
-              <a:rPr lang="en-US" sz="950" dirty="0">
-                <a:solidFill>
-                  <a:srgbClr val="1E293B"/>
-                </a:solidFill>
-                <a:latin typeface="Arial" pitchFamily="34" charset="0"/>
-                <a:ea typeface="Arial" pitchFamily="34" charset="-122"/>
-                <a:cs typeface="Arial" pitchFamily="34" charset="-120"/>
-              </a:rPr>
-              <a:t>80 ms+ total latency</a:t>
-            </a:r>
-            <a:endParaRPr lang="en-US" sz="950" dirty="0"/>
-          </a:p>
-        </p:txBody>
-      </p:sp>
-      <p:sp>
-        <p:nvSpPr>
-          <p:cNvPr id="10" name="Shape 8"/>
-          <p:cNvSpPr/>
-          <p:nvPr/>
-        </p:nvSpPr>
-        <p:spPr>
-          <a:xfrm>
-            <a:off x="4690872" y="1280160"/>
-            <a:ext cx="4041648" cy="2103120"/>
-          </a:xfrm>
-          <a:prstGeom prst="roundRect">
-            <a:avLst>
-              <a:gd name="adj" fmla="val 3043"/>
-            </a:avLst>
-          </a:prstGeom>
-          <a:solidFill>
-            <a:srgbClr val="FFFFFF"/>
-          </a:solidFill>
-          <a:ln w="9525">
-            <a:solidFill>
-              <a:srgbClr val="C9D4E0"/>
-            </a:solidFill>
-            <a:prstDash val="solid"/>
-          </a:ln>
-          <a:effectLst>
-            <a:outerShdw sx="100000" sy="100000" kx="0" ky="0" algn="bl" rotWithShape="0" blurRad="88900" dist="25400" dir="2700000">
-              <a:srgbClr val="000000">
-                <a:alpha val="14000"/>
-              </a:srgbClr>
-            </a:outerShdw>
-          </a:effectLst>
-        </p:spPr>
-      </p:sp>
-      <p:sp>
-        <p:nvSpPr>
-          <p:cNvPr id="11" name="Shape 9"/>
-          <p:cNvSpPr/>
-          <p:nvPr/>
-        </p:nvSpPr>
-        <p:spPr>
-          <a:xfrm>
-            <a:off x="4818888" y="1408176"/>
-            <a:ext cx="3785616" cy="402336"/>
-          </a:xfrm>
-          <a:prstGeom prst="roundRect">
-            <a:avLst>
-              <a:gd name="adj" fmla="val 13636"/>
-            </a:avLst>
-          </a:prstGeom>
-          <a:solidFill>
-            <a:srgbClr val="E6F5F2"/>
-          </a:solidFill>
-          <a:ln/>
-        </p:spPr>
-      </p:sp>
-      <p:sp>
-        <p:nvSpPr>
-          <p:cNvPr id="12" name="Text 10"/>
-          <p:cNvSpPr/>
-          <p:nvPr/>
-        </p:nvSpPr>
-        <p:spPr>
-          <a:xfrm>
-            <a:off x="4946904" y="1408176"/>
-            <a:ext cx="3584448" cy="402336"/>
-          </a:xfrm>
-          <a:prstGeom prst="rect">
-            <a:avLst/>
-          </a:prstGeom>
-          <a:noFill/>
-          <a:ln/>
-        </p:spPr>
-        <p:txBody>
-          <a:bodyPr wrap="square" lIns="0" tIns="0" rIns="0" bIns="0" rtlCol="0" anchor="ctr"/>
-          <a:lstStyle/>
-          <a:p>
-            <a:pPr indent="0" marL="0">
-              <a:buNone/>
-            </a:pPr>
-            <a:r>
-              <a:rPr lang="en-US" sz="1250" b="1" dirty="0">
-                <a:solidFill>
-                  <a:srgbClr val="1A9E8F"/>
-                </a:solidFill>
-                <a:latin typeface="Arial" pitchFamily="34" charset="0"/>
-                <a:ea typeface="Arial" pitchFamily="34" charset="-122"/>
-                <a:cs typeface="Arial" pitchFamily="34" charset="-120"/>
-              </a:rPr>
-              <a:t>AAN local breakout</a:t>
-            </a:r>
-            <a:endParaRPr lang="en-US" sz="1250" dirty="0"/>
-          </a:p>
-        </p:txBody>
-      </p:sp>
-      <p:sp>
-        <p:nvSpPr>
-          <p:cNvPr id="13" name="Text 11"/>
-          <p:cNvSpPr/>
-          <p:nvPr/>
-        </p:nvSpPr>
-        <p:spPr>
-          <a:xfrm>
-            <a:off x="4873752" y="1920240"/>
-            <a:ext cx="3694176" cy="1335024"/>
-          </a:xfrm>
-          <a:prstGeom prst="rect">
-            <a:avLst/>
-          </a:prstGeom>
-          <a:noFill/>
-          <a:ln/>
-        </p:spPr>
-        <p:txBody>
-          <a:bodyPr wrap="square" lIns="0" tIns="0" rIns="0" bIns="0" rtlCol="0" anchor="ctr"/>
-          <a:lstStyle/>
-          <a:p>
-            <a:pPr marL="342900" indent="-342900">
-              <a:spcAft>
-                <a:spcPts val="600"/>
-              </a:spcAft>
-              <a:buSzPct val="100000"/>
-              <a:buChar char="•"/>
-            </a:pPr>
-            <a:r>
-              <a:rPr lang="en-US" sz="950" dirty="0">
-                <a:solidFill>
-                  <a:srgbClr val="1E293B"/>
-                </a:solidFill>
-                <a:latin typeface="Arial" pitchFamily="34" charset="0"/>
-                <a:ea typeface="Arial" pitchFamily="34" charset="-122"/>
-                <a:cs typeface="Arial" pitchFamily="34" charset="-120"/>
-              </a:rPr>
-              <a:t>Portland office → DIA/5G → Microsoft's nearest front door (Seattle PoP)</a:t>
-            </a:r>
-            <a:endParaRPr lang="en-US" sz="950" dirty="0"/>
-          </a:p>
-          <a:p>
-            <a:pPr marL="342900" indent="-342900">
-              <a:spcAft>
-                <a:spcPts val="600"/>
-              </a:spcAft>
-              <a:buSzPct val="100000"/>
-              <a:buChar char="•"/>
-            </a:pPr>
-            <a:r>
-              <a:rPr lang="en-US" sz="950" dirty="0">
-                <a:solidFill>
-                  <a:srgbClr val="1E293B"/>
-                </a:solidFill>
-                <a:latin typeface="Arial" pitchFamily="34" charset="0"/>
-                <a:ea typeface="Arial" pitchFamily="34" charset="-122"/>
-                <a:cs typeface="Arial" pitchFamily="34" charset="-120"/>
-              </a:rPr>
-              <a:t>Rest of the journey rides Microsoft's ~200,000 km private backbone</a:t>
-            </a:r>
-            <a:endParaRPr lang="en-US" sz="950" dirty="0"/>
-          </a:p>
-          <a:p>
-            <a:pPr marL="342900" indent="-342900">
-              <a:spcAft>
-                <a:spcPts val="600"/>
-              </a:spcAft>
-              <a:buSzPct val="100000"/>
-              <a:buChar char="•"/>
-            </a:pPr>
-            <a:r>
-              <a:rPr lang="en-US" sz="950" dirty="0">
-                <a:solidFill>
-                  <a:srgbClr val="1E293B"/>
-                </a:solidFill>
-                <a:latin typeface="Arial" pitchFamily="34" charset="0"/>
-                <a:ea typeface="Arial" pitchFamily="34" charset="-122"/>
-                <a:cs typeface="Arial" pitchFamily="34" charset="-120"/>
-              </a:rPr>
-              <a:t>Backbone reroutes around congestion automatically, in real time</a:t>
-            </a:r>
-            <a:endParaRPr lang="en-US" sz="950" dirty="0"/>
-          </a:p>
-          <a:p>
-            <a:pPr marL="342900" indent="-342900">
-              <a:spcAft>
-                <a:spcPts val="600"/>
-              </a:spcAft>
-              <a:buSzPct val="100000"/>
-              <a:buChar char="•"/>
-            </a:pPr>
-            <a:r>
-              <a:rPr lang="en-US" sz="950" dirty="0">
-                <a:solidFill>
-                  <a:srgbClr val="1E293B"/>
-                </a:solidFill>
-                <a:latin typeface="Arial" pitchFamily="34" charset="0"/>
-                <a:ea typeface="Arial" pitchFamily="34" charset="-122"/>
-                <a:cs typeface="Arial" pitchFamily="34" charset="-120"/>
-              </a:rPr>
-              <a:t>≈18 ms total latency</a:t>
-            </a:r>
-            <a:endParaRPr lang="en-US" sz="950" dirty="0"/>
-          </a:p>
-        </p:txBody>
-      </p:sp>
-      <p:sp>
-        <p:nvSpPr>
-          <p:cNvPr id="14" name="Shape 12"/>
-          <p:cNvSpPr/>
-          <p:nvPr/>
-        </p:nvSpPr>
-        <p:spPr>
-          <a:xfrm>
-            <a:off x="502920" y="3547872"/>
-            <a:ext cx="8229600" cy="1261872"/>
-          </a:xfrm>
-          <a:prstGeom prst="roundRect">
-            <a:avLst>
-              <a:gd name="adj" fmla="val 5072"/>
-            </a:avLst>
-          </a:prstGeom>
-          <a:solidFill>
-            <a:srgbClr val="EDF3F9"/>
-          </a:solidFill>
-          <a:ln w="9525">
-            <a:solidFill>
-              <a:srgbClr val="C9D4E0"/>
-            </a:solidFill>
-            <a:prstDash val="solid"/>
-          </a:ln>
-        </p:spPr>
-      </p:sp>
-      <p:sp>
-        <p:nvSpPr>
-          <p:cNvPr id="15" name="Text 13"/>
-          <p:cNvSpPr/>
-          <p:nvPr/>
-        </p:nvSpPr>
-        <p:spPr>
-          <a:xfrm>
-            <a:off x="731520" y="3639312"/>
-            <a:ext cx="7772400" cy="1097280"/>
-          </a:xfrm>
-          <a:prstGeom prst="rect">
-            <a:avLst/>
-          </a:prstGeom>
-          <a:noFill/>
-          <a:ln/>
-        </p:spPr>
-        <p:txBody>
-          <a:bodyPr wrap="square" lIns="0" tIns="0" rIns="0" bIns="0" rtlCol="0" anchor="ctr"/>
-          <a:lstStyle/>
-          <a:p>
-            <a:pPr indent="0" marL="0">
-              <a:buNone/>
-            </a:pPr>
-            <a:r>
-              <a:rPr lang="en-US" sz="1050" b="1" dirty="0">
-                <a:solidFill>
-                  <a:srgbClr val="1F3A5F"/>
-                </a:solidFill>
-                <a:latin typeface="Arial" pitchFamily="34" charset="0"/>
-                <a:ea typeface="Arial" pitchFamily="34" charset="-122"/>
-                <a:cs typeface="Arial" pitchFamily="34" charset="-120"/>
-              </a:rPr>
-              <a:t>Microsoft's three connectivity principles (the config drivers): </a:t>
-            </a:r>
-            <a:endParaRPr lang="en-US" sz="1050" dirty="0"/>
-          </a:p>
-          <a:p>
-            <a:pPr indent="0" marL="0">
-              <a:buNone/>
-            </a:pPr>
-            <a:r>
-              <a:rPr lang="en-US" sz="950" dirty="0">
-                <a:solidFill>
-                  <a:srgbClr val="1E293B"/>
-                </a:solidFill>
-                <a:latin typeface="Arial" pitchFamily="34" charset="0"/>
-                <a:ea typeface="Arial" pitchFamily="34" charset="-122"/>
-                <a:cs typeface="Arial" pitchFamily="34" charset="-120"/>
-              </a:rPr>
-              <a:t>1. Local egress for M365 — break out at the branch, never haul to the DC first (Cloud OnRamp for SaaS policy).  2. Avoid hairpins — inspection at or near the breakout point, not a central scrubbing center.  3. Differentiate the categories — Optimize (Teams media, SharePoint: no proxy, no detour, max priority), Allow (general M365), Default (everything else, standard inspection).</a:t>
-            </a:r>
-            <a:endParaRPr lang="en-US" sz="1050" dirty="0"/>
-          </a:p>
-        </p:txBody>
-      </p:sp>
-    </p:spTree>
-  </p:cSld>
-  <p:clrMapOvr>
-    <a:masterClrMapping/>
-  </p:clrMapOvr>
-</p:sld>
-</file>
-
 <file path=ppt/slides/slide23.xml><?xml version="1.0" encoding="utf-8"?>
 <p:sld xmlns:a="http://schemas.openxmlformats.org/drawingml/2006/main" xmlns:r="http://schemas.openxmlformats.org/officeDocument/2006/relationships" xmlns:p="http://schemas.openxmlformats.org/presentationml/2006/main">
   <p:cSld name="Slide 23">
@@ -20900,7 +21316,7 @@
                 <a:ea typeface="Arial" pitchFamily="34" charset="-122"/>
                 <a:cs typeface="Arial" pitchFamily="34" charset="-120"/>
               </a:rPr>
-              <a:t>APPENDIX — ACTIVATING INR FROM THE SD-WAN</a:t>
+              <a:t>APPENDIX — THE MICROSOFT HALF</a:t>
             </a:r>
             <a:endParaRPr lang="en-US" sz="1100" dirty="0"/>
           </a:p>
@@ -20931,7 +21347,7 @@
               <a:buNone/>
             </a:pPr>
             <a:r>
-              <a:rPr lang="en-US" sz="2200" b="1" dirty="0">
+              <a:rPr lang="en-US" sz="2300" b="1" dirty="0">
                 <a:solidFill>
                   <a:srgbClr val="1F3A5F"/>
                 </a:solidFill>
@@ -20939,9 +21355,9 @@
                 <a:ea typeface="Arial" pitchFamily="34" charset="-122"/>
                 <a:cs typeface="Arial" pitchFamily="34" charset="-120"/>
               </a:rPr>
-              <a:t>Cloud OnRamp for SaaS: probe the front door, steer per app</a:t>
-            </a:r>
-            <a:endParaRPr lang="en-US" sz="2200" dirty="0"/>
+              <a:t>INR: the front door matters more than the destination</a:t>
+            </a:r>
+            <a:endParaRPr lang="en-US" sz="2300" dirty="0"/>
           </a:p>
         </p:txBody>
       </p:sp>
@@ -20978,7 +21394,7 @@
                 <a:ea typeface="Arial" pitchFamily="34" charset="-122"/>
                 <a:cs typeface="Arial" pitchFamily="34" charset="-120"/>
               </a:rPr>
-              <a:t>Federal AAN — Book 05 Network Modernization · CSI Team Draft — Internal · FedRAMP Moderate · Date Code 2026-07-07 11:36 ET</a:t>
+              <a:t>Federal AAN — Book 05 Network Modernization · CSI Team Draft — Internal · FedRAMP Moderate · Date Code 2026-07-07 11:57 ET</a:t>
             </a:r>
             <a:endParaRPr lang="en-US" sz="800" dirty="0"/>
           </a:p>
@@ -21023,9 +21439,682 @@
           </a:p>
         </p:txBody>
       </p:sp>
+      <p:sp>
+        <p:nvSpPr>
+          <p:cNvPr id="6" name="Shape 4"/>
+          <p:cNvSpPr/>
+          <p:nvPr/>
+        </p:nvSpPr>
+        <p:spPr>
+          <a:xfrm>
+            <a:off x="502920" y="1280160"/>
+            <a:ext cx="4041648" cy="2103120"/>
+          </a:xfrm>
+          <a:prstGeom prst="roundRect">
+            <a:avLst>
+              <a:gd name="adj" fmla="val 3043"/>
+            </a:avLst>
+          </a:prstGeom>
+          <a:solidFill>
+            <a:srgbClr val="FFFFFF"/>
+          </a:solidFill>
+          <a:ln w="9525">
+            <a:solidFill>
+              <a:srgbClr val="C9D4E0"/>
+            </a:solidFill>
+            <a:prstDash val="solid"/>
+          </a:ln>
+          <a:effectLst>
+            <a:outerShdw sx="100000" sy="100000" kx="0" ky="0" algn="bl" rotWithShape="0" blurRad="88900" dist="25400" dir="2700000">
+              <a:srgbClr val="000000">
+                <a:alpha val="14000"/>
+              </a:srgbClr>
+            </a:outerShdw>
+          </a:effectLst>
+        </p:spPr>
+      </p:sp>
+      <p:sp>
+        <p:nvSpPr>
+          <p:cNvPr id="7" name="Shape 5"/>
+          <p:cNvSpPr/>
+          <p:nvPr/>
+        </p:nvSpPr>
+        <p:spPr>
+          <a:xfrm>
+            <a:off x="630936" y="1408176"/>
+            <a:ext cx="3785616" cy="402336"/>
+          </a:xfrm>
+          <a:prstGeom prst="roundRect">
+            <a:avLst>
+              <a:gd name="adj" fmla="val 13636"/>
+            </a:avLst>
+          </a:prstGeom>
+          <a:solidFill>
+            <a:srgbClr val="F9EAE8"/>
+          </a:solidFill>
+          <a:ln/>
+        </p:spPr>
+      </p:sp>
+      <p:sp>
+        <p:nvSpPr>
+          <p:cNvPr id="8" name="Text 6"/>
+          <p:cNvSpPr/>
+          <p:nvPr/>
+        </p:nvSpPr>
+        <p:spPr>
+          <a:xfrm>
+            <a:off x="758952" y="1408176"/>
+            <a:ext cx="3584448" cy="402336"/>
+          </a:xfrm>
+          <a:prstGeom prst="rect">
+            <a:avLst/>
+          </a:prstGeom>
+          <a:noFill/>
+          <a:ln/>
+        </p:spPr>
+        <p:txBody>
+          <a:bodyPr wrap="square" lIns="0" tIns="0" rIns="0" bIns="0" rtlCol="0" anchor="ctr"/>
+          <a:lstStyle/>
+          <a:p>
+            <a:pPr indent="0" marL="0">
+              <a:buNone/>
+            </a:pPr>
+            <a:r>
+              <a:rPr lang="en-US" sz="1250" b="1" dirty="0">
+                <a:solidFill>
+                  <a:srgbClr val="C0392B"/>
+                </a:solidFill>
+                <a:latin typeface="Arial" pitchFamily="34" charset="0"/>
+                <a:ea typeface="Arial" pitchFamily="34" charset="-122"/>
+                <a:cs typeface="Arial" pitchFamily="34" charset="-120"/>
+              </a:rPr>
+              <a:t>Legacy backhaul</a:t>
+            </a:r>
+            <a:endParaRPr lang="en-US" sz="1250" dirty="0"/>
+          </a:p>
+        </p:txBody>
+      </p:sp>
+      <p:sp>
+        <p:nvSpPr>
+          <p:cNvPr id="9" name="Text 7"/>
+          <p:cNvSpPr/>
+          <p:nvPr/>
+        </p:nvSpPr>
+        <p:spPr>
+          <a:xfrm>
+            <a:off x="685800" y="1920240"/>
+            <a:ext cx="3694176" cy="1335024"/>
+          </a:xfrm>
+          <a:prstGeom prst="rect">
+            <a:avLst/>
+          </a:prstGeom>
+          <a:noFill/>
+          <a:ln/>
+        </p:spPr>
+        <p:txBody>
+          <a:bodyPr wrap="square" lIns="0" tIns="0" rIns="0" bIns="0" rtlCol="0" anchor="ctr"/>
+          <a:lstStyle/>
+          <a:p>
+            <a:pPr marL="342900" indent="-342900">
+              <a:spcAft>
+                <a:spcPts val="600"/>
+              </a:spcAft>
+              <a:buSzPct val="100000"/>
+              <a:buChar char="•"/>
+            </a:pPr>
+            <a:r>
+              <a:rPr lang="en-US" sz="950" dirty="0">
+                <a:solidFill>
+                  <a:srgbClr val="1E293B"/>
+                </a:solidFill>
+                <a:latin typeface="Arial" pitchFamily="34" charset="0"/>
+                <a:ea typeface="Arial" pitchFamily="34" charset="-122"/>
+                <a:cs typeface="Arial" pitchFamily="34" charset="-120"/>
+              </a:rPr>
+              <a:t>Portland office → MPLS → agency DC in Washington → internet</a:t>
+            </a:r>
+            <a:endParaRPr lang="en-US" sz="950" dirty="0"/>
+          </a:p>
+          <a:p>
+            <a:pPr marL="342900" indent="-342900">
+              <a:spcAft>
+                <a:spcPts val="600"/>
+              </a:spcAft>
+              <a:buSzPct val="100000"/>
+              <a:buChar char="•"/>
+            </a:pPr>
+            <a:r>
+              <a:rPr lang="en-US" sz="950" dirty="0">
+                <a:solidFill>
+                  <a:srgbClr val="1E293B"/>
+                </a:solidFill>
+                <a:latin typeface="Arial" pitchFamily="34" charset="0"/>
+                <a:ea typeface="Arial" pitchFamily="34" charset="-122"/>
+                <a:cs typeface="Arial" pitchFamily="34" charset="-120"/>
+              </a:rPr>
+              <a:t>Enters Microsoft at a geographically suboptimal PoP (Ashburn)</a:t>
+            </a:r>
+            <a:endParaRPr lang="en-US" sz="950" dirty="0"/>
+          </a:p>
+          <a:p>
+            <a:pPr marL="342900" indent="-342900">
+              <a:spcAft>
+                <a:spcPts val="600"/>
+              </a:spcAft>
+              <a:buSzPct val="100000"/>
+              <a:buChar char="•"/>
+            </a:pPr>
+            <a:r>
+              <a:rPr lang="en-US" sz="950" dirty="0">
+                <a:solidFill>
+                  <a:srgbClr val="1E293B"/>
+                </a:solidFill>
+                <a:latin typeface="Arial" pitchFamily="34" charset="0"/>
+                <a:ea typeface="Arial" pitchFamily="34" charset="-122"/>
+                <a:cs typeface="Arial" pitchFamily="34" charset="-120"/>
+              </a:rPr>
+              <a:t>Forfeits the backbone optimization entirely</a:t>
+            </a:r>
+            <a:endParaRPr lang="en-US" sz="950" dirty="0"/>
+          </a:p>
+          <a:p>
+            <a:pPr marL="342900" indent="-342900">
+              <a:spcAft>
+                <a:spcPts val="600"/>
+              </a:spcAft>
+              <a:buSzPct val="100000"/>
+              <a:buChar char="•"/>
+            </a:pPr>
+            <a:r>
+              <a:rPr lang="en-US" sz="950" dirty="0">
+                <a:solidFill>
+                  <a:srgbClr val="1E293B"/>
+                </a:solidFill>
+                <a:latin typeface="Arial" pitchFamily="34" charset="0"/>
+                <a:ea typeface="Arial" pitchFamily="34" charset="-122"/>
+                <a:cs typeface="Arial" pitchFamily="34" charset="-120"/>
+              </a:rPr>
+              <a:t>80 ms+ total latency</a:t>
+            </a:r>
+            <a:endParaRPr lang="en-US" sz="950" dirty="0"/>
+          </a:p>
+        </p:txBody>
+      </p:sp>
+      <p:sp>
+        <p:nvSpPr>
+          <p:cNvPr id="10" name="Shape 8"/>
+          <p:cNvSpPr/>
+          <p:nvPr/>
+        </p:nvSpPr>
+        <p:spPr>
+          <a:xfrm>
+            <a:off x="4690872" y="1280160"/>
+            <a:ext cx="4041648" cy="2103120"/>
+          </a:xfrm>
+          <a:prstGeom prst="roundRect">
+            <a:avLst>
+              <a:gd name="adj" fmla="val 3043"/>
+            </a:avLst>
+          </a:prstGeom>
+          <a:solidFill>
+            <a:srgbClr val="FFFFFF"/>
+          </a:solidFill>
+          <a:ln w="9525">
+            <a:solidFill>
+              <a:srgbClr val="C9D4E0"/>
+            </a:solidFill>
+            <a:prstDash val="solid"/>
+          </a:ln>
+          <a:effectLst>
+            <a:outerShdw sx="100000" sy="100000" kx="0" ky="0" algn="bl" rotWithShape="0" blurRad="88900" dist="25400" dir="2700000">
+              <a:srgbClr val="000000">
+                <a:alpha val="14000"/>
+              </a:srgbClr>
+            </a:outerShdw>
+          </a:effectLst>
+        </p:spPr>
+      </p:sp>
+      <p:sp>
+        <p:nvSpPr>
+          <p:cNvPr id="11" name="Shape 9"/>
+          <p:cNvSpPr/>
+          <p:nvPr/>
+        </p:nvSpPr>
+        <p:spPr>
+          <a:xfrm>
+            <a:off x="4818888" y="1408176"/>
+            <a:ext cx="3785616" cy="402336"/>
+          </a:xfrm>
+          <a:prstGeom prst="roundRect">
+            <a:avLst>
+              <a:gd name="adj" fmla="val 13636"/>
+            </a:avLst>
+          </a:prstGeom>
+          <a:solidFill>
+            <a:srgbClr val="E6F5F2"/>
+          </a:solidFill>
+          <a:ln/>
+        </p:spPr>
+      </p:sp>
+      <p:sp>
+        <p:nvSpPr>
+          <p:cNvPr id="12" name="Text 10"/>
+          <p:cNvSpPr/>
+          <p:nvPr/>
+        </p:nvSpPr>
+        <p:spPr>
+          <a:xfrm>
+            <a:off x="4946904" y="1408176"/>
+            <a:ext cx="3584448" cy="402336"/>
+          </a:xfrm>
+          <a:prstGeom prst="rect">
+            <a:avLst/>
+          </a:prstGeom>
+          <a:noFill/>
+          <a:ln/>
+        </p:spPr>
+        <p:txBody>
+          <a:bodyPr wrap="square" lIns="0" tIns="0" rIns="0" bIns="0" rtlCol="0" anchor="ctr"/>
+          <a:lstStyle/>
+          <a:p>
+            <a:pPr indent="0" marL="0">
+              <a:buNone/>
+            </a:pPr>
+            <a:r>
+              <a:rPr lang="en-US" sz="1250" b="1" dirty="0">
+                <a:solidFill>
+                  <a:srgbClr val="1A9E8F"/>
+                </a:solidFill>
+                <a:latin typeface="Arial" pitchFamily="34" charset="0"/>
+                <a:ea typeface="Arial" pitchFamily="34" charset="-122"/>
+                <a:cs typeface="Arial" pitchFamily="34" charset="-120"/>
+              </a:rPr>
+              <a:t>AAN local breakout</a:t>
+            </a:r>
+            <a:endParaRPr lang="en-US" sz="1250" dirty="0"/>
+          </a:p>
+        </p:txBody>
+      </p:sp>
+      <p:sp>
+        <p:nvSpPr>
+          <p:cNvPr id="13" name="Text 11"/>
+          <p:cNvSpPr/>
+          <p:nvPr/>
+        </p:nvSpPr>
+        <p:spPr>
+          <a:xfrm>
+            <a:off x="4873752" y="1920240"/>
+            <a:ext cx="3694176" cy="1335024"/>
+          </a:xfrm>
+          <a:prstGeom prst="rect">
+            <a:avLst/>
+          </a:prstGeom>
+          <a:noFill/>
+          <a:ln/>
+        </p:spPr>
+        <p:txBody>
+          <a:bodyPr wrap="square" lIns="0" tIns="0" rIns="0" bIns="0" rtlCol="0" anchor="ctr"/>
+          <a:lstStyle/>
+          <a:p>
+            <a:pPr marL="342900" indent="-342900">
+              <a:spcAft>
+                <a:spcPts val="600"/>
+              </a:spcAft>
+              <a:buSzPct val="100000"/>
+              <a:buChar char="•"/>
+            </a:pPr>
+            <a:r>
+              <a:rPr lang="en-US" sz="950" dirty="0">
+                <a:solidFill>
+                  <a:srgbClr val="1E293B"/>
+                </a:solidFill>
+                <a:latin typeface="Arial" pitchFamily="34" charset="0"/>
+                <a:ea typeface="Arial" pitchFamily="34" charset="-122"/>
+                <a:cs typeface="Arial" pitchFamily="34" charset="-120"/>
+              </a:rPr>
+              <a:t>Portland office → DIA/5G → Microsoft's nearest front door (Seattle PoP)</a:t>
+            </a:r>
+            <a:endParaRPr lang="en-US" sz="950" dirty="0"/>
+          </a:p>
+          <a:p>
+            <a:pPr marL="342900" indent="-342900">
+              <a:spcAft>
+                <a:spcPts val="600"/>
+              </a:spcAft>
+              <a:buSzPct val="100000"/>
+              <a:buChar char="•"/>
+            </a:pPr>
+            <a:r>
+              <a:rPr lang="en-US" sz="950" dirty="0">
+                <a:solidFill>
+                  <a:srgbClr val="1E293B"/>
+                </a:solidFill>
+                <a:latin typeface="Arial" pitchFamily="34" charset="0"/>
+                <a:ea typeface="Arial" pitchFamily="34" charset="-122"/>
+                <a:cs typeface="Arial" pitchFamily="34" charset="-120"/>
+              </a:rPr>
+              <a:t>Rest of the journey rides Microsoft's ~200,000 km private backbone</a:t>
+            </a:r>
+            <a:endParaRPr lang="en-US" sz="950" dirty="0"/>
+          </a:p>
+          <a:p>
+            <a:pPr marL="342900" indent="-342900">
+              <a:spcAft>
+                <a:spcPts val="600"/>
+              </a:spcAft>
+              <a:buSzPct val="100000"/>
+              <a:buChar char="•"/>
+            </a:pPr>
+            <a:r>
+              <a:rPr lang="en-US" sz="950" dirty="0">
+                <a:solidFill>
+                  <a:srgbClr val="1E293B"/>
+                </a:solidFill>
+                <a:latin typeface="Arial" pitchFamily="34" charset="0"/>
+                <a:ea typeface="Arial" pitchFamily="34" charset="-122"/>
+                <a:cs typeface="Arial" pitchFamily="34" charset="-120"/>
+              </a:rPr>
+              <a:t>Backbone reroutes around congestion automatically, in real time</a:t>
+            </a:r>
+            <a:endParaRPr lang="en-US" sz="950" dirty="0"/>
+          </a:p>
+          <a:p>
+            <a:pPr marL="342900" indent="-342900">
+              <a:spcAft>
+                <a:spcPts val="600"/>
+              </a:spcAft>
+              <a:buSzPct val="100000"/>
+              <a:buChar char="•"/>
+            </a:pPr>
+            <a:r>
+              <a:rPr lang="en-US" sz="950" dirty="0">
+                <a:solidFill>
+                  <a:srgbClr val="1E293B"/>
+                </a:solidFill>
+                <a:latin typeface="Arial" pitchFamily="34" charset="0"/>
+                <a:ea typeface="Arial" pitchFamily="34" charset="-122"/>
+                <a:cs typeface="Arial" pitchFamily="34" charset="-120"/>
+              </a:rPr>
+              <a:t>≈18 ms total latency</a:t>
+            </a:r>
+            <a:endParaRPr lang="en-US" sz="950" dirty="0"/>
+          </a:p>
+        </p:txBody>
+      </p:sp>
+      <p:sp>
+        <p:nvSpPr>
+          <p:cNvPr id="14" name="Shape 12"/>
+          <p:cNvSpPr/>
+          <p:nvPr/>
+        </p:nvSpPr>
+        <p:spPr>
+          <a:xfrm>
+            <a:off x="502920" y="3547872"/>
+            <a:ext cx="8229600" cy="1261872"/>
+          </a:xfrm>
+          <a:prstGeom prst="roundRect">
+            <a:avLst>
+              <a:gd name="adj" fmla="val 5072"/>
+            </a:avLst>
+          </a:prstGeom>
+          <a:solidFill>
+            <a:srgbClr val="EDF3F9"/>
+          </a:solidFill>
+          <a:ln w="9525">
+            <a:solidFill>
+              <a:srgbClr val="C9D4E0"/>
+            </a:solidFill>
+            <a:prstDash val="solid"/>
+          </a:ln>
+        </p:spPr>
+      </p:sp>
+      <p:sp>
+        <p:nvSpPr>
+          <p:cNvPr id="15" name="Text 13"/>
+          <p:cNvSpPr/>
+          <p:nvPr/>
+        </p:nvSpPr>
+        <p:spPr>
+          <a:xfrm>
+            <a:off x="731520" y="3639312"/>
+            <a:ext cx="7772400" cy="1097280"/>
+          </a:xfrm>
+          <a:prstGeom prst="rect">
+            <a:avLst/>
+          </a:prstGeom>
+          <a:noFill/>
+          <a:ln/>
+        </p:spPr>
+        <p:txBody>
+          <a:bodyPr wrap="square" lIns="0" tIns="0" rIns="0" bIns="0" rtlCol="0" anchor="ctr"/>
+          <a:lstStyle/>
+          <a:p>
+            <a:pPr indent="0" marL="0">
+              <a:buNone/>
+            </a:pPr>
+            <a:r>
+              <a:rPr lang="en-US" sz="1050" b="1" dirty="0">
+                <a:solidFill>
+                  <a:srgbClr val="1F3A5F"/>
+                </a:solidFill>
+                <a:latin typeface="Arial" pitchFamily="34" charset="0"/>
+                <a:ea typeface="Arial" pitchFamily="34" charset="-122"/>
+                <a:cs typeface="Arial" pitchFamily="34" charset="-120"/>
+              </a:rPr>
+              <a:t>Microsoft's three connectivity principles (the config drivers): </a:t>
+            </a:r>
+            <a:endParaRPr lang="en-US" sz="1050" dirty="0"/>
+          </a:p>
+          <a:p>
+            <a:pPr indent="0" marL="0">
+              <a:buNone/>
+            </a:pPr>
+            <a:r>
+              <a:rPr lang="en-US" sz="950" dirty="0">
+                <a:solidFill>
+                  <a:srgbClr val="1E293B"/>
+                </a:solidFill>
+                <a:latin typeface="Arial" pitchFamily="34" charset="0"/>
+                <a:ea typeface="Arial" pitchFamily="34" charset="-122"/>
+                <a:cs typeface="Arial" pitchFamily="34" charset="-120"/>
+              </a:rPr>
+              <a:t>1. Local egress for M365 — break out at the branch, never haul to the DC first (Cloud OnRamp for SaaS policy).  2. Avoid hairpins — inspection at or near the breakout point, not a central scrubbing center.  3. Differentiate the categories — Optimize (Teams media, SharePoint: no proxy, no detour, max priority), Allow (general M365), Default (everything else, standard inspection).</a:t>
+            </a:r>
+            <a:endParaRPr lang="en-US" sz="1050" dirty="0"/>
+          </a:p>
+        </p:txBody>
+      </p:sp>
+    </p:spTree>
+  </p:cSld>
+  <p:clrMapOvr>
+    <a:masterClrMapping/>
+  </p:clrMapOvr>
+</p:sld>
+</file>
+
+<file path=ppt/slides/slide24.xml><?xml version="1.0" encoding="utf-8"?>
+<p:sld xmlns:a="http://schemas.openxmlformats.org/drawingml/2006/main" xmlns:r="http://schemas.openxmlformats.org/officeDocument/2006/relationships" xmlns:p="http://schemas.openxmlformats.org/presentationml/2006/main">
+  <p:cSld name="Slide 24">
+    <p:bg>
+      <p:bgPr>
+        <a:solidFill>
+          <a:srgbClr val="FFFFFF"/>
+        </a:solidFill>
+      </p:bgPr>
+    </p:bg>
+    <p:spTree>
+      <p:nvGrpSpPr>
+        <p:cNvPr id="1" name=""/>
+        <p:cNvGrpSpPr/>
+        <p:nvPr/>
+      </p:nvGrpSpPr>
+      <p:grpSpPr>
+        <a:xfrm>
+          <a:off x="0" y="0"/>
+          <a:ext cx="0" cy="0"/>
+          <a:chOff x="0" y="0"/>
+          <a:chExt cx="0" cy="0"/>
+        </a:xfrm>
+      </p:grpSpPr>
+      <p:sp>
+        <p:nvSpPr>
+          <p:cNvPr id="2" name="Text 0"/>
+          <p:cNvSpPr/>
+          <p:nvPr/>
+        </p:nvSpPr>
+        <p:spPr>
+          <a:xfrm>
+            <a:off x="502920" y="256032"/>
+            <a:ext cx="8229600" cy="274320"/>
+          </a:xfrm>
+          <a:prstGeom prst="rect">
+            <a:avLst/>
+          </a:prstGeom>
+          <a:noFill/>
+          <a:ln/>
+        </p:spPr>
+        <p:txBody>
+          <a:bodyPr wrap="square" lIns="0" tIns="0" rIns="0" bIns="0" rtlCol="0" anchor="ctr"/>
+          <a:lstStyle/>
+          <a:p>
+            <a:pPr indent="0" marL="0">
+              <a:buNone/>
+            </a:pPr>
+            <a:r>
+              <a:rPr lang="en-US" sz="1100" b="1" spc="200" kern="0" dirty="0">
+                <a:solidFill>
+                  <a:srgbClr val="1A9E8F"/>
+                </a:solidFill>
+                <a:latin typeface="Arial" pitchFamily="34" charset="0"/>
+                <a:ea typeface="Arial" pitchFamily="34" charset="-122"/>
+                <a:cs typeface="Arial" pitchFamily="34" charset="-120"/>
+              </a:rPr>
+              <a:t>APPENDIX — ACTIVATING INR FROM THE SD-WAN</a:t>
+            </a:r>
+            <a:endParaRPr lang="en-US" sz="1100" dirty="0"/>
+          </a:p>
+        </p:txBody>
+      </p:sp>
+      <p:sp>
+        <p:nvSpPr>
+          <p:cNvPr id="3" name="Text 1"/>
+          <p:cNvSpPr/>
+          <p:nvPr/>
+        </p:nvSpPr>
+        <p:spPr>
+          <a:xfrm>
+            <a:off x="502920" y="512064"/>
+            <a:ext cx="8138160" cy="566928"/>
+          </a:xfrm>
+          <a:prstGeom prst="rect">
+            <a:avLst/>
+          </a:prstGeom>
+          <a:noFill/>
+          <a:ln/>
+        </p:spPr>
+        <p:txBody>
+          <a:bodyPr wrap="square" lIns="0" tIns="0" rIns="0" bIns="0" rtlCol="0" anchor="ctr"/>
+          <a:lstStyle/>
+          <a:p>
+            <a:pPr indent="0" marL="0">
+              <a:buNone/>
+            </a:pPr>
+            <a:r>
+              <a:rPr lang="en-US" sz="2200" b="1" dirty="0">
+                <a:solidFill>
+                  <a:srgbClr val="1F3A5F"/>
+                </a:solidFill>
+                <a:latin typeface="Arial" pitchFamily="34" charset="0"/>
+                <a:ea typeface="Arial" pitchFamily="34" charset="-122"/>
+                <a:cs typeface="Arial" pitchFamily="34" charset="-120"/>
+              </a:rPr>
+              <a:t>Cloud OnRamp for SaaS: probe the front door, steer per app</a:t>
+            </a:r>
+            <a:endParaRPr lang="en-US" sz="2200" dirty="0"/>
+          </a:p>
+        </p:txBody>
+      </p:sp>
+      <p:sp>
+        <p:nvSpPr>
+          <p:cNvPr id="4" name="Text 2"/>
+          <p:cNvSpPr/>
+          <p:nvPr/>
+        </p:nvSpPr>
+        <p:spPr>
+          <a:xfrm>
+            <a:off x="502920" y="4864608"/>
+            <a:ext cx="7315200" cy="219456"/>
+          </a:xfrm>
+          <a:prstGeom prst="rect">
+            <a:avLst/>
+          </a:prstGeom>
+          <a:noFill/>
+          <a:ln/>
+        </p:spPr>
+        <p:txBody>
+          <a:bodyPr wrap="square" lIns="0" tIns="0" rIns="0" bIns="0" rtlCol="0" anchor="ctr"/>
+          <a:lstStyle/>
+          <a:p>
+            <a:pPr indent="0" marL="0">
+              <a:buNone/>
+            </a:pPr>
+            <a:r>
+              <a:rPr lang="en-US" sz="800" dirty="0">
+                <a:solidFill>
+                  <a:srgbClr val="5B6B7C"/>
+                </a:solidFill>
+                <a:latin typeface="Arial" pitchFamily="34" charset="0"/>
+                <a:ea typeface="Arial" pitchFamily="34" charset="-122"/>
+                <a:cs typeface="Arial" pitchFamily="34" charset="-120"/>
+              </a:rPr>
+              <a:t>Federal AAN — Book 05 Network Modernization · CSI Team Draft — Internal · FedRAMP Moderate · Date Code 2026-07-07 11:57 ET</a:t>
+            </a:r>
+            <a:endParaRPr lang="en-US" sz="800" dirty="0"/>
+          </a:p>
+        </p:txBody>
+      </p:sp>
+      <p:sp>
+        <p:nvSpPr>
+          <p:cNvPr id="5" name="Text 3"/>
+          <p:cNvSpPr/>
+          <p:nvPr/>
+        </p:nvSpPr>
+        <p:spPr>
+          <a:xfrm>
+            <a:off x="8412480" y="4864608"/>
+            <a:ext cx="320040" cy="219456"/>
+          </a:xfrm>
+          <a:prstGeom prst="rect">
+            <a:avLst/>
+          </a:prstGeom>
+          <a:noFill/>
+          <a:ln/>
+        </p:spPr>
+        <p:txBody>
+          <a:bodyPr wrap="square" lIns="0" tIns="0" rIns="0" bIns="0" rtlCol="0" anchor="ctr"/>
+          <a:lstStyle/>
+          <a:p>
+            <a:pPr algn="r" indent="0" marL="0">
+              <a:buNone/>
+            </a:pPr>
+            <a:r>
+              <a:rPr lang="en-US" sz="800" dirty="0">
+                <a:solidFill>
+                  <a:srgbClr val="5B6B7C"/>
+                </a:solidFill>
+                <a:latin typeface="Arial" pitchFamily="34" charset="0"/>
+                <a:ea typeface="Arial" pitchFamily="34" charset="-122"/>
+                <a:cs typeface="Arial" pitchFamily="34" charset="-120"/>
+              </a:rPr>
+              <a:t>24</a:t>
+            </a:r>
+            <a:endParaRPr lang="en-US" sz="800" dirty="0"/>
+          </a:p>
+        </p:txBody>
+      </p:sp>
       <p:graphicFrame>
         <p:nvGraphicFramePr>
-          <p:cNvPr id="24" name="Table 0"/>
+          <p:cNvPr id="25" name="Table 0"/>
           <p:cNvGraphicFramePr>
             <a:graphicFrameLocks noGrp="1"/>
           </p:cNvGraphicFramePr>
@@ -22584,9 +23673,9 @@
 </p:sld>
 </file>
 
-<file path=ppt/slides/slide24.xml><?xml version="1.0" encoding="utf-8"?>
+<file path=ppt/slides/slide25.xml><?xml version="1.0" encoding="utf-8"?>
 <p:sld xmlns:a="http://schemas.openxmlformats.org/drawingml/2006/main" xmlns:r="http://schemas.openxmlformats.org/officeDocument/2006/relationships" xmlns:p="http://schemas.openxmlformats.org/presentationml/2006/main">
-  <p:cSld name="Slide 24">
+  <p:cSld name="Slide 25">
     <p:bg>
       <p:bgPr>
         <a:solidFill>
@@ -22719,7 +23808,7 @@
                 <a:ea typeface="Arial" pitchFamily="34" charset="-122"/>
                 <a:cs typeface="Arial" pitchFamily="34" charset="-120"/>
               </a:rPr>
-              <a:t>Federal AAN — Book 05 Network Modernization · CSI Team Draft — Internal · FedRAMP Moderate · Date Code 2026-07-07 11:36 ET</a:t>
+              <a:t>Federal AAN — Book 05 Network Modernization · CSI Team Draft — Internal · FedRAMP Moderate · Date Code 2026-07-07 11:57 ET</a:t>
             </a:r>
             <a:endParaRPr lang="en-US" sz="800" dirty="0"/>
           </a:p>
@@ -22758,7 +23847,7 @@
                 <a:ea typeface="Arial" pitchFamily="34" charset="-122"/>
                 <a:cs typeface="Arial" pitchFamily="34" charset="-120"/>
               </a:rPr>
-              <a:t>24</a:t>
+              <a:t>25</a:t>
             </a:r>
             <a:endParaRPr lang="en-US" sz="800" dirty="0"/>
           </a:p>
@@ -22766,7 +23855,7 @@
       </p:sp>
       <p:graphicFrame>
         <p:nvGraphicFramePr>
-          <p:cNvPr id="25" name="Table 0"/>
+          <p:cNvPr id="26" name="Table 0"/>
           <p:cNvGraphicFramePr>
             <a:graphicFrameLocks noGrp="1"/>
           </p:cNvGraphicFramePr>
@@ -24737,1176 +25826,6 @@
 </p:sld>
 </file>
 
-<file path=ppt/slides/slide25.xml><?xml version="1.0" encoding="utf-8"?>
-<p:sld xmlns:a="http://schemas.openxmlformats.org/drawingml/2006/main" xmlns:r="http://schemas.openxmlformats.org/officeDocument/2006/relationships" xmlns:p="http://schemas.openxmlformats.org/presentationml/2006/main">
-  <p:cSld name="Slide 25">
-    <p:bg>
-      <p:bgPr>
-        <a:solidFill>
-          <a:srgbClr val="FFFFFF"/>
-        </a:solidFill>
-      </p:bgPr>
-    </p:bg>
-    <p:spTree>
-      <p:nvGrpSpPr>
-        <p:cNvPr id="1" name=""/>
-        <p:cNvGrpSpPr/>
-        <p:nvPr/>
-      </p:nvGrpSpPr>
-      <p:grpSpPr>
-        <a:xfrm>
-          <a:off x="0" y="0"/>
-          <a:ext cx="0" cy="0"/>
-          <a:chOff x="0" y="0"/>
-          <a:chExt cx="0" cy="0"/>
-        </a:xfrm>
-      </p:grpSpPr>
-      <p:sp>
-        <p:nvSpPr>
-          <p:cNvPr id="2" name="Text 0"/>
-          <p:cNvSpPr/>
-          <p:nvPr/>
-        </p:nvSpPr>
-        <p:spPr>
-          <a:xfrm>
-            <a:off x="502920" y="256032"/>
-            <a:ext cx="8229600" cy="274320"/>
-          </a:xfrm>
-          <a:prstGeom prst="rect">
-            <a:avLst/>
-          </a:prstGeom>
-          <a:noFill/>
-          <a:ln/>
-        </p:spPr>
-        <p:txBody>
-          <a:bodyPr wrap="square" lIns="0" tIns="0" rIns="0" bIns="0" rtlCol="0" anchor="ctr"/>
-          <a:lstStyle/>
-          <a:p>
-            <a:pPr indent="0" marL="0">
-              <a:buNone/>
-            </a:pPr>
-            <a:r>
-              <a:rPr lang="en-US" sz="1100" b="1" spc="200" kern="0" dirty="0">
-                <a:solidFill>
-                  <a:srgbClr val="1A9E8F"/>
-                </a:solidFill>
-                <a:latin typeface="Arial" pitchFamily="34" charset="0"/>
-                <a:ea typeface="Arial" pitchFamily="34" charset="-122"/>
-                <a:cs typeface="Arial" pitchFamily="34" charset="-120"/>
-              </a:rPr>
-              <a:t>APPENDIX — WHAT THE PLATFORM EVIDENCES</a:t>
-            </a:r>
-            <a:endParaRPr lang="en-US" sz="1100" dirty="0"/>
-          </a:p>
-        </p:txBody>
-      </p:sp>
-      <p:sp>
-        <p:nvSpPr>
-          <p:cNvPr id="3" name="Text 1"/>
-          <p:cNvSpPr/>
-          <p:nvPr/>
-        </p:nvSpPr>
-        <p:spPr>
-          <a:xfrm>
-            <a:off x="502920" y="512064"/>
-            <a:ext cx="8138160" cy="566928"/>
-          </a:xfrm>
-          <a:prstGeom prst="rect">
-            <a:avLst/>
-          </a:prstGeom>
-          <a:noFill/>
-          <a:ln/>
-        </p:spPr>
-        <p:txBody>
-          <a:bodyPr wrap="square" lIns="0" tIns="0" rIns="0" bIns="0" rtlCol="0" anchor="ctr"/>
-          <a:lstStyle/>
-          <a:p>
-            <a:pPr indent="0" marL="0">
-              <a:buNone/>
-            </a:pPr>
-            <a:r>
-              <a:rPr lang="en-US" sz="2200" b="1" dirty="0">
-                <a:solidFill>
-                  <a:srgbClr val="1F3A5F"/>
-                </a:solidFill>
-                <a:latin typeface="Arial" pitchFamily="34" charset="0"/>
-                <a:ea typeface="Arial" pitchFamily="34" charset="-122"/>
-                <a:cs typeface="Arial" pitchFamily="34" charset="-120"/>
-              </a:rPr>
-              <a:t>Nine controls satisfied; KSI evidence contracts in native JSON</a:t>
-            </a:r>
-            <a:endParaRPr lang="en-US" sz="2200" dirty="0"/>
-          </a:p>
-        </p:txBody>
-      </p:sp>
-      <p:sp>
-        <p:nvSpPr>
-          <p:cNvPr id="4" name="Text 2"/>
-          <p:cNvSpPr/>
-          <p:nvPr/>
-        </p:nvSpPr>
-        <p:spPr>
-          <a:xfrm>
-            <a:off x="502920" y="4864608"/>
-            <a:ext cx="7315200" cy="219456"/>
-          </a:xfrm>
-          <a:prstGeom prst="rect">
-            <a:avLst/>
-          </a:prstGeom>
-          <a:noFill/>
-          <a:ln/>
-        </p:spPr>
-        <p:txBody>
-          <a:bodyPr wrap="square" lIns="0" tIns="0" rIns="0" bIns="0" rtlCol="0" anchor="ctr"/>
-          <a:lstStyle/>
-          <a:p>
-            <a:pPr indent="0" marL="0">
-              <a:buNone/>
-            </a:pPr>
-            <a:r>
-              <a:rPr lang="en-US" sz="800" dirty="0">
-                <a:solidFill>
-                  <a:srgbClr val="5B6B7C"/>
-                </a:solidFill>
-                <a:latin typeface="Arial" pitchFamily="34" charset="0"/>
-                <a:ea typeface="Arial" pitchFamily="34" charset="-122"/>
-                <a:cs typeface="Arial" pitchFamily="34" charset="-120"/>
-              </a:rPr>
-              <a:t>Federal AAN — Book 05 Network Modernization · CSI Team Draft — Internal · FedRAMP Moderate · Date Code 2026-07-07 11:36 ET</a:t>
-            </a:r>
-            <a:endParaRPr lang="en-US" sz="800" dirty="0"/>
-          </a:p>
-        </p:txBody>
-      </p:sp>
-      <p:sp>
-        <p:nvSpPr>
-          <p:cNvPr id="5" name="Text 3"/>
-          <p:cNvSpPr/>
-          <p:nvPr/>
-        </p:nvSpPr>
-        <p:spPr>
-          <a:xfrm>
-            <a:off x="8412480" y="4864608"/>
-            <a:ext cx="320040" cy="219456"/>
-          </a:xfrm>
-          <a:prstGeom prst="rect">
-            <a:avLst/>
-          </a:prstGeom>
-          <a:noFill/>
-          <a:ln/>
-        </p:spPr>
-        <p:txBody>
-          <a:bodyPr wrap="square" lIns="0" tIns="0" rIns="0" bIns="0" rtlCol="0" anchor="ctr"/>
-          <a:lstStyle/>
-          <a:p>
-            <a:pPr algn="r" indent="0" marL="0">
-              <a:buNone/>
-            </a:pPr>
-            <a:r>
-              <a:rPr lang="en-US" sz="800" dirty="0">
-                <a:solidFill>
-                  <a:srgbClr val="5B6B7C"/>
-                </a:solidFill>
-                <a:latin typeface="Arial" pitchFamily="34" charset="0"/>
-                <a:ea typeface="Arial" pitchFamily="34" charset="-122"/>
-                <a:cs typeface="Arial" pitchFamily="34" charset="-120"/>
-              </a:rPr>
-              <a:t>25</a:t>
-            </a:r>
-            <a:endParaRPr lang="en-US" sz="800" dirty="0"/>
-          </a:p>
-        </p:txBody>
-      </p:sp>
-      <p:sp>
-        <p:nvSpPr>
-          <p:cNvPr id="6" name="Shape 4"/>
-          <p:cNvSpPr/>
-          <p:nvPr/>
-        </p:nvSpPr>
-        <p:spPr>
-          <a:xfrm>
-            <a:off x="502920" y="1234440"/>
-            <a:ext cx="4114800" cy="3520440"/>
-          </a:xfrm>
-          <a:prstGeom prst="roundRect">
-            <a:avLst>
-              <a:gd name="adj" fmla="val 1818"/>
-            </a:avLst>
-          </a:prstGeom>
-          <a:solidFill>
-            <a:srgbClr val="FFFFFF"/>
-          </a:solidFill>
-          <a:ln w="9525">
-            <a:solidFill>
-              <a:srgbClr val="C9D4E0"/>
-            </a:solidFill>
-            <a:prstDash val="solid"/>
-          </a:ln>
-          <a:effectLst>
-            <a:outerShdw sx="100000" sy="100000" kx="0" ky="0" algn="bl" rotWithShape="0" blurRad="88900" dist="25400" dir="2700000">
-              <a:srgbClr val="000000">
-                <a:alpha val="14000"/>
-              </a:srgbClr>
-            </a:outerShdw>
-          </a:effectLst>
-        </p:spPr>
-      </p:sp>
-      <p:sp>
-        <p:nvSpPr>
-          <p:cNvPr id="7" name="Text 5"/>
-          <p:cNvSpPr/>
-          <p:nvPr/>
-        </p:nvSpPr>
-        <p:spPr>
-          <a:xfrm>
-            <a:off x="731520" y="1371600"/>
-            <a:ext cx="3657600" cy="1005840"/>
-          </a:xfrm>
-          <a:prstGeom prst="rect">
-            <a:avLst/>
-          </a:prstGeom>
-          <a:noFill/>
-          <a:ln/>
-        </p:spPr>
-        <p:txBody>
-          <a:bodyPr wrap="square" lIns="0" tIns="0" rIns="0" bIns="0" rtlCol="0" anchor="ctr"/>
-          <a:lstStyle/>
-          <a:p>
-            <a:pPr indent="0" marL="0">
-              <a:buNone/>
-            </a:pPr>
-            <a:r>
-              <a:rPr lang="en-US" sz="3800" b="1" dirty="0">
-                <a:solidFill>
-                  <a:srgbClr val="1F3A5F"/>
-                </a:solidFill>
-                <a:latin typeface="Arial" pitchFamily="34" charset="0"/>
-                <a:ea typeface="Arial" pitchFamily="34" charset="-122"/>
-                <a:cs typeface="Arial" pitchFamily="34" charset="-120"/>
-              </a:rPr>
-              <a:t>9</a:t>
-            </a:r>
-            <a:endParaRPr lang="en-US" sz="3800" dirty="0"/>
-          </a:p>
-          <a:p>
-            <a:pPr indent="0" marL="0">
-              <a:buNone/>
-            </a:pPr>
-            <a:r>
-              <a:rPr lang="en-US" sz="1050" dirty="0">
-                <a:solidFill>
-                  <a:srgbClr val="1E293B"/>
-                </a:solidFill>
-                <a:latin typeface="Arial" pitchFamily="34" charset="0"/>
-                <a:ea typeface="Arial" pitchFamily="34" charset="-122"/>
-                <a:cs typeface="Arial" pitchFamily="34" charset="-120"/>
-              </a:rPr>
-              <a:t>NIST SP 800-53 Rev 5 controls (Moderate baseline) satisfied by the Cisco SD-WAN + INR stack</a:t>
-            </a:r>
-            <a:endParaRPr lang="en-US" sz="3800" dirty="0"/>
-          </a:p>
-        </p:txBody>
-      </p:sp>
-      <p:sp>
-        <p:nvSpPr>
-          <p:cNvPr id="8" name="Shape 6"/>
-          <p:cNvSpPr/>
-          <p:nvPr/>
-        </p:nvSpPr>
-        <p:spPr>
-          <a:xfrm>
-            <a:off x="731520" y="2487168"/>
-            <a:ext cx="3657600" cy="237744"/>
-          </a:xfrm>
-          <a:prstGeom prst="roundRect">
-            <a:avLst>
-              <a:gd name="adj" fmla="val 19231"/>
-            </a:avLst>
-          </a:prstGeom>
-          <a:solidFill>
-            <a:srgbClr val="EDF3F9"/>
-          </a:solidFill>
-          <a:ln/>
-        </p:spPr>
-      </p:sp>
-      <p:sp>
-        <p:nvSpPr>
-          <p:cNvPr id="9" name="Text 7"/>
-          <p:cNvSpPr/>
-          <p:nvPr/>
-        </p:nvSpPr>
-        <p:spPr>
-          <a:xfrm>
-            <a:off x="841248" y="2487168"/>
-            <a:ext cx="3474720" cy="237744"/>
-          </a:xfrm>
-          <a:prstGeom prst="rect">
-            <a:avLst/>
-          </a:prstGeom>
-          <a:noFill/>
-          <a:ln/>
-        </p:spPr>
-        <p:txBody>
-          <a:bodyPr wrap="square" lIns="0" tIns="0" rIns="0" bIns="0" rtlCol="0" anchor="ctr"/>
-          <a:lstStyle/>
-          <a:p>
-            <a:pPr indent="0" marL="0">
-              <a:buNone/>
-            </a:pPr>
-            <a:r>
-              <a:rPr lang="en-US" sz="800" b="1" dirty="0">
-                <a:solidFill>
-                  <a:srgbClr val="1F3A5F"/>
-                </a:solidFill>
-                <a:latin typeface="Arial" pitchFamily="34" charset="0"/>
-                <a:ea typeface="Arial" pitchFamily="34" charset="-122"/>
-                <a:cs typeface="Arial" pitchFamily="34" charset="-120"/>
-              </a:rPr>
-              <a:t>SC-8 IPsec on all paths (FIPS AES-256-GCM)</a:t>
-            </a:r>
-            <a:endParaRPr lang="en-US" sz="800" dirty="0"/>
-          </a:p>
-        </p:txBody>
-      </p:sp>
-      <p:sp>
-        <p:nvSpPr>
-          <p:cNvPr id="10" name="Shape 8"/>
-          <p:cNvSpPr/>
-          <p:nvPr/>
-        </p:nvSpPr>
-        <p:spPr>
-          <a:xfrm>
-            <a:off x="731520" y="2770632"/>
-            <a:ext cx="3657600" cy="237744"/>
-          </a:xfrm>
-          <a:prstGeom prst="roundRect">
-            <a:avLst>
-              <a:gd name="adj" fmla="val 19231"/>
-            </a:avLst>
-          </a:prstGeom>
-          <a:solidFill>
-            <a:srgbClr val="EDF3F9"/>
-          </a:solidFill>
-          <a:ln/>
-        </p:spPr>
-      </p:sp>
-      <p:sp>
-        <p:nvSpPr>
-          <p:cNvPr id="11" name="Text 9"/>
-          <p:cNvSpPr/>
-          <p:nvPr/>
-        </p:nvSpPr>
-        <p:spPr>
-          <a:xfrm>
-            <a:off x="841248" y="2770632"/>
-            <a:ext cx="3474720" cy="237744"/>
-          </a:xfrm>
-          <a:prstGeom prst="rect">
-            <a:avLst/>
-          </a:prstGeom>
-          <a:noFill/>
-          <a:ln/>
-        </p:spPr>
-        <p:txBody>
-          <a:bodyPr wrap="square" lIns="0" tIns="0" rIns="0" bIns="0" rtlCol="0" anchor="ctr"/>
-          <a:lstStyle/>
-          <a:p>
-            <a:pPr indent="0" marL="0">
-              <a:buNone/>
-            </a:pPr>
-            <a:r>
-              <a:rPr lang="en-US" sz="800" b="1" dirty="0">
-                <a:solidFill>
-                  <a:srgbClr val="1F3A5F"/>
-                </a:solidFill>
-                <a:latin typeface="Arial" pitchFamily="34" charset="0"/>
-                <a:ea typeface="Arial" pitchFamily="34" charset="-122"/>
-                <a:cs typeface="Arial" pitchFamily="34" charset="-120"/>
-              </a:rPr>
-              <a:t>SC-20/21 Umbrella DoH/DoT DNS</a:t>
-            </a:r>
-            <a:endParaRPr lang="en-US" sz="800" dirty="0"/>
-          </a:p>
-        </p:txBody>
-      </p:sp>
-      <p:sp>
-        <p:nvSpPr>
-          <p:cNvPr id="12" name="Shape 10"/>
-          <p:cNvSpPr/>
-          <p:nvPr/>
-        </p:nvSpPr>
-        <p:spPr>
-          <a:xfrm>
-            <a:off x="731520" y="3054096"/>
-            <a:ext cx="3657600" cy="237744"/>
-          </a:xfrm>
-          <a:prstGeom prst="roundRect">
-            <a:avLst>
-              <a:gd name="adj" fmla="val 19231"/>
-            </a:avLst>
-          </a:prstGeom>
-          <a:solidFill>
-            <a:srgbClr val="EDF3F9"/>
-          </a:solidFill>
-          <a:ln/>
-        </p:spPr>
-      </p:sp>
-      <p:sp>
-        <p:nvSpPr>
-          <p:cNvPr id="13" name="Text 11"/>
-          <p:cNvSpPr/>
-          <p:nvPr/>
-        </p:nvSpPr>
-        <p:spPr>
-          <a:xfrm>
-            <a:off x="841248" y="3054096"/>
-            <a:ext cx="3474720" cy="237744"/>
-          </a:xfrm>
-          <a:prstGeom prst="rect">
-            <a:avLst/>
-          </a:prstGeom>
-          <a:noFill/>
-          <a:ln/>
-        </p:spPr>
-        <p:txBody>
-          <a:bodyPr wrap="square" lIns="0" tIns="0" rIns="0" bIns="0" rtlCol="0" anchor="ctr"/>
-          <a:lstStyle/>
-          <a:p>
-            <a:pPr indent="0" marL="0">
-              <a:buNone/>
-            </a:pPr>
-            <a:r>
-              <a:rPr lang="en-US" sz="800" b="1" dirty="0">
-                <a:solidFill>
-                  <a:srgbClr val="1F3A5F"/>
-                </a:solidFill>
-                <a:latin typeface="Arial" pitchFamily="34" charset="0"/>
-                <a:ea typeface="Arial" pitchFamily="34" charset="-122"/>
-                <a:cs typeface="Arial" pitchFamily="34" charset="-120"/>
-              </a:rPr>
-              <a:t>AC-4 DPI + per-app policy + CASB</a:t>
-            </a:r>
-            <a:endParaRPr lang="en-US" sz="800" dirty="0"/>
-          </a:p>
-        </p:txBody>
-      </p:sp>
-      <p:sp>
-        <p:nvSpPr>
-          <p:cNvPr id="14" name="Shape 12"/>
-          <p:cNvSpPr/>
-          <p:nvPr/>
-        </p:nvSpPr>
-        <p:spPr>
-          <a:xfrm>
-            <a:off x="731520" y="3337560"/>
-            <a:ext cx="3657600" cy="237744"/>
-          </a:xfrm>
-          <a:prstGeom prst="roundRect">
-            <a:avLst>
-              <a:gd name="adj" fmla="val 19231"/>
-            </a:avLst>
-          </a:prstGeom>
-          <a:solidFill>
-            <a:srgbClr val="EDF3F9"/>
-          </a:solidFill>
-          <a:ln/>
-        </p:spPr>
-      </p:sp>
-      <p:sp>
-        <p:nvSpPr>
-          <p:cNvPr id="15" name="Text 13"/>
-          <p:cNvSpPr/>
-          <p:nvPr/>
-        </p:nvSpPr>
-        <p:spPr>
-          <a:xfrm>
-            <a:off x="841248" y="3337560"/>
-            <a:ext cx="3474720" cy="237744"/>
-          </a:xfrm>
-          <a:prstGeom prst="rect">
-            <a:avLst/>
-          </a:prstGeom>
-          <a:noFill/>
-          <a:ln/>
-        </p:spPr>
-        <p:txBody>
-          <a:bodyPr wrap="square" lIns="0" tIns="0" rIns="0" bIns="0" rtlCol="0" anchor="ctr"/>
-          <a:lstStyle/>
-          <a:p>
-            <a:pPr indent="0" marL="0">
-              <a:buNone/>
-            </a:pPr>
-            <a:r>
-              <a:rPr lang="en-US" sz="800" b="1" dirty="0">
-                <a:solidFill>
-                  <a:srgbClr val="1F3A5F"/>
-                </a:solidFill>
-                <a:latin typeface="Arial" pitchFamily="34" charset="0"/>
-                <a:ea typeface="Arial" pitchFamily="34" charset="-122"/>
-                <a:cs typeface="Arial" pitchFamily="34" charset="-120"/>
-              </a:rPr>
-              <a:t>AU-2/12 full flow telemetry to SIEM</a:t>
-            </a:r>
-            <a:endParaRPr lang="en-US" sz="800" dirty="0"/>
-          </a:p>
-        </p:txBody>
-      </p:sp>
-      <p:sp>
-        <p:nvSpPr>
-          <p:cNvPr id="16" name="Shape 14"/>
-          <p:cNvSpPr/>
-          <p:nvPr/>
-        </p:nvSpPr>
-        <p:spPr>
-          <a:xfrm>
-            <a:off x="731520" y="3621024"/>
-            <a:ext cx="3657600" cy="237744"/>
-          </a:xfrm>
-          <a:prstGeom prst="roundRect">
-            <a:avLst>
-              <a:gd name="adj" fmla="val 19231"/>
-            </a:avLst>
-          </a:prstGeom>
-          <a:solidFill>
-            <a:srgbClr val="EDF3F9"/>
-          </a:solidFill>
-          <a:ln/>
-        </p:spPr>
-      </p:sp>
-      <p:sp>
-        <p:nvSpPr>
-          <p:cNvPr id="17" name="Text 15"/>
-          <p:cNvSpPr/>
-          <p:nvPr/>
-        </p:nvSpPr>
-        <p:spPr>
-          <a:xfrm>
-            <a:off x="841248" y="3621024"/>
-            <a:ext cx="3474720" cy="237744"/>
-          </a:xfrm>
-          <a:prstGeom prst="rect">
-            <a:avLst/>
-          </a:prstGeom>
-          <a:noFill/>
-          <a:ln/>
-        </p:spPr>
-        <p:txBody>
-          <a:bodyPr wrap="square" lIns="0" tIns="0" rIns="0" bIns="0" rtlCol="0" anchor="ctr"/>
-          <a:lstStyle/>
-          <a:p>
-            <a:pPr indent="0" marL="0">
-              <a:buNone/>
-            </a:pPr>
-            <a:r>
-              <a:rPr lang="en-US" sz="800" b="1" dirty="0">
-                <a:solidFill>
-                  <a:srgbClr val="1F3A5F"/>
-                </a:solidFill>
-                <a:latin typeface="Arial" pitchFamily="34" charset="0"/>
-                <a:ea typeface="Arial" pitchFamily="34" charset="-122"/>
-                <a:cs typeface="Arial" pitchFamily="34" charset="-120"/>
-              </a:rPr>
-              <a:t>CA-7 continuous path-quality export</a:t>
-            </a:r>
-            <a:endParaRPr lang="en-US" sz="800" dirty="0"/>
-          </a:p>
-        </p:txBody>
-      </p:sp>
-      <p:sp>
-        <p:nvSpPr>
-          <p:cNvPr id="18" name="Shape 16"/>
-          <p:cNvSpPr/>
-          <p:nvPr/>
-        </p:nvSpPr>
-        <p:spPr>
-          <a:xfrm>
-            <a:off x="731520" y="3904488"/>
-            <a:ext cx="3657600" cy="237744"/>
-          </a:xfrm>
-          <a:prstGeom prst="roundRect">
-            <a:avLst>
-              <a:gd name="adj" fmla="val 19231"/>
-            </a:avLst>
-          </a:prstGeom>
-          <a:solidFill>
-            <a:srgbClr val="EDF3F9"/>
-          </a:solidFill>
-          <a:ln/>
-        </p:spPr>
-      </p:sp>
-      <p:sp>
-        <p:nvSpPr>
-          <p:cNvPr id="19" name="Text 17"/>
-          <p:cNvSpPr/>
-          <p:nvPr/>
-        </p:nvSpPr>
-        <p:spPr>
-          <a:xfrm>
-            <a:off x="841248" y="3904488"/>
-            <a:ext cx="3474720" cy="237744"/>
-          </a:xfrm>
-          <a:prstGeom prst="rect">
-            <a:avLst/>
-          </a:prstGeom>
-          <a:noFill/>
-          <a:ln/>
-        </p:spPr>
-        <p:txBody>
-          <a:bodyPr wrap="square" lIns="0" tIns="0" rIns="0" bIns="0" rtlCol="0" anchor="ctr"/>
-          <a:lstStyle/>
-          <a:p>
-            <a:pPr indent="0" marL="0">
-              <a:buNone/>
-            </a:pPr>
-            <a:r>
-              <a:rPr lang="en-US" sz="800" b="1" dirty="0">
-                <a:solidFill>
-                  <a:srgbClr val="1F3A5F"/>
-                </a:solidFill>
-                <a:latin typeface="Arial" pitchFamily="34" charset="0"/>
-                <a:ea typeface="Arial" pitchFamily="34" charset="-122"/>
-                <a:cs typeface="Arial" pitchFamily="34" charset="-120"/>
-              </a:rPr>
-              <a:t>SI-4 XDR behavioral anomaly detection</a:t>
-            </a:r>
-            <a:endParaRPr lang="en-US" sz="800" dirty="0"/>
-          </a:p>
-        </p:txBody>
-      </p:sp>
-      <p:sp>
-        <p:nvSpPr>
-          <p:cNvPr id="20" name="Shape 18"/>
-          <p:cNvSpPr/>
-          <p:nvPr/>
-        </p:nvSpPr>
-        <p:spPr>
-          <a:xfrm>
-            <a:off x="731520" y="4187952"/>
-            <a:ext cx="3657600" cy="237744"/>
-          </a:xfrm>
-          <a:prstGeom prst="roundRect">
-            <a:avLst>
-              <a:gd name="adj" fmla="val 19231"/>
-            </a:avLst>
-          </a:prstGeom>
-          <a:solidFill>
-            <a:srgbClr val="EDF3F9"/>
-          </a:solidFill>
-          <a:ln/>
-        </p:spPr>
-      </p:sp>
-      <p:sp>
-        <p:nvSpPr>
-          <p:cNvPr id="21" name="Text 19"/>
-          <p:cNvSpPr/>
-          <p:nvPr/>
-        </p:nvSpPr>
-        <p:spPr>
-          <a:xfrm>
-            <a:off x="841248" y="4187952"/>
-            <a:ext cx="3474720" cy="237744"/>
-          </a:xfrm>
-          <a:prstGeom prst="rect">
-            <a:avLst/>
-          </a:prstGeom>
-          <a:noFill/>
-          <a:ln/>
-        </p:spPr>
-        <p:txBody>
-          <a:bodyPr wrap="square" lIns="0" tIns="0" rIns="0" bIns="0" rtlCol="0" anchor="ctr"/>
-          <a:lstStyle/>
-          <a:p>
-            <a:pPr indent="0" marL="0">
-              <a:buNone/>
-            </a:pPr>
-            <a:r>
-              <a:rPr lang="en-US" sz="800" b="1" dirty="0">
-                <a:solidFill>
-                  <a:srgbClr val="1F3A5F"/>
-                </a:solidFill>
-                <a:latin typeface="Arial" pitchFamily="34" charset="0"/>
-                <a:ea typeface="Arial" pitchFamily="34" charset="-122"/>
-                <a:cs typeface="Arial" pitchFamily="34" charset="-120"/>
-              </a:rPr>
-              <a:t>CM-2/CM-7 templates ARE the baseline</a:t>
-            </a:r>
-            <a:endParaRPr lang="en-US" sz="800" dirty="0"/>
-          </a:p>
-        </p:txBody>
-      </p:sp>
-      <p:sp>
-        <p:nvSpPr>
-          <p:cNvPr id="22" name="Shape 20"/>
-          <p:cNvSpPr/>
-          <p:nvPr/>
-        </p:nvSpPr>
-        <p:spPr>
-          <a:xfrm>
-            <a:off x="731520" y="4471416"/>
-            <a:ext cx="3657600" cy="237744"/>
-          </a:xfrm>
-          <a:prstGeom prst="roundRect">
-            <a:avLst>
-              <a:gd name="adj" fmla="val 19231"/>
-            </a:avLst>
-          </a:prstGeom>
-          <a:solidFill>
-            <a:srgbClr val="EDF3F9"/>
-          </a:solidFill>
-          <a:ln/>
-        </p:spPr>
-      </p:sp>
-      <p:sp>
-        <p:nvSpPr>
-          <p:cNvPr id="23" name="Text 21"/>
-          <p:cNvSpPr/>
-          <p:nvPr/>
-        </p:nvSpPr>
-        <p:spPr>
-          <a:xfrm>
-            <a:off x="841248" y="4471416"/>
-            <a:ext cx="3474720" cy="237744"/>
-          </a:xfrm>
-          <a:prstGeom prst="rect">
-            <a:avLst/>
-          </a:prstGeom>
-          <a:noFill/>
-          <a:ln/>
-        </p:spPr>
-        <p:txBody>
-          <a:bodyPr wrap="square" lIns="0" tIns="0" rIns="0" bIns="0" rtlCol="0" anchor="ctr"/>
-          <a:lstStyle/>
-          <a:p>
-            <a:pPr indent="0" marL="0">
-              <a:buNone/>
-            </a:pPr>
-            <a:r>
-              <a:rPr lang="en-US" sz="800" b="1" dirty="0">
-                <a:solidFill>
-                  <a:srgbClr val="1F3A5F"/>
-                </a:solidFill>
-                <a:latin typeface="Arial" pitchFamily="34" charset="0"/>
-                <a:ea typeface="Arial" pitchFamily="34" charset="-122"/>
-                <a:cs typeface="Arial" pitchFamily="34" charset="-120"/>
-              </a:rPr>
-              <a:t>IR-4 branch isolation in seconds</a:t>
-            </a:r>
-            <a:endParaRPr lang="en-US" sz="800" dirty="0"/>
-          </a:p>
-        </p:txBody>
-      </p:sp>
-      <p:sp>
-        <p:nvSpPr>
-          <p:cNvPr id="24" name="Shape 22"/>
-          <p:cNvSpPr/>
-          <p:nvPr/>
-        </p:nvSpPr>
-        <p:spPr>
-          <a:xfrm>
-            <a:off x="4800600" y="1234440"/>
-            <a:ext cx="3931920" cy="3520440"/>
-          </a:xfrm>
-          <a:prstGeom prst="roundRect">
-            <a:avLst>
-              <a:gd name="adj" fmla="val 1818"/>
-            </a:avLst>
-          </a:prstGeom>
-          <a:solidFill>
-            <a:srgbClr val="FFFFFF"/>
-          </a:solidFill>
-          <a:ln w="9525">
-            <a:solidFill>
-              <a:srgbClr val="C9D4E0"/>
-            </a:solidFill>
-            <a:prstDash val="solid"/>
-          </a:ln>
-          <a:effectLst>
-            <a:outerShdw sx="100000" sy="100000" kx="0" ky="0" algn="bl" rotWithShape="0" blurRad="88900" dist="25400" dir="2700000">
-              <a:srgbClr val="000000">
-                <a:alpha val="14000"/>
-              </a:srgbClr>
-            </a:outerShdw>
-          </a:effectLst>
-        </p:spPr>
-      </p:sp>
-      <p:sp>
-        <p:nvSpPr>
-          <p:cNvPr id="25" name="Text 23"/>
-          <p:cNvSpPr/>
-          <p:nvPr/>
-        </p:nvSpPr>
-        <p:spPr>
-          <a:xfrm>
-            <a:off x="5029200" y="1371600"/>
-            <a:ext cx="3566160" cy="256032"/>
-          </a:xfrm>
-          <a:prstGeom prst="rect">
-            <a:avLst/>
-          </a:prstGeom>
-          <a:noFill/>
-          <a:ln/>
-        </p:spPr>
-        <p:txBody>
-          <a:bodyPr wrap="square" lIns="0" tIns="0" rIns="0" bIns="0" rtlCol="0" anchor="ctr"/>
-          <a:lstStyle/>
-          <a:p>
-            <a:pPr indent="0" marL="0">
-              <a:buNone/>
-            </a:pPr>
-            <a:r>
-              <a:rPr lang="en-US" sz="1000" b="1" spc="120" kern="0" dirty="0">
-                <a:solidFill>
-                  <a:srgbClr val="D4860B"/>
-                </a:solidFill>
-                <a:latin typeface="Arial" pitchFamily="34" charset="0"/>
-                <a:ea typeface="Arial" pitchFamily="34" charset="-122"/>
-                <a:cs typeface="Arial" pitchFamily="34" charset="-120"/>
-              </a:rPr>
-              <a:t>FEDRAMP 20X KSI EVIDENCE CONTRACTS</a:t>
-            </a:r>
-            <a:endParaRPr lang="en-US" sz="1000" dirty="0"/>
-          </a:p>
-        </p:txBody>
-      </p:sp>
-      <p:sp>
-        <p:nvSpPr>
-          <p:cNvPr id="26" name="Shape 24"/>
-          <p:cNvSpPr/>
-          <p:nvPr/>
-        </p:nvSpPr>
-        <p:spPr>
-          <a:xfrm>
-            <a:off x="5029200" y="1810512"/>
-            <a:ext cx="118872" cy="118872"/>
-          </a:xfrm>
-          <a:prstGeom prst="ellipse">
-            <a:avLst/>
-          </a:prstGeom>
-          <a:solidFill>
-            <a:srgbClr val="1A9E8F"/>
-          </a:solidFill>
-          <a:ln/>
-        </p:spPr>
-      </p:sp>
-      <p:sp>
-        <p:nvSpPr>
-          <p:cNvPr id="27" name="Text 25"/>
-          <p:cNvSpPr/>
-          <p:nvPr/>
-        </p:nvSpPr>
-        <p:spPr>
-          <a:xfrm>
-            <a:off x="5248656" y="1755648"/>
-            <a:ext cx="3337560" cy="676656"/>
-          </a:xfrm>
-          <a:prstGeom prst="rect">
-            <a:avLst/>
-          </a:prstGeom>
-          <a:noFill/>
-          <a:ln/>
-        </p:spPr>
-        <p:txBody>
-          <a:bodyPr wrap="square" lIns="0" tIns="0" rIns="0" bIns="0" rtlCol="0" anchor="t"/>
-          <a:lstStyle/>
-          <a:p>
-            <a:pPr indent="0" marL="0">
-              <a:buNone/>
-            </a:pPr>
-            <a:r>
-              <a:rPr lang="en-US" sz="900" b="1" dirty="0">
-                <a:solidFill>
-                  <a:srgbClr val="1F3A5F"/>
-                </a:solidFill>
-                <a:latin typeface="Arial" pitchFamily="34" charset="0"/>
-                <a:ea typeface="Arial" pitchFamily="34" charset="-122"/>
-                <a:cs typeface="Arial" pitchFamily="34" charset="-120"/>
-              </a:rPr>
-              <a:t>KSI-CNA  </a:t>
-            </a:r>
-            <a:pPr indent="0" marL="0">
-              <a:buNone/>
-            </a:pPr>
-            <a:r>
-              <a:rPr lang="en-US" sz="900" dirty="0">
-                <a:solidFill>
-                  <a:srgbClr val="1E293B"/>
-                </a:solidFill>
-                <a:latin typeface="Arial" pitchFamily="34" charset="0"/>
-                <a:ea typeface="Arial" pitchFamily="34" charset="-122"/>
-                <a:cs typeface="Arial" pitchFamily="34" charset="-120"/>
-              </a:rPr>
-              <a:t>Cloud OnRamp policy defines authorized M365 egress; deviation is a logged event</a:t>
-            </a:r>
-            <a:endParaRPr lang="en-US" sz="900" dirty="0"/>
-          </a:p>
-        </p:txBody>
-      </p:sp>
-      <p:sp>
-        <p:nvSpPr>
-          <p:cNvPr id="28" name="Shape 26"/>
-          <p:cNvSpPr/>
-          <p:nvPr/>
-        </p:nvSpPr>
-        <p:spPr>
-          <a:xfrm>
-            <a:off x="5029200" y="2523744"/>
-            <a:ext cx="118872" cy="118872"/>
-          </a:xfrm>
-          <a:prstGeom prst="ellipse">
-            <a:avLst/>
-          </a:prstGeom>
-          <a:solidFill>
-            <a:srgbClr val="1A9E8F"/>
-          </a:solidFill>
-          <a:ln/>
-        </p:spPr>
-      </p:sp>
-      <p:sp>
-        <p:nvSpPr>
-          <p:cNvPr id="29" name="Text 27"/>
-          <p:cNvSpPr/>
-          <p:nvPr/>
-        </p:nvSpPr>
-        <p:spPr>
-          <a:xfrm>
-            <a:off x="5248656" y="2468880"/>
-            <a:ext cx="3337560" cy="676656"/>
-          </a:xfrm>
-          <a:prstGeom prst="rect">
-            <a:avLst/>
-          </a:prstGeom>
-          <a:noFill/>
-          <a:ln/>
-        </p:spPr>
-        <p:txBody>
-          <a:bodyPr wrap="square" lIns="0" tIns="0" rIns="0" bIns="0" rtlCol="0" anchor="t"/>
-          <a:lstStyle/>
-          <a:p>
-            <a:pPr indent="0" marL="0">
-              <a:buNone/>
-            </a:pPr>
-            <a:r>
-              <a:rPr lang="en-US" sz="900" b="1" dirty="0">
-                <a:solidFill>
-                  <a:srgbClr val="1F3A5F"/>
-                </a:solidFill>
-                <a:latin typeface="Arial" pitchFamily="34" charset="0"/>
-                <a:ea typeface="Arial" pitchFamily="34" charset="-122"/>
-                <a:cs typeface="Arial" pitchFamily="34" charset="-120"/>
-              </a:rPr>
-              <a:t>KSI-MLA  </a:t>
-            </a:r>
-            <a:pPr indent="0" marL="0">
-              <a:buNone/>
-            </a:pPr>
-            <a:r>
-              <a:rPr lang="en-US" sz="900" dirty="0">
-                <a:solidFill>
-                  <a:srgbClr val="1E293B"/>
-                </a:solidFill>
-                <a:latin typeface="Arial" pitchFamily="34" charset="0"/>
-                <a:ea typeface="Arial" pitchFamily="34" charset="-122"/>
-                <a:cs typeface="Arial" pitchFamily="34" charset="-120"/>
-              </a:rPr>
-              <a:t>Per-flow telemetry — app ID, path, policy, timestamp — streamed to SIEM as JSON</a:t>
-            </a:r>
-            <a:endParaRPr lang="en-US" sz="900" dirty="0"/>
-          </a:p>
-        </p:txBody>
-      </p:sp>
-      <p:sp>
-        <p:nvSpPr>
-          <p:cNvPr id="30" name="Shape 28"/>
-          <p:cNvSpPr/>
-          <p:nvPr/>
-        </p:nvSpPr>
-        <p:spPr>
-          <a:xfrm>
-            <a:off x="5029200" y="3236976"/>
-            <a:ext cx="118872" cy="118872"/>
-          </a:xfrm>
-          <a:prstGeom prst="ellipse">
-            <a:avLst/>
-          </a:prstGeom>
-          <a:solidFill>
-            <a:srgbClr val="1A9E8F"/>
-          </a:solidFill>
-          <a:ln/>
-        </p:spPr>
-      </p:sp>
-      <p:sp>
-        <p:nvSpPr>
-          <p:cNvPr id="31" name="Text 29"/>
-          <p:cNvSpPr/>
-          <p:nvPr/>
-        </p:nvSpPr>
-        <p:spPr>
-          <a:xfrm>
-            <a:off x="5248656" y="3182112"/>
-            <a:ext cx="3337560" cy="676656"/>
-          </a:xfrm>
-          <a:prstGeom prst="rect">
-            <a:avLst/>
-          </a:prstGeom>
-          <a:noFill/>
-          <a:ln/>
-        </p:spPr>
-        <p:txBody>
-          <a:bodyPr wrap="square" lIns="0" tIns="0" rIns="0" bIns="0" rtlCol="0" anchor="t"/>
-          <a:lstStyle/>
-          <a:p>
-            <a:pPr indent="0" marL="0">
-              <a:buNone/>
-            </a:pPr>
-            <a:r>
-              <a:rPr lang="en-US" sz="900" b="1" dirty="0">
-                <a:solidFill>
-                  <a:srgbClr val="1F3A5F"/>
-                </a:solidFill>
-                <a:latin typeface="Arial" pitchFamily="34" charset="0"/>
-                <a:ea typeface="Arial" pitchFamily="34" charset="-122"/>
-                <a:cs typeface="Arial" pitchFamily="34" charset="-120"/>
-              </a:rPr>
-              <a:t>KSI-SVC  </a:t>
-            </a:r>
-            <a:pPr indent="0" marL="0">
-              <a:buNone/>
-            </a:pPr>
-            <a:r>
-              <a:rPr lang="en-US" sz="900" dirty="0">
-                <a:solidFill>
-                  <a:srgbClr val="1E293B"/>
-                </a:solidFill>
-                <a:latin typeface="Arial" pitchFamily="34" charset="0"/>
-                <a:ea typeface="Arial" pitchFamily="34" charset="-122"/>
-                <a:cs typeface="Arial" pitchFamily="34" charset="-120"/>
-              </a:rPr>
-              <a:t>cEdge config must match the Manager template; drift detected and logged</a:t>
-            </a:r>
-            <a:endParaRPr lang="en-US" sz="900" dirty="0"/>
-          </a:p>
-        </p:txBody>
-      </p:sp>
-      <p:sp>
-        <p:nvSpPr>
-          <p:cNvPr id="32" name="Shape 30"/>
-          <p:cNvSpPr/>
-          <p:nvPr/>
-        </p:nvSpPr>
-        <p:spPr>
-          <a:xfrm>
-            <a:off x="5029200" y="3950208"/>
-            <a:ext cx="118872" cy="118872"/>
-          </a:xfrm>
-          <a:prstGeom prst="ellipse">
-            <a:avLst/>
-          </a:prstGeom>
-          <a:solidFill>
-            <a:srgbClr val="1A9E8F"/>
-          </a:solidFill>
-          <a:ln/>
-        </p:spPr>
-      </p:sp>
-      <p:sp>
-        <p:nvSpPr>
-          <p:cNvPr id="33" name="Text 31"/>
-          <p:cNvSpPr/>
-          <p:nvPr/>
-        </p:nvSpPr>
-        <p:spPr>
-          <a:xfrm>
-            <a:off x="5248656" y="3895344"/>
-            <a:ext cx="3337560" cy="676656"/>
-          </a:xfrm>
-          <a:prstGeom prst="rect">
-            <a:avLst/>
-          </a:prstGeom>
-          <a:noFill/>
-          <a:ln/>
-        </p:spPr>
-        <p:txBody>
-          <a:bodyPr wrap="square" lIns="0" tIns="0" rIns="0" bIns="0" rtlCol="0" anchor="t"/>
-          <a:lstStyle/>
-          <a:p>
-            <a:pPr indent="0" marL="0">
-              <a:buNone/>
-            </a:pPr>
-            <a:r>
-              <a:rPr lang="en-US" sz="900" b="1" dirty="0">
-                <a:solidFill>
-                  <a:srgbClr val="1F3A5F"/>
-                </a:solidFill>
-                <a:latin typeface="Arial" pitchFamily="34" charset="0"/>
-                <a:ea typeface="Arial" pitchFamily="34" charset="-122"/>
-                <a:cs typeface="Arial" pitchFamily="34" charset="-120"/>
-              </a:rPr>
-              <a:t>KSI-CMT  </a:t>
-            </a:r>
-            <a:pPr indent="0" marL="0">
-              <a:buNone/>
-            </a:pPr>
-            <a:r>
-              <a:rPr lang="en-US" sz="900" dirty="0">
-                <a:solidFill>
-                  <a:srgbClr val="1E293B"/>
-                </a:solidFill>
-                <a:latin typeface="Arial" pitchFamily="34" charset="0"/>
-                <a:ea typeface="Arial" pitchFamily="34" charset="-122"/>
-                <a:cs typeface="Arial" pitchFamily="34" charset="-120"/>
-              </a:rPr>
-              <a:t>Every policy change is a timestamped audit entry; templates dry-run + Git version-controlled</a:t>
-            </a:r>
-            <a:endParaRPr lang="en-US" sz="900" dirty="0"/>
-          </a:p>
-        </p:txBody>
-      </p:sp>
-      <p:sp>
-        <p:nvSpPr>
-          <p:cNvPr id="34" name="Text 32"/>
-          <p:cNvSpPr/>
-          <p:nvPr/>
-        </p:nvSpPr>
-        <p:spPr>
-          <a:xfrm>
-            <a:off x="5029200" y="4434840"/>
-            <a:ext cx="3520440" cy="274320"/>
-          </a:xfrm>
-          <a:prstGeom prst="rect">
-            <a:avLst/>
-          </a:prstGeom>
-          <a:noFill/>
-          <a:ln/>
-        </p:spPr>
-        <p:txBody>
-          <a:bodyPr wrap="square" lIns="0" tIns="0" rIns="0" bIns="0" rtlCol="0" anchor="ctr"/>
-          <a:lstStyle/>
-          <a:p>
-            <a:pPr indent="0" marL="0">
-              <a:buNone/>
-            </a:pPr>
-            <a:r>
-              <a:rPr lang="en-US" sz="850" i="1" dirty="0">
-                <a:solidFill>
-                  <a:srgbClr val="5B6B7C"/>
-                </a:solidFill>
-                <a:latin typeface="Arial" pitchFamily="34" charset="0"/>
-                <a:ea typeface="Arial" pitchFamily="34" charset="-122"/>
-                <a:cs typeface="Arial" pitchFamily="34" charset="-120"/>
-              </a:rPr>
-              <a:t>Evidence binds to AAN slot 03 (network control plane) — no additional slot required.</a:t>
-            </a:r>
-            <a:endParaRPr lang="en-US" sz="850" dirty="0"/>
-          </a:p>
-        </p:txBody>
-      </p:sp>
-    </p:spTree>
-  </p:cSld>
-  <p:clrMapOvr>
-    <a:masterClrMapping/>
-  </p:clrMapOvr>
-</p:sld>
-</file>
-
 <file path=ppt/slides/slide26.xml><?xml version="1.0" encoding="utf-8"?>
 <p:sld xmlns:a="http://schemas.openxmlformats.org/drawingml/2006/main" xmlns:r="http://schemas.openxmlformats.org/officeDocument/2006/relationships" xmlns:p="http://schemas.openxmlformats.org/presentationml/2006/main">
   <p:cSld name="Slide 26">
@@ -25964,7 +25883,7 @@
                 <a:ea typeface="Arial" pitchFamily="34" charset="-122"/>
                 <a:cs typeface="Arial" pitchFamily="34" charset="-120"/>
               </a:rPr>
-              <a:t>APPENDIX — FROM AUTHORIZATION TO PRODUCTION</a:t>
+              <a:t>APPENDIX — WHAT THE PLATFORM EVIDENCES</a:t>
             </a:r>
             <a:endParaRPr lang="en-US" sz="1100" dirty="0"/>
           </a:p>
@@ -25995,7 +25914,7 @@
               <a:buNone/>
             </a:pPr>
             <a:r>
-              <a:rPr lang="en-US" sz="2300" b="1" dirty="0">
+              <a:rPr lang="en-US" sz="2200" b="1" dirty="0">
                 <a:solidFill>
                   <a:srgbClr val="1F3A5F"/>
                 </a:solidFill>
@@ -26003,9 +25922,9 @@
                 <a:ea typeface="Arial" pitchFamily="34" charset="-122"/>
                 <a:cs typeface="Arial" pitchFamily="34" charset="-120"/>
               </a:rPr>
-              <a:t>The greenfield sequence: boundary first, evidence last</a:t>
-            </a:r>
-            <a:endParaRPr lang="en-US" sz="2300" dirty="0"/>
+              <a:t>Nine controls satisfied; KSI evidence contracts in native JSON</a:t>
+            </a:r>
+            <a:endParaRPr lang="en-US" sz="2200" dirty="0"/>
           </a:p>
         </p:txBody>
       </p:sp>
@@ -26042,7 +25961,7 @@
                 <a:ea typeface="Arial" pitchFamily="34" charset="-122"/>
                 <a:cs typeface="Arial" pitchFamily="34" charset="-120"/>
               </a:rPr>
-              <a:t>Federal AAN — Book 05 Network Modernization · CSI Team Draft — Internal · FedRAMP Moderate · Date Code 2026-07-07 11:36 ET</a:t>
+              <a:t>Federal AAN — Book 05 Network Modernization · CSI Team Draft — Internal · FedRAMP Moderate · Date Code 2026-07-07 11:57 ET</a:t>
             </a:r>
             <a:endParaRPr lang="en-US" sz="800" dirty="0"/>
           </a:p>
@@ -26095,12 +26014,12 @@
         </p:nvSpPr>
         <p:spPr>
           <a:xfrm>
-            <a:off x="457200" y="1280160"/>
-            <a:ext cx="2697480" cy="1051560"/>
+            <a:off x="502920" y="1234440"/>
+            <a:ext cx="4114800" cy="3520440"/>
           </a:xfrm>
           <a:prstGeom prst="roundRect">
             <a:avLst>
-              <a:gd name="adj" fmla="val 6087"/>
+              <a:gd name="adj" fmla="val 1818"/>
             </a:avLst>
           </a:prstGeom>
           <a:solidFill>
@@ -26123,34 +26042,14 @@
       </p:sp>
       <p:sp>
         <p:nvSpPr>
-          <p:cNvPr id="7" name="Shape 5"/>
-          <p:cNvSpPr/>
-          <p:nvPr/>
-        </p:nvSpPr>
-        <p:spPr>
-          <a:xfrm>
-            <a:off x="566928" y="1389888"/>
-            <a:ext cx="292608" cy="292608"/>
-          </a:xfrm>
-          <a:prstGeom prst="ellipse">
-            <a:avLst/>
-          </a:prstGeom>
-          <a:solidFill>
-            <a:srgbClr val="1F3A5F"/>
-          </a:solidFill>
-          <a:ln/>
-        </p:spPr>
-      </p:sp>
-      <p:sp>
-        <p:nvSpPr>
-          <p:cNvPr id="8" name="Text 6"/>
-          <p:cNvSpPr/>
-          <p:nvPr/>
-        </p:nvSpPr>
-        <p:spPr>
-          <a:xfrm>
-            <a:off x="566928" y="1376172"/>
-            <a:ext cx="292608" cy="292608"/>
+          <p:cNvPr id="7" name="Text 5"/>
+          <p:cNvSpPr/>
+          <p:nvPr/>
+        </p:nvSpPr>
+        <p:spPr>
+          <a:xfrm>
+            <a:off x="731520" y="1371600"/>
+            <a:ext cx="3657600" cy="1005840"/>
           </a:xfrm>
           <a:prstGeom prst="rect">
             <a:avLst/>
@@ -26162,34 +26061,73 @@
           <a:bodyPr wrap="square" lIns="0" tIns="0" rIns="0" bIns="0" rtlCol="0" anchor="ctr"/>
           <a:lstStyle/>
           <a:p>
-            <a:pPr algn="ctr" indent="0" marL="0">
+            <a:pPr indent="0" marL="0">
               <a:buNone/>
             </a:pPr>
             <a:r>
-              <a:rPr lang="en-US" sz="1300" b="1" dirty="0">
-                <a:solidFill>
-                  <a:srgbClr val="FFFFFF"/>
-                </a:solidFill>
-                <a:latin typeface="Arial" pitchFamily="34" charset="0"/>
-                <a:ea typeface="Arial" pitchFamily="34" charset="-122"/>
-                <a:cs typeface="Arial" pitchFamily="34" charset="-120"/>
-              </a:rPr>
-              <a:t>1</a:t>
-            </a:r>
-            <a:endParaRPr lang="en-US" sz="1300" dirty="0"/>
+              <a:rPr lang="en-US" sz="3800" b="1" dirty="0">
+                <a:solidFill>
+                  <a:srgbClr val="1F3A5F"/>
+                </a:solidFill>
+                <a:latin typeface="Arial" pitchFamily="34" charset="0"/>
+                <a:ea typeface="Arial" pitchFamily="34" charset="-122"/>
+                <a:cs typeface="Arial" pitchFamily="34" charset="-120"/>
+              </a:rPr>
+              <a:t>9</a:t>
+            </a:r>
+            <a:endParaRPr lang="en-US" sz="3800" dirty="0"/>
+          </a:p>
+          <a:p>
+            <a:pPr indent="0" marL="0">
+              <a:buNone/>
+            </a:pPr>
+            <a:r>
+              <a:rPr lang="en-US" sz="1050" dirty="0">
+                <a:solidFill>
+                  <a:srgbClr val="1E293B"/>
+                </a:solidFill>
+                <a:latin typeface="Arial" pitchFamily="34" charset="0"/>
+                <a:ea typeface="Arial" pitchFamily="34" charset="-122"/>
+                <a:cs typeface="Arial" pitchFamily="34" charset="-120"/>
+              </a:rPr>
+              <a:t>NIST SP 800-53 Rev 5 controls (Moderate baseline) satisfied by the Cisco SD-WAN + INR stack</a:t>
+            </a:r>
+            <a:endParaRPr lang="en-US" sz="3800" dirty="0"/>
           </a:p>
         </p:txBody>
       </p:sp>
       <p:sp>
         <p:nvSpPr>
+          <p:cNvPr id="8" name="Shape 6"/>
+          <p:cNvSpPr/>
+          <p:nvPr/>
+        </p:nvSpPr>
+        <p:spPr>
+          <a:xfrm>
+            <a:off x="731520" y="2487168"/>
+            <a:ext cx="3657600" cy="237744"/>
+          </a:xfrm>
+          <a:prstGeom prst="roundRect">
+            <a:avLst>
+              <a:gd name="adj" fmla="val 19231"/>
+            </a:avLst>
+          </a:prstGeom>
+          <a:solidFill>
+            <a:srgbClr val="EDF3F9"/>
+          </a:solidFill>
+          <a:ln/>
+        </p:spPr>
+      </p:sp>
+      <p:sp>
+        <p:nvSpPr>
           <p:cNvPr id="9" name="Text 7"/>
           <p:cNvSpPr/>
           <p:nvPr/>
         </p:nvSpPr>
         <p:spPr>
           <a:xfrm>
-            <a:off x="932688" y="1353312"/>
-            <a:ext cx="2130552" cy="365760"/>
+            <a:off x="841248" y="2487168"/>
+            <a:ext cx="3474720" cy="237744"/>
           </a:xfrm>
           <a:prstGeom prst="rect">
             <a:avLst/>
@@ -26205,30 +26143,52 @@
               <a:buNone/>
             </a:pPr>
             <a:r>
-              <a:rPr lang="en-US" sz="1000" b="1" dirty="0">
-                <a:solidFill>
-                  <a:srgbClr val="1E293B"/>
-                </a:solidFill>
-                <a:latin typeface="Arial" pitchFamily="34" charset="0"/>
-                <a:ea typeface="Arial" pitchFamily="34" charset="-122"/>
-                <a:cs typeface="Arial" pitchFamily="34" charset="-120"/>
-              </a:rPr>
-              <a:t>Boundary documentation</a:t>
-            </a:r>
-            <a:endParaRPr lang="en-US" sz="1000" dirty="0"/>
+              <a:rPr lang="en-US" sz="800" b="1" dirty="0">
+                <a:solidFill>
+                  <a:srgbClr val="1F3A5F"/>
+                </a:solidFill>
+                <a:latin typeface="Arial" pitchFamily="34" charset="0"/>
+                <a:ea typeface="Arial" pitchFamily="34" charset="-122"/>
+                <a:cs typeface="Arial" pitchFamily="34" charset="-120"/>
+              </a:rPr>
+              <a:t>SC-8 IPsec on all paths (FIPS AES-256-GCM)</a:t>
+            </a:r>
+            <a:endParaRPr lang="en-US" sz="800" dirty="0"/>
           </a:p>
         </p:txBody>
       </p:sp>
       <p:sp>
         <p:nvSpPr>
-          <p:cNvPr id="10" name="Text 8"/>
-          <p:cNvSpPr/>
-          <p:nvPr/>
-        </p:nvSpPr>
-        <p:spPr>
-          <a:xfrm>
-            <a:off x="566928" y="1755648"/>
-            <a:ext cx="2478024" cy="530352"/>
+          <p:cNvPr id="10" name="Shape 8"/>
+          <p:cNvSpPr/>
+          <p:nvPr/>
+        </p:nvSpPr>
+        <p:spPr>
+          <a:xfrm>
+            <a:off x="731520" y="2770632"/>
+            <a:ext cx="3657600" cy="237744"/>
+          </a:xfrm>
+          <a:prstGeom prst="roundRect">
+            <a:avLst>
+              <a:gd name="adj" fmla="val 19231"/>
+            </a:avLst>
+          </a:prstGeom>
+          <a:solidFill>
+            <a:srgbClr val="EDF3F9"/>
+          </a:solidFill>
+          <a:ln/>
+        </p:spPr>
+      </p:sp>
+      <p:sp>
+        <p:nvSpPr>
+          <p:cNvPr id="11" name="Text 9"/>
+          <p:cNvSpPr/>
+          <p:nvPr/>
+        </p:nvSpPr>
+        <p:spPr>
+          <a:xfrm>
+            <a:off x="841248" y="2770632"/>
+            <a:ext cx="3474720" cy="237744"/>
           </a:xfrm>
           <a:prstGeom prst="rect">
             <a:avLst/>
@@ -26244,15 +26204,15 @@
               <a:buNone/>
             </a:pPr>
             <a:r>
-              <a:rPr lang="en-US" sz="800" dirty="0">
-                <a:solidFill>
-                  <a:srgbClr val="5B6B7C"/>
-                </a:solidFill>
-                <a:latin typeface="Arial" pitchFamily="34" charset="0"/>
-                <a:ea typeface="Arial" pitchFamily="34" charset="-122"/>
-                <a:cs typeface="Arial" pitchFamily="34" charset="-120"/>
-              </a:rPr>
-              <a:t>Classify every component; verify Cisco SaaS FedRAMP status; draft ISAs for M365 GCC + Azure VWan</a:t>
+              <a:rPr lang="en-US" sz="800" b="1" dirty="0">
+                <a:solidFill>
+                  <a:srgbClr val="1F3A5F"/>
+                </a:solidFill>
+                <a:latin typeface="Arial" pitchFamily="34" charset="0"/>
+                <a:ea typeface="Arial" pitchFamily="34" charset="-122"/>
+                <a:cs typeface="Arial" pitchFamily="34" charset="-120"/>
+              </a:rPr>
+              <a:t>SC-20/21 Umbrella DoH/DoT DNS</a:t>
             </a:r>
             <a:endParaRPr lang="en-US" sz="800" dirty="0"/>
           </a:p>
@@ -26260,18 +26220,384 @@
       </p:sp>
       <p:sp>
         <p:nvSpPr>
-          <p:cNvPr id="11" name="Shape 9"/>
-          <p:cNvSpPr/>
-          <p:nvPr/>
-        </p:nvSpPr>
-        <p:spPr>
-          <a:xfrm>
-            <a:off x="3264408" y="1280160"/>
-            <a:ext cx="2697480" cy="1051560"/>
+          <p:cNvPr id="12" name="Shape 10"/>
+          <p:cNvSpPr/>
+          <p:nvPr/>
+        </p:nvSpPr>
+        <p:spPr>
+          <a:xfrm>
+            <a:off x="731520" y="3054096"/>
+            <a:ext cx="3657600" cy="237744"/>
           </a:xfrm>
           <a:prstGeom prst="roundRect">
             <a:avLst>
-              <a:gd name="adj" fmla="val 6087"/>
+              <a:gd name="adj" fmla="val 19231"/>
+            </a:avLst>
+          </a:prstGeom>
+          <a:solidFill>
+            <a:srgbClr val="EDF3F9"/>
+          </a:solidFill>
+          <a:ln/>
+        </p:spPr>
+      </p:sp>
+      <p:sp>
+        <p:nvSpPr>
+          <p:cNvPr id="13" name="Text 11"/>
+          <p:cNvSpPr/>
+          <p:nvPr/>
+        </p:nvSpPr>
+        <p:spPr>
+          <a:xfrm>
+            <a:off x="841248" y="3054096"/>
+            <a:ext cx="3474720" cy="237744"/>
+          </a:xfrm>
+          <a:prstGeom prst="rect">
+            <a:avLst/>
+          </a:prstGeom>
+          <a:noFill/>
+          <a:ln/>
+        </p:spPr>
+        <p:txBody>
+          <a:bodyPr wrap="square" lIns="0" tIns="0" rIns="0" bIns="0" rtlCol="0" anchor="ctr"/>
+          <a:lstStyle/>
+          <a:p>
+            <a:pPr indent="0" marL="0">
+              <a:buNone/>
+            </a:pPr>
+            <a:r>
+              <a:rPr lang="en-US" sz="800" b="1" dirty="0">
+                <a:solidFill>
+                  <a:srgbClr val="1F3A5F"/>
+                </a:solidFill>
+                <a:latin typeface="Arial" pitchFamily="34" charset="0"/>
+                <a:ea typeface="Arial" pitchFamily="34" charset="-122"/>
+                <a:cs typeface="Arial" pitchFamily="34" charset="-120"/>
+              </a:rPr>
+              <a:t>AC-4 DPI + per-app policy + CASB</a:t>
+            </a:r>
+            <a:endParaRPr lang="en-US" sz="800" dirty="0"/>
+          </a:p>
+        </p:txBody>
+      </p:sp>
+      <p:sp>
+        <p:nvSpPr>
+          <p:cNvPr id="14" name="Shape 12"/>
+          <p:cNvSpPr/>
+          <p:nvPr/>
+        </p:nvSpPr>
+        <p:spPr>
+          <a:xfrm>
+            <a:off x="731520" y="3337560"/>
+            <a:ext cx="3657600" cy="237744"/>
+          </a:xfrm>
+          <a:prstGeom prst="roundRect">
+            <a:avLst>
+              <a:gd name="adj" fmla="val 19231"/>
+            </a:avLst>
+          </a:prstGeom>
+          <a:solidFill>
+            <a:srgbClr val="EDF3F9"/>
+          </a:solidFill>
+          <a:ln/>
+        </p:spPr>
+      </p:sp>
+      <p:sp>
+        <p:nvSpPr>
+          <p:cNvPr id="15" name="Text 13"/>
+          <p:cNvSpPr/>
+          <p:nvPr/>
+        </p:nvSpPr>
+        <p:spPr>
+          <a:xfrm>
+            <a:off x="841248" y="3337560"/>
+            <a:ext cx="3474720" cy="237744"/>
+          </a:xfrm>
+          <a:prstGeom prst="rect">
+            <a:avLst/>
+          </a:prstGeom>
+          <a:noFill/>
+          <a:ln/>
+        </p:spPr>
+        <p:txBody>
+          <a:bodyPr wrap="square" lIns="0" tIns="0" rIns="0" bIns="0" rtlCol="0" anchor="ctr"/>
+          <a:lstStyle/>
+          <a:p>
+            <a:pPr indent="0" marL="0">
+              <a:buNone/>
+            </a:pPr>
+            <a:r>
+              <a:rPr lang="en-US" sz="800" b="1" dirty="0">
+                <a:solidFill>
+                  <a:srgbClr val="1F3A5F"/>
+                </a:solidFill>
+                <a:latin typeface="Arial" pitchFamily="34" charset="0"/>
+                <a:ea typeface="Arial" pitchFamily="34" charset="-122"/>
+                <a:cs typeface="Arial" pitchFamily="34" charset="-120"/>
+              </a:rPr>
+              <a:t>AU-2/12 full flow telemetry to SIEM</a:t>
+            </a:r>
+            <a:endParaRPr lang="en-US" sz="800" dirty="0"/>
+          </a:p>
+        </p:txBody>
+      </p:sp>
+      <p:sp>
+        <p:nvSpPr>
+          <p:cNvPr id="16" name="Shape 14"/>
+          <p:cNvSpPr/>
+          <p:nvPr/>
+        </p:nvSpPr>
+        <p:spPr>
+          <a:xfrm>
+            <a:off x="731520" y="3621024"/>
+            <a:ext cx="3657600" cy="237744"/>
+          </a:xfrm>
+          <a:prstGeom prst="roundRect">
+            <a:avLst>
+              <a:gd name="adj" fmla="val 19231"/>
+            </a:avLst>
+          </a:prstGeom>
+          <a:solidFill>
+            <a:srgbClr val="EDF3F9"/>
+          </a:solidFill>
+          <a:ln/>
+        </p:spPr>
+      </p:sp>
+      <p:sp>
+        <p:nvSpPr>
+          <p:cNvPr id="17" name="Text 15"/>
+          <p:cNvSpPr/>
+          <p:nvPr/>
+        </p:nvSpPr>
+        <p:spPr>
+          <a:xfrm>
+            <a:off x="841248" y="3621024"/>
+            <a:ext cx="3474720" cy="237744"/>
+          </a:xfrm>
+          <a:prstGeom prst="rect">
+            <a:avLst/>
+          </a:prstGeom>
+          <a:noFill/>
+          <a:ln/>
+        </p:spPr>
+        <p:txBody>
+          <a:bodyPr wrap="square" lIns="0" tIns="0" rIns="0" bIns="0" rtlCol="0" anchor="ctr"/>
+          <a:lstStyle/>
+          <a:p>
+            <a:pPr indent="0" marL="0">
+              <a:buNone/>
+            </a:pPr>
+            <a:r>
+              <a:rPr lang="en-US" sz="800" b="1" dirty="0">
+                <a:solidFill>
+                  <a:srgbClr val="1F3A5F"/>
+                </a:solidFill>
+                <a:latin typeface="Arial" pitchFamily="34" charset="0"/>
+                <a:ea typeface="Arial" pitchFamily="34" charset="-122"/>
+                <a:cs typeface="Arial" pitchFamily="34" charset="-120"/>
+              </a:rPr>
+              <a:t>CA-7 continuous path-quality export</a:t>
+            </a:r>
+            <a:endParaRPr lang="en-US" sz="800" dirty="0"/>
+          </a:p>
+        </p:txBody>
+      </p:sp>
+      <p:sp>
+        <p:nvSpPr>
+          <p:cNvPr id="18" name="Shape 16"/>
+          <p:cNvSpPr/>
+          <p:nvPr/>
+        </p:nvSpPr>
+        <p:spPr>
+          <a:xfrm>
+            <a:off x="731520" y="3904488"/>
+            <a:ext cx="3657600" cy="237744"/>
+          </a:xfrm>
+          <a:prstGeom prst="roundRect">
+            <a:avLst>
+              <a:gd name="adj" fmla="val 19231"/>
+            </a:avLst>
+          </a:prstGeom>
+          <a:solidFill>
+            <a:srgbClr val="EDF3F9"/>
+          </a:solidFill>
+          <a:ln/>
+        </p:spPr>
+      </p:sp>
+      <p:sp>
+        <p:nvSpPr>
+          <p:cNvPr id="19" name="Text 17"/>
+          <p:cNvSpPr/>
+          <p:nvPr/>
+        </p:nvSpPr>
+        <p:spPr>
+          <a:xfrm>
+            <a:off x="841248" y="3904488"/>
+            <a:ext cx="3474720" cy="237744"/>
+          </a:xfrm>
+          <a:prstGeom prst="rect">
+            <a:avLst/>
+          </a:prstGeom>
+          <a:noFill/>
+          <a:ln/>
+        </p:spPr>
+        <p:txBody>
+          <a:bodyPr wrap="square" lIns="0" tIns="0" rIns="0" bIns="0" rtlCol="0" anchor="ctr"/>
+          <a:lstStyle/>
+          <a:p>
+            <a:pPr indent="0" marL="0">
+              <a:buNone/>
+            </a:pPr>
+            <a:r>
+              <a:rPr lang="en-US" sz="800" b="1" dirty="0">
+                <a:solidFill>
+                  <a:srgbClr val="1F3A5F"/>
+                </a:solidFill>
+                <a:latin typeface="Arial" pitchFamily="34" charset="0"/>
+                <a:ea typeface="Arial" pitchFamily="34" charset="-122"/>
+                <a:cs typeface="Arial" pitchFamily="34" charset="-120"/>
+              </a:rPr>
+              <a:t>SI-4 XDR behavioral anomaly detection</a:t>
+            </a:r>
+            <a:endParaRPr lang="en-US" sz="800" dirty="0"/>
+          </a:p>
+        </p:txBody>
+      </p:sp>
+      <p:sp>
+        <p:nvSpPr>
+          <p:cNvPr id="20" name="Shape 18"/>
+          <p:cNvSpPr/>
+          <p:nvPr/>
+        </p:nvSpPr>
+        <p:spPr>
+          <a:xfrm>
+            <a:off x="731520" y="4187952"/>
+            <a:ext cx="3657600" cy="237744"/>
+          </a:xfrm>
+          <a:prstGeom prst="roundRect">
+            <a:avLst>
+              <a:gd name="adj" fmla="val 19231"/>
+            </a:avLst>
+          </a:prstGeom>
+          <a:solidFill>
+            <a:srgbClr val="EDF3F9"/>
+          </a:solidFill>
+          <a:ln/>
+        </p:spPr>
+      </p:sp>
+      <p:sp>
+        <p:nvSpPr>
+          <p:cNvPr id="21" name="Text 19"/>
+          <p:cNvSpPr/>
+          <p:nvPr/>
+        </p:nvSpPr>
+        <p:spPr>
+          <a:xfrm>
+            <a:off x="841248" y="4187952"/>
+            <a:ext cx="3474720" cy="237744"/>
+          </a:xfrm>
+          <a:prstGeom prst="rect">
+            <a:avLst/>
+          </a:prstGeom>
+          <a:noFill/>
+          <a:ln/>
+        </p:spPr>
+        <p:txBody>
+          <a:bodyPr wrap="square" lIns="0" tIns="0" rIns="0" bIns="0" rtlCol="0" anchor="ctr"/>
+          <a:lstStyle/>
+          <a:p>
+            <a:pPr indent="0" marL="0">
+              <a:buNone/>
+            </a:pPr>
+            <a:r>
+              <a:rPr lang="en-US" sz="800" b="1" dirty="0">
+                <a:solidFill>
+                  <a:srgbClr val="1F3A5F"/>
+                </a:solidFill>
+                <a:latin typeface="Arial" pitchFamily="34" charset="0"/>
+                <a:ea typeface="Arial" pitchFamily="34" charset="-122"/>
+                <a:cs typeface="Arial" pitchFamily="34" charset="-120"/>
+              </a:rPr>
+              <a:t>CM-2/CM-7 templates ARE the baseline</a:t>
+            </a:r>
+            <a:endParaRPr lang="en-US" sz="800" dirty="0"/>
+          </a:p>
+        </p:txBody>
+      </p:sp>
+      <p:sp>
+        <p:nvSpPr>
+          <p:cNvPr id="22" name="Shape 20"/>
+          <p:cNvSpPr/>
+          <p:nvPr/>
+        </p:nvSpPr>
+        <p:spPr>
+          <a:xfrm>
+            <a:off x="731520" y="4471416"/>
+            <a:ext cx="3657600" cy="237744"/>
+          </a:xfrm>
+          <a:prstGeom prst="roundRect">
+            <a:avLst>
+              <a:gd name="adj" fmla="val 19231"/>
+            </a:avLst>
+          </a:prstGeom>
+          <a:solidFill>
+            <a:srgbClr val="EDF3F9"/>
+          </a:solidFill>
+          <a:ln/>
+        </p:spPr>
+      </p:sp>
+      <p:sp>
+        <p:nvSpPr>
+          <p:cNvPr id="23" name="Text 21"/>
+          <p:cNvSpPr/>
+          <p:nvPr/>
+        </p:nvSpPr>
+        <p:spPr>
+          <a:xfrm>
+            <a:off x="841248" y="4471416"/>
+            <a:ext cx="3474720" cy="237744"/>
+          </a:xfrm>
+          <a:prstGeom prst="rect">
+            <a:avLst/>
+          </a:prstGeom>
+          <a:noFill/>
+          <a:ln/>
+        </p:spPr>
+        <p:txBody>
+          <a:bodyPr wrap="square" lIns="0" tIns="0" rIns="0" bIns="0" rtlCol="0" anchor="ctr"/>
+          <a:lstStyle/>
+          <a:p>
+            <a:pPr indent="0" marL="0">
+              <a:buNone/>
+            </a:pPr>
+            <a:r>
+              <a:rPr lang="en-US" sz="800" b="1" dirty="0">
+                <a:solidFill>
+                  <a:srgbClr val="1F3A5F"/>
+                </a:solidFill>
+                <a:latin typeface="Arial" pitchFamily="34" charset="0"/>
+                <a:ea typeface="Arial" pitchFamily="34" charset="-122"/>
+                <a:cs typeface="Arial" pitchFamily="34" charset="-120"/>
+              </a:rPr>
+              <a:t>IR-4 branch isolation in seconds</a:t>
+            </a:r>
+            <a:endParaRPr lang="en-US" sz="800" dirty="0"/>
+          </a:p>
+        </p:txBody>
+      </p:sp>
+      <p:sp>
+        <p:nvSpPr>
+          <p:cNvPr id="24" name="Shape 22"/>
+          <p:cNvSpPr/>
+          <p:nvPr/>
+        </p:nvSpPr>
+        <p:spPr>
+          <a:xfrm>
+            <a:off x="4800600" y="1234440"/>
+            <a:ext cx="3931920" cy="3520440"/>
+          </a:xfrm>
+          <a:prstGeom prst="roundRect">
+            <a:avLst>
+              <a:gd name="adj" fmla="val 1818"/>
             </a:avLst>
           </a:prstGeom>
           <a:solidFill>
@@ -26294,14 +26620,53 @@
       </p:sp>
       <p:sp>
         <p:nvSpPr>
-          <p:cNvPr id="12" name="Shape 10"/>
-          <p:cNvSpPr/>
-          <p:nvPr/>
-        </p:nvSpPr>
-        <p:spPr>
-          <a:xfrm>
-            <a:off x="3374136" y="1389888"/>
-            <a:ext cx="292608" cy="292608"/>
+          <p:cNvPr id="25" name="Text 23"/>
+          <p:cNvSpPr/>
+          <p:nvPr/>
+        </p:nvSpPr>
+        <p:spPr>
+          <a:xfrm>
+            <a:off x="5029200" y="1371600"/>
+            <a:ext cx="3566160" cy="256032"/>
+          </a:xfrm>
+          <a:prstGeom prst="rect">
+            <a:avLst/>
+          </a:prstGeom>
+          <a:noFill/>
+          <a:ln/>
+        </p:spPr>
+        <p:txBody>
+          <a:bodyPr wrap="square" lIns="0" tIns="0" rIns="0" bIns="0" rtlCol="0" anchor="ctr"/>
+          <a:lstStyle/>
+          <a:p>
+            <a:pPr indent="0" marL="0">
+              <a:buNone/>
+            </a:pPr>
+            <a:r>
+              <a:rPr lang="en-US" sz="1000" b="1" spc="120" kern="0" dirty="0">
+                <a:solidFill>
+                  <a:srgbClr val="D4860B"/>
+                </a:solidFill>
+                <a:latin typeface="Arial" pitchFamily="34" charset="0"/>
+                <a:ea typeface="Arial" pitchFamily="34" charset="-122"/>
+                <a:cs typeface="Arial" pitchFamily="34" charset="-120"/>
+              </a:rPr>
+              <a:t>FEDRAMP 20X KSI EVIDENCE CONTRACTS</a:t>
+            </a:r>
+            <a:endParaRPr lang="en-US" sz="1000" dirty="0"/>
+          </a:p>
+        </p:txBody>
+      </p:sp>
+      <p:sp>
+        <p:nvSpPr>
+          <p:cNvPr id="26" name="Shape 24"/>
+          <p:cNvSpPr/>
+          <p:nvPr/>
+        </p:nvSpPr>
+        <p:spPr>
+          <a:xfrm>
+            <a:off x="5029200" y="1810512"/>
+            <a:ext cx="118872" cy="118872"/>
           </a:xfrm>
           <a:prstGeom prst="ellipse">
             <a:avLst/>
@@ -26314,14 +26679,14 @@
       </p:sp>
       <p:sp>
         <p:nvSpPr>
-          <p:cNvPr id="13" name="Text 11"/>
-          <p:cNvSpPr/>
-          <p:nvPr/>
-        </p:nvSpPr>
-        <p:spPr>
-          <a:xfrm>
-            <a:off x="3374136" y="1376172"/>
-            <a:ext cx="292608" cy="292608"/>
+          <p:cNvPr id="27" name="Text 25"/>
+          <p:cNvSpPr/>
+          <p:nvPr/>
+        </p:nvSpPr>
+        <p:spPr>
+          <a:xfrm>
+            <a:off x="5248656" y="1755648"/>
+            <a:ext cx="3337560" cy="676656"/>
           </a:xfrm>
           <a:prstGeom prst="rect">
             <a:avLst/>
@@ -26330,662 +26695,51 @@
           <a:ln/>
         </p:spPr>
         <p:txBody>
-          <a:bodyPr wrap="square" lIns="0" tIns="0" rIns="0" bIns="0" rtlCol="0" anchor="ctr"/>
-          <a:lstStyle/>
-          <a:p>
-            <a:pPr algn="ctr" indent="0" marL="0">
-              <a:buNone/>
-            </a:pPr>
-            <a:r>
-              <a:rPr lang="en-US" sz="1300" b="1" dirty="0">
-                <a:solidFill>
-                  <a:srgbClr val="FFFFFF"/>
-                </a:solidFill>
-                <a:latin typeface="Arial" pitchFamily="34" charset="0"/>
-                <a:ea typeface="Arial" pitchFamily="34" charset="-122"/>
-                <a:cs typeface="Arial" pitchFamily="34" charset="-120"/>
-              </a:rPr>
-              <a:t>2</a:t>
-            </a:r>
-            <a:endParaRPr lang="en-US" sz="1300" dirty="0"/>
-          </a:p>
-        </p:txBody>
-      </p:sp>
-      <p:sp>
-        <p:nvSpPr>
-          <p:cNvPr id="14" name="Text 12"/>
-          <p:cNvSpPr/>
-          <p:nvPr/>
-        </p:nvSpPr>
-        <p:spPr>
-          <a:xfrm>
-            <a:off x="3739896" y="1353312"/>
-            <a:ext cx="2130552" cy="365760"/>
-          </a:xfrm>
-          <a:prstGeom prst="rect">
-            <a:avLst/>
-          </a:prstGeom>
-          <a:noFill/>
-          <a:ln/>
-        </p:spPr>
-        <p:txBody>
-          <a:bodyPr wrap="square" lIns="0" tIns="0" rIns="0" bIns="0" rtlCol="0" anchor="ctr"/>
+          <a:bodyPr wrap="square" lIns="0" tIns="0" rIns="0" bIns="0" rtlCol="0" anchor="t"/>
           <a:lstStyle/>
           <a:p>
             <a:pPr indent="0" marL="0">
               <a:buNone/>
             </a:pPr>
             <a:r>
-              <a:rPr lang="en-US" sz="1000" b="1" dirty="0">
-                <a:solidFill>
-                  <a:srgbClr val="1E293B"/>
-                </a:solidFill>
-                <a:latin typeface="Arial" pitchFamily="34" charset="0"/>
-                <a:ea typeface="Arial" pitchFamily="34" charset="-122"/>
-                <a:cs typeface="Arial" pitchFamily="34" charset="-120"/>
-              </a:rPr>
-              <a:t>Baseline templates</a:t>
-            </a:r>
-            <a:endParaRPr lang="en-US" sz="1000" dirty="0"/>
-          </a:p>
-        </p:txBody>
-      </p:sp>
-      <p:sp>
-        <p:nvSpPr>
-          <p:cNvPr id="15" name="Text 13"/>
-          <p:cNvSpPr/>
-          <p:nvPr/>
-        </p:nvSpPr>
-        <p:spPr>
-          <a:xfrm>
-            <a:off x="3374136" y="1755648"/>
-            <a:ext cx="2478024" cy="530352"/>
-          </a:xfrm>
-          <a:prstGeom prst="rect">
-            <a:avLst/>
-          </a:prstGeom>
-          <a:noFill/>
-          <a:ln/>
-        </p:spPr>
-        <p:txBody>
-          <a:bodyPr wrap="square" lIns="0" tIns="0" rIns="0" bIns="0" rtlCol="0" anchor="ctr"/>
-          <a:lstStyle/>
-          <a:p>
+              <a:rPr lang="en-US" sz="900" b="1" dirty="0">
+                <a:solidFill>
+                  <a:srgbClr val="1F3A5F"/>
+                </a:solidFill>
+                <a:latin typeface="Arial" pitchFamily="34" charset="0"/>
+                <a:ea typeface="Arial" pitchFamily="34" charset="-122"/>
+                <a:cs typeface="Arial" pitchFamily="34" charset="-120"/>
+              </a:rPr>
+              <a:t>KSI-CNA  </a:t>
+            </a:r>
             <a:pPr indent="0" marL="0">
               <a:buNone/>
             </a:pPr>
             <a:r>
-              <a:rPr lang="en-US" sz="800" dirty="0">
-                <a:solidFill>
-                  <a:srgbClr val="5B6B7C"/>
-                </a:solidFill>
-                <a:latin typeface="Arial" pitchFamily="34" charset="0"/>
-                <a:ea typeface="Arial" pitchFamily="34" charset="-122"/>
-                <a:cs typeface="Arial" pitchFamily="34" charset="-120"/>
-              </a:rPr>
-              <a:t>Per-archetype cEdge templates: FIPS mode, no local mgmt, Umbrella DNS, AES-256-GCM, agency NTP, SNMP off</a:t>
-            </a:r>
-            <a:endParaRPr lang="en-US" sz="800" dirty="0"/>
+              <a:rPr lang="en-US" sz="900" dirty="0">
+                <a:solidFill>
+                  <a:srgbClr val="1E293B"/>
+                </a:solidFill>
+                <a:latin typeface="Arial" pitchFamily="34" charset="0"/>
+                <a:ea typeface="Arial" pitchFamily="34" charset="-122"/>
+                <a:cs typeface="Arial" pitchFamily="34" charset="-120"/>
+              </a:rPr>
+              <a:t>Cloud OnRamp policy defines authorized M365 egress; deviation is a logged event</a:t>
+            </a:r>
+            <a:endParaRPr lang="en-US" sz="900" dirty="0"/>
           </a:p>
         </p:txBody>
       </p:sp>
       <p:sp>
         <p:nvSpPr>
-          <p:cNvPr id="16" name="Shape 14"/>
-          <p:cNvSpPr/>
-          <p:nvPr/>
-        </p:nvSpPr>
-        <p:spPr>
-          <a:xfrm>
-            <a:off x="6071616" y="1280160"/>
-            <a:ext cx="2697480" cy="1051560"/>
-          </a:xfrm>
-          <a:prstGeom prst="roundRect">
-            <a:avLst>
-              <a:gd name="adj" fmla="val 6087"/>
-            </a:avLst>
-          </a:prstGeom>
-          <a:solidFill>
-            <a:srgbClr val="FFFFFF"/>
-          </a:solidFill>
-          <a:ln w="9525">
-            <a:solidFill>
-              <a:srgbClr val="C9D4E0"/>
-            </a:solidFill>
-            <a:prstDash val="solid"/>
-          </a:ln>
-          <a:effectLst>
-            <a:outerShdw sx="100000" sy="100000" kx="0" ky="0" algn="bl" rotWithShape="0" blurRad="88900" dist="25400" dir="2700000">
-              <a:srgbClr val="000000">
-                <a:alpha val="14000"/>
-              </a:srgbClr>
-            </a:outerShdw>
-          </a:effectLst>
-        </p:spPr>
-      </p:sp>
-      <p:sp>
-        <p:nvSpPr>
-          <p:cNvPr id="17" name="Shape 15"/>
-          <p:cNvSpPr/>
-          <p:nvPr/>
-        </p:nvSpPr>
-        <p:spPr>
-          <a:xfrm>
-            <a:off x="6181344" y="1389888"/>
-            <a:ext cx="292608" cy="292608"/>
-          </a:xfrm>
-          <a:prstGeom prst="ellipse">
-            <a:avLst/>
-          </a:prstGeom>
-          <a:solidFill>
-            <a:srgbClr val="D4860B"/>
-          </a:solidFill>
-          <a:ln/>
-        </p:spPr>
-      </p:sp>
-      <p:sp>
-        <p:nvSpPr>
-          <p:cNvPr id="18" name="Text 16"/>
-          <p:cNvSpPr/>
-          <p:nvPr/>
-        </p:nvSpPr>
-        <p:spPr>
-          <a:xfrm>
-            <a:off x="6181344" y="1376172"/>
-            <a:ext cx="292608" cy="292608"/>
-          </a:xfrm>
-          <a:prstGeom prst="rect">
-            <a:avLst/>
-          </a:prstGeom>
-          <a:noFill/>
-          <a:ln/>
-        </p:spPr>
-        <p:txBody>
-          <a:bodyPr wrap="square" lIns="0" tIns="0" rIns="0" bIns="0" rtlCol="0" anchor="ctr"/>
-          <a:lstStyle/>
-          <a:p>
-            <a:pPr algn="ctr" indent="0" marL="0">
-              <a:buNone/>
-            </a:pPr>
-            <a:r>
-              <a:rPr lang="en-US" sz="1300" b="1" dirty="0">
-                <a:solidFill>
-                  <a:srgbClr val="FFFFFF"/>
-                </a:solidFill>
-                <a:latin typeface="Arial" pitchFamily="34" charset="0"/>
-                <a:ea typeface="Arial" pitchFamily="34" charset="-122"/>
-                <a:cs typeface="Arial" pitchFamily="34" charset="-120"/>
-              </a:rPr>
-              <a:t>3</a:t>
-            </a:r>
-            <a:endParaRPr lang="en-US" sz="1300" dirty="0"/>
-          </a:p>
-        </p:txBody>
-      </p:sp>
-      <p:sp>
-        <p:nvSpPr>
-          <p:cNvPr id="19" name="Text 17"/>
-          <p:cNvSpPr/>
-          <p:nvPr/>
-        </p:nvSpPr>
-        <p:spPr>
-          <a:xfrm>
-            <a:off x="6547104" y="1353312"/>
-            <a:ext cx="2130552" cy="365760"/>
-          </a:xfrm>
-          <a:prstGeom prst="rect">
-            <a:avLst/>
-          </a:prstGeom>
-          <a:noFill/>
-          <a:ln/>
-        </p:spPr>
-        <p:txBody>
-          <a:bodyPr wrap="square" lIns="0" tIns="0" rIns="0" bIns="0" rtlCol="0" anchor="ctr"/>
-          <a:lstStyle/>
-          <a:p>
-            <a:pPr indent="0" marL="0">
-              <a:buNone/>
-            </a:pPr>
-            <a:r>
-              <a:rPr lang="en-US" sz="1000" b="1" dirty="0">
-                <a:solidFill>
-                  <a:srgbClr val="1E293B"/>
-                </a:solidFill>
-                <a:latin typeface="Arial" pitchFamily="34" charset="0"/>
-                <a:ea typeface="Arial" pitchFamily="34" charset="-122"/>
-                <a:cs typeface="Arial" pitchFamily="34" charset="-120"/>
-              </a:rPr>
-              <a:t>Cloud OnRamp for M365</a:t>
-            </a:r>
-            <a:endParaRPr lang="en-US" sz="1000" dirty="0"/>
-          </a:p>
-        </p:txBody>
-      </p:sp>
-      <p:sp>
-        <p:nvSpPr>
-          <p:cNvPr id="20" name="Text 18"/>
-          <p:cNvSpPr/>
-          <p:nvPr/>
-        </p:nvSpPr>
-        <p:spPr>
-          <a:xfrm>
-            <a:off x="6181344" y="1755648"/>
-            <a:ext cx="2478024" cy="530352"/>
-          </a:xfrm>
-          <a:prstGeom prst="rect">
-            <a:avLst/>
-          </a:prstGeom>
-          <a:noFill/>
-          <a:ln/>
-        </p:spPr>
-        <p:txBody>
-          <a:bodyPr wrap="square" lIns="0" tIns="0" rIns="0" bIns="0" rtlCol="0" anchor="ctr"/>
-          <a:lstStyle/>
-          <a:p>
-            <a:pPr indent="0" marL="0">
-              <a:buNone/>
-            </a:pPr>
-            <a:r>
-              <a:rPr lang="en-US" sz="800" dirty="0">
-                <a:solidFill>
-                  <a:srgbClr val="5B6B7C"/>
-                </a:solidFill>
-                <a:latin typeface="Arial" pitchFamily="34" charset="0"/>
-                <a:ea typeface="Arial" pitchFamily="34" charset="-122"/>
-                <a:cs typeface="Arial" pitchFamily="34" charset="-120"/>
-              </a:rPr>
-              <a:t>Optimize/Allow endpoint lists (GCC); Teams media to best DIA/5G path, never a proxy; graceful MPLS fallback</a:t>
-            </a:r>
-            <a:endParaRPr lang="en-US" sz="800" dirty="0"/>
-          </a:p>
-        </p:txBody>
-      </p:sp>
-      <p:sp>
-        <p:nvSpPr>
-          <p:cNvPr id="21" name="Shape 19"/>
-          <p:cNvSpPr/>
-          <p:nvPr/>
-        </p:nvSpPr>
-        <p:spPr>
-          <a:xfrm>
-            <a:off x="457200" y="2459736"/>
-            <a:ext cx="2697480" cy="1051560"/>
-          </a:xfrm>
-          <a:prstGeom prst="roundRect">
-            <a:avLst>
-              <a:gd name="adj" fmla="val 6087"/>
-            </a:avLst>
-          </a:prstGeom>
-          <a:solidFill>
-            <a:srgbClr val="FFFFFF"/>
-          </a:solidFill>
-          <a:ln w="9525">
-            <a:solidFill>
-              <a:srgbClr val="C9D4E0"/>
-            </a:solidFill>
-            <a:prstDash val="solid"/>
-          </a:ln>
-          <a:effectLst>
-            <a:outerShdw sx="100000" sy="100000" kx="0" ky="0" algn="bl" rotWithShape="0" blurRad="88900" dist="25400" dir="2700000">
-              <a:srgbClr val="000000">
-                <a:alpha val="14000"/>
-              </a:srgbClr>
-            </a:outerShdw>
-          </a:effectLst>
-        </p:spPr>
-      </p:sp>
-      <p:sp>
-        <p:nvSpPr>
-          <p:cNvPr id="22" name="Shape 20"/>
-          <p:cNvSpPr/>
-          <p:nvPr/>
-        </p:nvSpPr>
-        <p:spPr>
-          <a:xfrm>
-            <a:off x="566928" y="2569464"/>
-            <a:ext cx="292608" cy="292608"/>
-          </a:xfrm>
-          <a:prstGeom prst="ellipse">
-            <a:avLst/>
-          </a:prstGeom>
-          <a:solidFill>
-            <a:srgbClr val="C0392B"/>
-          </a:solidFill>
-          <a:ln/>
-        </p:spPr>
-      </p:sp>
-      <p:sp>
-        <p:nvSpPr>
-          <p:cNvPr id="23" name="Text 21"/>
-          <p:cNvSpPr/>
-          <p:nvPr/>
-        </p:nvSpPr>
-        <p:spPr>
-          <a:xfrm>
-            <a:off x="566928" y="2555748"/>
-            <a:ext cx="292608" cy="292608"/>
-          </a:xfrm>
-          <a:prstGeom prst="rect">
-            <a:avLst/>
-          </a:prstGeom>
-          <a:noFill/>
-          <a:ln/>
-        </p:spPr>
-        <p:txBody>
-          <a:bodyPr wrap="square" lIns="0" tIns="0" rIns="0" bIns="0" rtlCol="0" anchor="ctr"/>
-          <a:lstStyle/>
-          <a:p>
-            <a:pPr algn="ctr" indent="0" marL="0">
-              <a:buNone/>
-            </a:pPr>
-            <a:r>
-              <a:rPr lang="en-US" sz="1300" b="1" dirty="0">
-                <a:solidFill>
-                  <a:srgbClr val="FFFFFF"/>
-                </a:solidFill>
-                <a:latin typeface="Arial" pitchFamily="34" charset="0"/>
-                <a:ea typeface="Arial" pitchFamily="34" charset="-122"/>
-                <a:cs typeface="Arial" pitchFamily="34" charset="-120"/>
-              </a:rPr>
-              <a:t>4</a:t>
-            </a:r>
-            <a:endParaRPr lang="en-US" sz="1300" dirty="0"/>
-          </a:p>
-        </p:txBody>
-      </p:sp>
-      <p:sp>
-        <p:nvSpPr>
-          <p:cNvPr id="24" name="Text 22"/>
-          <p:cNvSpPr/>
-          <p:nvPr/>
-        </p:nvSpPr>
-        <p:spPr>
-          <a:xfrm>
-            <a:off x="932688" y="2532888"/>
-            <a:ext cx="2130552" cy="365760"/>
-          </a:xfrm>
-          <a:prstGeom prst="rect">
-            <a:avLst/>
-          </a:prstGeom>
-          <a:noFill/>
-          <a:ln/>
-        </p:spPr>
-        <p:txBody>
-          <a:bodyPr wrap="square" lIns="0" tIns="0" rIns="0" bIns="0" rtlCol="0" anchor="ctr"/>
-          <a:lstStyle/>
-          <a:p>
-            <a:pPr indent="0" marL="0">
-              <a:buNone/>
-            </a:pPr>
-            <a:r>
-              <a:rPr lang="en-US" sz="1000" b="1" dirty="0">
-                <a:solidFill>
-                  <a:srgbClr val="1E293B"/>
-                </a:solidFill>
-                <a:latin typeface="Arial" pitchFamily="34" charset="0"/>
-                <a:ea typeface="Arial" pitchFamily="34" charset="-122"/>
-                <a:cs typeface="Arial" pitchFamily="34" charset="-120"/>
-              </a:rPr>
-              <a:t>Umbrella integration</a:t>
-            </a:r>
-            <a:endParaRPr lang="en-US" sz="1000" dirty="0"/>
-          </a:p>
-        </p:txBody>
-      </p:sp>
-      <p:sp>
-        <p:nvSpPr>
-          <p:cNvPr id="25" name="Text 23"/>
-          <p:cNvSpPr/>
-          <p:nvPr/>
-        </p:nvSpPr>
-        <p:spPr>
-          <a:xfrm>
-            <a:off x="566928" y="2935224"/>
-            <a:ext cx="2478024" cy="530352"/>
-          </a:xfrm>
-          <a:prstGeom prst="rect">
-            <a:avLst/>
-          </a:prstGeom>
-          <a:noFill/>
-          <a:ln/>
-        </p:spPr>
-        <p:txBody>
-          <a:bodyPr wrap="square" lIns="0" tIns="0" rIns="0" bIns="0" rtlCol="0" anchor="ctr"/>
-          <a:lstStyle/>
-          <a:p>
-            <a:pPr indent="0" marL="0">
-              <a:buNone/>
-            </a:pPr>
-            <a:r>
-              <a:rPr lang="en-US" sz="800" dirty="0">
-                <a:solidFill>
-                  <a:srgbClr val="5B6B7C"/>
-                </a:solidFill>
-                <a:latin typeface="Arial" pitchFamily="34" charset="0"/>
-                <a:ea typeface="Arial" pitchFamily="34" charset="-122"/>
-                <a:cs typeface="Arial" pitchFamily="34" charset="-120"/>
-              </a:rPr>
-              <a:t>All branch DNS through Umbrella — no local fallback; malicious domains blocked; M365 tenant restriction on</a:t>
-            </a:r>
-            <a:endParaRPr lang="en-US" sz="800" dirty="0"/>
-          </a:p>
-        </p:txBody>
-      </p:sp>
-      <p:sp>
-        <p:nvSpPr>
-          <p:cNvPr id="26" name="Shape 24"/>
-          <p:cNvSpPr/>
-          <p:nvPr/>
-        </p:nvSpPr>
-        <p:spPr>
-          <a:xfrm>
-            <a:off x="3264408" y="2459736"/>
-            <a:ext cx="2697480" cy="1051560"/>
-          </a:xfrm>
-          <a:prstGeom prst="roundRect">
-            <a:avLst>
-              <a:gd name="adj" fmla="val 6087"/>
-            </a:avLst>
-          </a:prstGeom>
-          <a:solidFill>
-            <a:srgbClr val="FFFFFF"/>
-          </a:solidFill>
-          <a:ln w="9525">
-            <a:solidFill>
-              <a:srgbClr val="C9D4E0"/>
-            </a:solidFill>
-            <a:prstDash val="solid"/>
-          </a:ln>
-          <a:effectLst>
-            <a:outerShdw sx="100000" sy="100000" kx="0" ky="0" algn="bl" rotWithShape="0" blurRad="88900" dist="25400" dir="2700000">
-              <a:srgbClr val="000000">
-                <a:alpha val="14000"/>
-              </a:srgbClr>
-            </a:outerShdw>
-          </a:effectLst>
-        </p:spPr>
-      </p:sp>
-      <p:sp>
-        <p:nvSpPr>
-          <p:cNvPr id="27" name="Shape 25"/>
-          <p:cNvSpPr/>
-          <p:nvPr/>
-        </p:nvSpPr>
-        <p:spPr>
-          <a:xfrm>
-            <a:off x="3374136" y="2569464"/>
-            <a:ext cx="292608" cy="292608"/>
-          </a:xfrm>
-          <a:prstGeom prst="ellipse">
-            <a:avLst/>
-          </a:prstGeom>
-          <a:solidFill>
-            <a:srgbClr val="1F3A5F"/>
-          </a:solidFill>
-          <a:ln/>
-        </p:spPr>
-      </p:sp>
-      <p:sp>
-        <p:nvSpPr>
-          <p:cNvPr id="28" name="Text 26"/>
-          <p:cNvSpPr/>
-          <p:nvPr/>
-        </p:nvSpPr>
-        <p:spPr>
-          <a:xfrm>
-            <a:off x="3374136" y="2555748"/>
-            <a:ext cx="292608" cy="292608"/>
-          </a:xfrm>
-          <a:prstGeom prst="rect">
-            <a:avLst/>
-          </a:prstGeom>
-          <a:noFill/>
-          <a:ln/>
-        </p:spPr>
-        <p:txBody>
-          <a:bodyPr wrap="square" lIns="0" tIns="0" rIns="0" bIns="0" rtlCol="0" anchor="ctr"/>
-          <a:lstStyle/>
-          <a:p>
-            <a:pPr algn="ctr" indent="0" marL="0">
-              <a:buNone/>
-            </a:pPr>
-            <a:r>
-              <a:rPr lang="en-US" sz="1300" b="1" dirty="0">
-                <a:solidFill>
-                  <a:srgbClr val="FFFFFF"/>
-                </a:solidFill>
-                <a:latin typeface="Arial" pitchFamily="34" charset="0"/>
-                <a:ea typeface="Arial" pitchFamily="34" charset="-122"/>
-                <a:cs typeface="Arial" pitchFamily="34" charset="-120"/>
-              </a:rPr>
-              <a:t>5</a:t>
-            </a:r>
-            <a:endParaRPr lang="en-US" sz="1300" dirty="0"/>
-          </a:p>
-        </p:txBody>
-      </p:sp>
-      <p:sp>
-        <p:nvSpPr>
-          <p:cNvPr id="29" name="Text 27"/>
-          <p:cNvSpPr/>
-          <p:nvPr/>
-        </p:nvSpPr>
-        <p:spPr>
-          <a:xfrm>
-            <a:off x="3739896" y="2532888"/>
-            <a:ext cx="2130552" cy="365760"/>
-          </a:xfrm>
-          <a:prstGeom prst="rect">
-            <a:avLst/>
-          </a:prstGeom>
-          <a:noFill/>
-          <a:ln/>
-        </p:spPr>
-        <p:txBody>
-          <a:bodyPr wrap="square" lIns="0" tIns="0" rIns="0" bIns="0" rtlCol="0" anchor="ctr"/>
-          <a:lstStyle/>
-          <a:p>
-            <a:pPr indent="0" marL="0">
-              <a:buNone/>
-            </a:pPr>
-            <a:r>
-              <a:rPr lang="en-US" sz="1000" b="1" dirty="0">
-                <a:solidFill>
-                  <a:srgbClr val="1E293B"/>
-                </a:solidFill>
-                <a:latin typeface="Arial" pitchFamily="34" charset="0"/>
-                <a:ea typeface="Arial" pitchFamily="34" charset="-122"/>
-                <a:cs typeface="Arial" pitchFamily="34" charset="-120"/>
-              </a:rPr>
-              <a:t>SIEM telemetry wiring</a:t>
-            </a:r>
-            <a:endParaRPr lang="en-US" sz="1000" dirty="0"/>
-          </a:p>
-        </p:txBody>
-      </p:sp>
-      <p:sp>
-        <p:nvSpPr>
-          <p:cNvPr id="30" name="Text 28"/>
-          <p:cNvSpPr/>
-          <p:nvPr/>
-        </p:nvSpPr>
-        <p:spPr>
-          <a:xfrm>
-            <a:off x="3374136" y="2935224"/>
-            <a:ext cx="2478024" cy="530352"/>
-          </a:xfrm>
-          <a:prstGeom prst="rect">
-            <a:avLst/>
-          </a:prstGeom>
-          <a:noFill/>
-          <a:ln/>
-        </p:spPr>
-        <p:txBody>
-          <a:bodyPr wrap="square" lIns="0" tIns="0" rIns="0" bIns="0" rtlCol="0" anchor="ctr"/>
-          <a:lstStyle/>
-          <a:p>
-            <a:pPr indent="0" marL="0">
-              <a:buNone/>
-            </a:pPr>
-            <a:r>
-              <a:rPr lang="en-US" sz="800" dirty="0">
-                <a:solidFill>
-                  <a:srgbClr val="5B6B7C"/>
-                </a:solidFill>
-                <a:latin typeface="Arial" pitchFamily="34" charset="0"/>
-                <a:ea typeface="Arial" pitchFamily="34" charset="-122"/>
-                <a:cs typeface="Arial" pitchFamily="34" charset="-120"/>
-              </a:rPr>
-              <a:t>Streaming telemetry to Sentinel: flow events, change audit, path quality, device compliance — AU-12 per flow</a:t>
-            </a:r>
-            <a:endParaRPr lang="en-US" sz="800" dirty="0"/>
-          </a:p>
-        </p:txBody>
-      </p:sp>
-      <p:sp>
-        <p:nvSpPr>
-          <p:cNvPr id="31" name="Shape 29"/>
-          <p:cNvSpPr/>
-          <p:nvPr/>
-        </p:nvSpPr>
-        <p:spPr>
-          <a:xfrm>
-            <a:off x="6071616" y="2459736"/>
-            <a:ext cx="2697480" cy="1051560"/>
-          </a:xfrm>
-          <a:prstGeom prst="roundRect">
-            <a:avLst>
-              <a:gd name="adj" fmla="val 6087"/>
-            </a:avLst>
-          </a:prstGeom>
-          <a:solidFill>
-            <a:srgbClr val="FFFFFF"/>
-          </a:solidFill>
-          <a:ln w="9525">
-            <a:solidFill>
-              <a:srgbClr val="C9D4E0"/>
-            </a:solidFill>
-            <a:prstDash val="solid"/>
-          </a:ln>
-          <a:effectLst>
-            <a:outerShdw sx="100000" sy="100000" kx="0" ky="0" algn="bl" rotWithShape="0" blurRad="88900" dist="25400" dir="2700000">
-              <a:srgbClr val="000000">
-                <a:alpha val="14000"/>
-              </a:srgbClr>
-            </a:outerShdw>
-          </a:effectLst>
-        </p:spPr>
-      </p:sp>
-      <p:sp>
-        <p:nvSpPr>
-          <p:cNvPr id="32" name="Shape 30"/>
-          <p:cNvSpPr/>
-          <p:nvPr/>
-        </p:nvSpPr>
-        <p:spPr>
-          <a:xfrm>
-            <a:off x="6181344" y="2569464"/>
-            <a:ext cx="292608" cy="292608"/>
+          <p:cNvPr id="28" name="Shape 26"/>
+          <p:cNvSpPr/>
+          <p:nvPr/>
+        </p:nvSpPr>
+        <p:spPr>
+          <a:xfrm>
+            <a:off x="5029200" y="2523744"/>
+            <a:ext cx="118872" cy="118872"/>
           </a:xfrm>
           <a:prstGeom prst="ellipse">
             <a:avLst/>
@@ -26998,14 +26752,213 @@
       </p:sp>
       <p:sp>
         <p:nvSpPr>
+          <p:cNvPr id="29" name="Text 27"/>
+          <p:cNvSpPr/>
+          <p:nvPr/>
+        </p:nvSpPr>
+        <p:spPr>
+          <a:xfrm>
+            <a:off x="5248656" y="2468880"/>
+            <a:ext cx="3337560" cy="676656"/>
+          </a:xfrm>
+          <a:prstGeom prst="rect">
+            <a:avLst/>
+          </a:prstGeom>
+          <a:noFill/>
+          <a:ln/>
+        </p:spPr>
+        <p:txBody>
+          <a:bodyPr wrap="square" lIns="0" tIns="0" rIns="0" bIns="0" rtlCol="0" anchor="t"/>
+          <a:lstStyle/>
+          <a:p>
+            <a:pPr indent="0" marL="0">
+              <a:buNone/>
+            </a:pPr>
+            <a:r>
+              <a:rPr lang="en-US" sz="900" b="1" dirty="0">
+                <a:solidFill>
+                  <a:srgbClr val="1F3A5F"/>
+                </a:solidFill>
+                <a:latin typeface="Arial" pitchFamily="34" charset="0"/>
+                <a:ea typeface="Arial" pitchFamily="34" charset="-122"/>
+                <a:cs typeface="Arial" pitchFamily="34" charset="-120"/>
+              </a:rPr>
+              <a:t>KSI-MLA  </a:t>
+            </a:r>
+            <a:pPr indent="0" marL="0">
+              <a:buNone/>
+            </a:pPr>
+            <a:r>
+              <a:rPr lang="en-US" sz="900" dirty="0">
+                <a:solidFill>
+                  <a:srgbClr val="1E293B"/>
+                </a:solidFill>
+                <a:latin typeface="Arial" pitchFamily="34" charset="0"/>
+                <a:ea typeface="Arial" pitchFamily="34" charset="-122"/>
+                <a:cs typeface="Arial" pitchFamily="34" charset="-120"/>
+              </a:rPr>
+              <a:t>Per-flow telemetry — app ID, path, policy, timestamp — streamed to SIEM as JSON</a:t>
+            </a:r>
+            <a:endParaRPr lang="en-US" sz="900" dirty="0"/>
+          </a:p>
+        </p:txBody>
+      </p:sp>
+      <p:sp>
+        <p:nvSpPr>
+          <p:cNvPr id="30" name="Shape 28"/>
+          <p:cNvSpPr/>
+          <p:nvPr/>
+        </p:nvSpPr>
+        <p:spPr>
+          <a:xfrm>
+            <a:off x="5029200" y="3236976"/>
+            <a:ext cx="118872" cy="118872"/>
+          </a:xfrm>
+          <a:prstGeom prst="ellipse">
+            <a:avLst/>
+          </a:prstGeom>
+          <a:solidFill>
+            <a:srgbClr val="1A9E8F"/>
+          </a:solidFill>
+          <a:ln/>
+        </p:spPr>
+      </p:sp>
+      <p:sp>
+        <p:nvSpPr>
+          <p:cNvPr id="31" name="Text 29"/>
+          <p:cNvSpPr/>
+          <p:nvPr/>
+        </p:nvSpPr>
+        <p:spPr>
+          <a:xfrm>
+            <a:off x="5248656" y="3182112"/>
+            <a:ext cx="3337560" cy="676656"/>
+          </a:xfrm>
+          <a:prstGeom prst="rect">
+            <a:avLst/>
+          </a:prstGeom>
+          <a:noFill/>
+          <a:ln/>
+        </p:spPr>
+        <p:txBody>
+          <a:bodyPr wrap="square" lIns="0" tIns="0" rIns="0" bIns="0" rtlCol="0" anchor="t"/>
+          <a:lstStyle/>
+          <a:p>
+            <a:pPr indent="0" marL="0">
+              <a:buNone/>
+            </a:pPr>
+            <a:r>
+              <a:rPr lang="en-US" sz="900" b="1" dirty="0">
+                <a:solidFill>
+                  <a:srgbClr val="1F3A5F"/>
+                </a:solidFill>
+                <a:latin typeface="Arial" pitchFamily="34" charset="0"/>
+                <a:ea typeface="Arial" pitchFamily="34" charset="-122"/>
+                <a:cs typeface="Arial" pitchFamily="34" charset="-120"/>
+              </a:rPr>
+              <a:t>KSI-SVC  </a:t>
+            </a:r>
+            <a:pPr indent="0" marL="0">
+              <a:buNone/>
+            </a:pPr>
+            <a:r>
+              <a:rPr lang="en-US" sz="900" dirty="0">
+                <a:solidFill>
+                  <a:srgbClr val="1E293B"/>
+                </a:solidFill>
+                <a:latin typeface="Arial" pitchFamily="34" charset="0"/>
+                <a:ea typeface="Arial" pitchFamily="34" charset="-122"/>
+                <a:cs typeface="Arial" pitchFamily="34" charset="-120"/>
+              </a:rPr>
+              <a:t>cEdge config must match the Manager template; drift detected and logged</a:t>
+            </a:r>
+            <a:endParaRPr lang="en-US" sz="900" dirty="0"/>
+          </a:p>
+        </p:txBody>
+      </p:sp>
+      <p:sp>
+        <p:nvSpPr>
+          <p:cNvPr id="32" name="Shape 30"/>
+          <p:cNvSpPr/>
+          <p:nvPr/>
+        </p:nvSpPr>
+        <p:spPr>
+          <a:xfrm>
+            <a:off x="5029200" y="3950208"/>
+            <a:ext cx="118872" cy="118872"/>
+          </a:xfrm>
+          <a:prstGeom prst="ellipse">
+            <a:avLst/>
+          </a:prstGeom>
+          <a:solidFill>
+            <a:srgbClr val="1A9E8F"/>
+          </a:solidFill>
+          <a:ln/>
+        </p:spPr>
+      </p:sp>
+      <p:sp>
+        <p:nvSpPr>
           <p:cNvPr id="33" name="Text 31"/>
           <p:cNvSpPr/>
           <p:nvPr/>
         </p:nvSpPr>
         <p:spPr>
           <a:xfrm>
-            <a:off x="6181344" y="2555748"/>
-            <a:ext cx="292608" cy="292608"/>
+            <a:off x="5248656" y="3895344"/>
+            <a:ext cx="3337560" cy="676656"/>
+          </a:xfrm>
+          <a:prstGeom prst="rect">
+            <a:avLst/>
+          </a:prstGeom>
+          <a:noFill/>
+          <a:ln/>
+        </p:spPr>
+        <p:txBody>
+          <a:bodyPr wrap="square" lIns="0" tIns="0" rIns="0" bIns="0" rtlCol="0" anchor="t"/>
+          <a:lstStyle/>
+          <a:p>
+            <a:pPr indent="0" marL="0">
+              <a:buNone/>
+            </a:pPr>
+            <a:r>
+              <a:rPr lang="en-US" sz="900" b="1" dirty="0">
+                <a:solidFill>
+                  <a:srgbClr val="1F3A5F"/>
+                </a:solidFill>
+                <a:latin typeface="Arial" pitchFamily="34" charset="0"/>
+                <a:ea typeface="Arial" pitchFamily="34" charset="-122"/>
+                <a:cs typeface="Arial" pitchFamily="34" charset="-120"/>
+              </a:rPr>
+              <a:t>KSI-CMT  </a:t>
+            </a:r>
+            <a:pPr indent="0" marL="0">
+              <a:buNone/>
+            </a:pPr>
+            <a:r>
+              <a:rPr lang="en-US" sz="900" dirty="0">
+                <a:solidFill>
+                  <a:srgbClr val="1E293B"/>
+                </a:solidFill>
+                <a:latin typeface="Arial" pitchFamily="34" charset="0"/>
+                <a:ea typeface="Arial" pitchFamily="34" charset="-122"/>
+                <a:cs typeface="Arial" pitchFamily="34" charset="-120"/>
+              </a:rPr>
+              <a:t>Every policy change is a timestamped audit entry; templates dry-run + Git version-controlled</a:t>
+            </a:r>
+            <a:endParaRPr lang="en-US" sz="900" dirty="0"/>
+          </a:p>
+        </p:txBody>
+      </p:sp>
+      <p:sp>
+        <p:nvSpPr>
+          <p:cNvPr id="34" name="Text 32"/>
+          <p:cNvSpPr/>
+          <p:nvPr/>
+        </p:nvSpPr>
+        <p:spPr>
+          <a:xfrm>
+            <a:off x="5029200" y="4434840"/>
+            <a:ext cx="3520440" cy="274320"/>
           </a:xfrm>
           <a:prstGeom prst="rect">
             <a:avLst/>
@@ -27017,89 +26970,11 @@
           <a:bodyPr wrap="square" lIns="0" tIns="0" rIns="0" bIns="0" rtlCol="0" anchor="ctr"/>
           <a:lstStyle/>
           <a:p>
-            <a:pPr algn="ctr" indent="0" marL="0">
-              <a:buNone/>
-            </a:pPr>
-            <a:r>
-              <a:rPr lang="en-US" sz="1300" b="1" dirty="0">
-                <a:solidFill>
-                  <a:srgbClr val="FFFFFF"/>
-                </a:solidFill>
-                <a:latin typeface="Arial" pitchFamily="34" charset="0"/>
-                <a:ea typeface="Arial" pitchFamily="34" charset="-122"/>
-                <a:cs typeface="Arial" pitchFamily="34" charset="-120"/>
-              </a:rPr>
-              <a:t>6</a:t>
-            </a:r>
-            <a:endParaRPr lang="en-US" sz="1300" dirty="0"/>
-          </a:p>
-        </p:txBody>
-      </p:sp>
-      <p:sp>
-        <p:nvSpPr>
-          <p:cNvPr id="34" name="Text 32"/>
-          <p:cNvSpPr/>
-          <p:nvPr/>
-        </p:nvSpPr>
-        <p:spPr>
-          <a:xfrm>
-            <a:off x="6547104" y="2532888"/>
-            <a:ext cx="2130552" cy="365760"/>
-          </a:xfrm>
-          <a:prstGeom prst="rect">
-            <a:avLst/>
-          </a:prstGeom>
-          <a:noFill/>
-          <a:ln/>
-        </p:spPr>
-        <p:txBody>
-          <a:bodyPr wrap="square" lIns="0" tIns="0" rIns="0" bIns="0" rtlCol="0" anchor="ctr"/>
-          <a:lstStyle/>
-          <a:p>
             <a:pPr indent="0" marL="0">
               <a:buNone/>
             </a:pPr>
             <a:r>
-              <a:rPr lang="en-US" sz="1000" b="1" dirty="0">
-                <a:solidFill>
-                  <a:srgbClr val="1E293B"/>
-                </a:solidFill>
-                <a:latin typeface="Arial" pitchFamily="34" charset="0"/>
-                <a:ea typeface="Arial" pitchFamily="34" charset="-122"/>
-                <a:cs typeface="Arial" pitchFamily="34" charset="-120"/>
-              </a:rPr>
-              <a:t>20x KSI validation</a:t>
-            </a:r>
-            <a:endParaRPr lang="en-US" sz="1000" dirty="0"/>
-          </a:p>
-        </p:txBody>
-      </p:sp>
-      <p:sp>
-        <p:nvSpPr>
-          <p:cNvPr id="35" name="Text 33"/>
-          <p:cNvSpPr/>
-          <p:nvPr/>
-        </p:nvSpPr>
-        <p:spPr>
-          <a:xfrm>
-            <a:off x="6181344" y="2935224"/>
-            <a:ext cx="2478024" cy="530352"/>
-          </a:xfrm>
-          <a:prstGeom prst="rect">
-            <a:avLst/>
-          </a:prstGeom>
-          <a:noFill/>
-          <a:ln/>
-        </p:spPr>
-        <p:txBody>
-          <a:bodyPr wrap="square" lIns="0" tIns="0" rIns="0" bIns="0" rtlCol="0" anchor="ctr"/>
-          <a:lstStyle/>
-          <a:p>
-            <a:pPr indent="0" marL="0">
-              <a:buNone/>
-            </a:pPr>
-            <a:r>
-              <a:rPr lang="en-US" sz="800" dirty="0">
+              <a:rPr lang="en-US" sz="850" i="1" dirty="0">
                 <a:solidFill>
                   <a:srgbClr val="5B6B7C"/>
                 </a:solidFill>
@@ -27107,89 +26982,9 @@
                 <a:ea typeface="Arial" pitchFamily="34" charset="-122"/>
                 <a:cs typeface="Arial" pitchFamily="34" charset="-120"/>
               </a:rPr>
-              <a:t>Verify SIEM receives every required structured event; confirm format passes the OSCAL bundle generator</a:t>
-            </a:r>
-            <a:endParaRPr lang="en-US" sz="800" dirty="0"/>
-          </a:p>
-        </p:txBody>
-      </p:sp>
-      <p:sp>
-        <p:nvSpPr>
-          <p:cNvPr id="36" name="Shape 34"/>
-          <p:cNvSpPr/>
-          <p:nvPr/>
-        </p:nvSpPr>
-        <p:spPr>
-          <a:xfrm>
-            <a:off x="457200" y="3703320"/>
-            <a:ext cx="8275320" cy="1097280"/>
-          </a:xfrm>
-          <a:prstGeom prst="roundRect">
-            <a:avLst>
-              <a:gd name="adj" fmla="val 5833"/>
-            </a:avLst>
-          </a:prstGeom>
-          <a:solidFill>
-            <a:srgbClr val="EDF3F9"/>
-          </a:solidFill>
-          <a:ln w="9525">
-            <a:solidFill>
-              <a:srgbClr val="C9D4E0"/>
-            </a:solidFill>
-            <a:prstDash val="solid"/>
-          </a:ln>
-        </p:spPr>
-      </p:sp>
-      <p:sp>
-        <p:nvSpPr>
-          <p:cNvPr id="37" name="Text 35"/>
-          <p:cNvSpPr/>
-          <p:nvPr/>
-        </p:nvSpPr>
-        <p:spPr>
-          <a:xfrm>
-            <a:off x="685800" y="3703320"/>
-            <a:ext cx="7818120" cy="1097280"/>
-          </a:xfrm>
-          <a:prstGeom prst="rect">
-            <a:avLst/>
-          </a:prstGeom>
-          <a:noFill/>
-          <a:ln/>
-        </p:spPr>
-        <p:txBody>
-          <a:bodyPr wrap="square" lIns="0" tIns="0" rIns="0" bIns="0" rtlCol="0" anchor="ctr"/>
-          <a:lstStyle/>
-          <a:p>
-            <a:pPr indent="0" marL="0">
-              <a:buNone/>
-            </a:pPr>
-            <a:r>
-              <a:rPr lang="en-US" sz="1050" b="1" dirty="0">
-                <a:solidFill>
-                  <a:srgbClr val="1F3A5F"/>
-                </a:solidFill>
-                <a:latin typeface="Arial" pitchFamily="34" charset="0"/>
-                <a:ea typeface="Arial" pitchFamily="34" charset="-122"/>
-                <a:cs typeface="Arial" pitchFamily="34" charset="-120"/>
-              </a:rPr>
-              <a:t>Scope honesty, stated in the book itself: </a:t>
-            </a:r>
-            <a:pPr indent="0" marL="0">
-              <a:buNone/>
-            </a:pPr>
-            <a:r>
-              <a:rPr lang="en-US" sz="1050" dirty="0">
-                <a:solidFill>
-                  <a:srgbClr val="1E293B"/>
-                </a:solidFill>
-                <a:latin typeface="Arial" pitchFamily="34" charset="0"/>
-                <a:ea typeface="Arial" pitchFamily="34" charset="-122"/>
-                <a:cs typeface="Arial" pitchFamily="34" charset="-120"/>
-              </a:rPr>
-              <a:t>this sequence is decision-maker orientation, not an engineering runbook. Every deployment needs site surveys, carrier qualification (MAPS enrollment), and template development by certified Catalyst SD-WAN engineers. What the appendix provides is the compliance framing and boundary structure that should govern that engagement from the start.</a:t>
-            </a:r>
-            <a:endParaRPr lang="en-US" sz="1050" dirty="0"/>
+              <a:t>Evidence binds to AAN slot 03 (network control plane) — no additional slot required.</a:t>
+            </a:r>
+            <a:endParaRPr lang="en-US" sz="850" dirty="0"/>
           </a:p>
         </p:txBody>
       </p:sp>
@@ -27258,7 +27053,7 @@
                 <a:ea typeface="Arial" pitchFamily="34" charset="-122"/>
                 <a:cs typeface="Arial" pitchFamily="34" charset="-120"/>
               </a:rPr>
-              <a:t>WHERE THIS LEAVES US</a:t>
+              <a:t>APPENDIX — FROM AUTHORIZATION TO PRODUCTION</a:t>
             </a:r>
             <a:endParaRPr lang="en-US" sz="1100" dirty="0"/>
           </a:p>
@@ -27289,7 +27084,7 @@
               <a:buNone/>
             </a:pPr>
             <a:r>
-              <a:rPr lang="en-US" sz="2600" b="1" dirty="0">
+              <a:rPr lang="en-US" sz="2300" b="1" dirty="0">
                 <a:solidFill>
                   <a:srgbClr val="1F3A5F"/>
                 </a:solidFill>
@@ -27297,9 +27092,9 @@
                 <a:ea typeface="Arial" pitchFamily="34" charset="-122"/>
                 <a:cs typeface="Arial" pitchFamily="34" charset="-120"/>
               </a:rPr>
-              <a:t>The story in one slide — and what leadership must decide</a:t>
-            </a:r>
-            <a:endParaRPr lang="en-US" sz="2600" dirty="0"/>
+              <a:t>The greenfield sequence: boundary first, evidence last</a:t>
+            </a:r>
+            <a:endParaRPr lang="en-US" sz="2300" dirty="0"/>
           </a:p>
         </p:txBody>
       </p:sp>
@@ -27336,7 +27131,7 @@
                 <a:ea typeface="Arial" pitchFamily="34" charset="-122"/>
                 <a:cs typeface="Arial" pitchFamily="34" charset="-120"/>
               </a:rPr>
-              <a:t>Federal AAN — Book 05 Network Modernization · CSI Team Draft — Internal · FedRAMP Moderate · Date Code 2026-07-07 11:36 ET</a:t>
+              <a:t>Federal AAN — Book 05 Network Modernization · CSI Team Draft — Internal · FedRAMP Moderate · Date Code 2026-07-07 11:57 ET</a:t>
             </a:r>
             <a:endParaRPr lang="en-US" sz="800" dirty="0"/>
           </a:p>
@@ -27376,6 +27171,1300 @@
                 <a:cs typeface="Arial" pitchFamily="34" charset="-120"/>
               </a:rPr>
               <a:t>27</a:t>
+            </a:r>
+            <a:endParaRPr lang="en-US" sz="800" dirty="0"/>
+          </a:p>
+        </p:txBody>
+      </p:sp>
+      <p:sp>
+        <p:nvSpPr>
+          <p:cNvPr id="6" name="Shape 4"/>
+          <p:cNvSpPr/>
+          <p:nvPr/>
+        </p:nvSpPr>
+        <p:spPr>
+          <a:xfrm>
+            <a:off x="457200" y="1280160"/>
+            <a:ext cx="2697480" cy="1051560"/>
+          </a:xfrm>
+          <a:prstGeom prst="roundRect">
+            <a:avLst>
+              <a:gd name="adj" fmla="val 6087"/>
+            </a:avLst>
+          </a:prstGeom>
+          <a:solidFill>
+            <a:srgbClr val="FFFFFF"/>
+          </a:solidFill>
+          <a:ln w="9525">
+            <a:solidFill>
+              <a:srgbClr val="C9D4E0"/>
+            </a:solidFill>
+            <a:prstDash val="solid"/>
+          </a:ln>
+          <a:effectLst>
+            <a:outerShdw sx="100000" sy="100000" kx="0" ky="0" algn="bl" rotWithShape="0" blurRad="88900" dist="25400" dir="2700000">
+              <a:srgbClr val="000000">
+                <a:alpha val="14000"/>
+              </a:srgbClr>
+            </a:outerShdw>
+          </a:effectLst>
+        </p:spPr>
+      </p:sp>
+      <p:sp>
+        <p:nvSpPr>
+          <p:cNvPr id="7" name="Shape 5"/>
+          <p:cNvSpPr/>
+          <p:nvPr/>
+        </p:nvSpPr>
+        <p:spPr>
+          <a:xfrm>
+            <a:off x="566928" y="1389888"/>
+            <a:ext cx="292608" cy="292608"/>
+          </a:xfrm>
+          <a:prstGeom prst="ellipse">
+            <a:avLst/>
+          </a:prstGeom>
+          <a:solidFill>
+            <a:srgbClr val="1F3A5F"/>
+          </a:solidFill>
+          <a:ln/>
+        </p:spPr>
+      </p:sp>
+      <p:sp>
+        <p:nvSpPr>
+          <p:cNvPr id="8" name="Text 6"/>
+          <p:cNvSpPr/>
+          <p:nvPr/>
+        </p:nvSpPr>
+        <p:spPr>
+          <a:xfrm>
+            <a:off x="566928" y="1376172"/>
+            <a:ext cx="292608" cy="292608"/>
+          </a:xfrm>
+          <a:prstGeom prst="rect">
+            <a:avLst/>
+          </a:prstGeom>
+          <a:noFill/>
+          <a:ln/>
+        </p:spPr>
+        <p:txBody>
+          <a:bodyPr wrap="square" lIns="0" tIns="0" rIns="0" bIns="0" rtlCol="0" anchor="ctr"/>
+          <a:lstStyle/>
+          <a:p>
+            <a:pPr algn="ctr" indent="0" marL="0">
+              <a:buNone/>
+            </a:pPr>
+            <a:r>
+              <a:rPr lang="en-US" sz="1300" b="1" dirty="0">
+                <a:solidFill>
+                  <a:srgbClr val="FFFFFF"/>
+                </a:solidFill>
+                <a:latin typeface="Arial" pitchFamily="34" charset="0"/>
+                <a:ea typeface="Arial" pitchFamily="34" charset="-122"/>
+                <a:cs typeface="Arial" pitchFamily="34" charset="-120"/>
+              </a:rPr>
+              <a:t>1</a:t>
+            </a:r>
+            <a:endParaRPr lang="en-US" sz="1300" dirty="0"/>
+          </a:p>
+        </p:txBody>
+      </p:sp>
+      <p:sp>
+        <p:nvSpPr>
+          <p:cNvPr id="9" name="Text 7"/>
+          <p:cNvSpPr/>
+          <p:nvPr/>
+        </p:nvSpPr>
+        <p:spPr>
+          <a:xfrm>
+            <a:off x="932688" y="1353312"/>
+            <a:ext cx="2130552" cy="365760"/>
+          </a:xfrm>
+          <a:prstGeom prst="rect">
+            <a:avLst/>
+          </a:prstGeom>
+          <a:noFill/>
+          <a:ln/>
+        </p:spPr>
+        <p:txBody>
+          <a:bodyPr wrap="square" lIns="0" tIns="0" rIns="0" bIns="0" rtlCol="0" anchor="ctr"/>
+          <a:lstStyle/>
+          <a:p>
+            <a:pPr indent="0" marL="0">
+              <a:buNone/>
+            </a:pPr>
+            <a:r>
+              <a:rPr lang="en-US" sz="1000" b="1" dirty="0">
+                <a:solidFill>
+                  <a:srgbClr val="1E293B"/>
+                </a:solidFill>
+                <a:latin typeface="Arial" pitchFamily="34" charset="0"/>
+                <a:ea typeface="Arial" pitchFamily="34" charset="-122"/>
+                <a:cs typeface="Arial" pitchFamily="34" charset="-120"/>
+              </a:rPr>
+              <a:t>Boundary documentation</a:t>
+            </a:r>
+            <a:endParaRPr lang="en-US" sz="1000" dirty="0"/>
+          </a:p>
+        </p:txBody>
+      </p:sp>
+      <p:sp>
+        <p:nvSpPr>
+          <p:cNvPr id="10" name="Text 8"/>
+          <p:cNvSpPr/>
+          <p:nvPr/>
+        </p:nvSpPr>
+        <p:spPr>
+          <a:xfrm>
+            <a:off x="566928" y="1755648"/>
+            <a:ext cx="2478024" cy="530352"/>
+          </a:xfrm>
+          <a:prstGeom prst="rect">
+            <a:avLst/>
+          </a:prstGeom>
+          <a:noFill/>
+          <a:ln/>
+        </p:spPr>
+        <p:txBody>
+          <a:bodyPr wrap="square" lIns="0" tIns="0" rIns="0" bIns="0" rtlCol="0" anchor="ctr"/>
+          <a:lstStyle/>
+          <a:p>
+            <a:pPr indent="0" marL="0">
+              <a:buNone/>
+            </a:pPr>
+            <a:r>
+              <a:rPr lang="en-US" sz="800" dirty="0">
+                <a:solidFill>
+                  <a:srgbClr val="5B6B7C"/>
+                </a:solidFill>
+                <a:latin typeface="Arial" pitchFamily="34" charset="0"/>
+                <a:ea typeface="Arial" pitchFamily="34" charset="-122"/>
+                <a:cs typeface="Arial" pitchFamily="34" charset="-120"/>
+              </a:rPr>
+              <a:t>Classify every component; verify Cisco SaaS FedRAMP status; draft ISAs for M365 GCC + Azure VWan</a:t>
+            </a:r>
+            <a:endParaRPr lang="en-US" sz="800" dirty="0"/>
+          </a:p>
+        </p:txBody>
+      </p:sp>
+      <p:sp>
+        <p:nvSpPr>
+          <p:cNvPr id="11" name="Shape 9"/>
+          <p:cNvSpPr/>
+          <p:nvPr/>
+        </p:nvSpPr>
+        <p:spPr>
+          <a:xfrm>
+            <a:off x="3264408" y="1280160"/>
+            <a:ext cx="2697480" cy="1051560"/>
+          </a:xfrm>
+          <a:prstGeom prst="roundRect">
+            <a:avLst>
+              <a:gd name="adj" fmla="val 6087"/>
+            </a:avLst>
+          </a:prstGeom>
+          <a:solidFill>
+            <a:srgbClr val="FFFFFF"/>
+          </a:solidFill>
+          <a:ln w="9525">
+            <a:solidFill>
+              <a:srgbClr val="C9D4E0"/>
+            </a:solidFill>
+            <a:prstDash val="solid"/>
+          </a:ln>
+          <a:effectLst>
+            <a:outerShdw sx="100000" sy="100000" kx="0" ky="0" algn="bl" rotWithShape="0" blurRad="88900" dist="25400" dir="2700000">
+              <a:srgbClr val="000000">
+                <a:alpha val="14000"/>
+              </a:srgbClr>
+            </a:outerShdw>
+          </a:effectLst>
+        </p:spPr>
+      </p:sp>
+      <p:sp>
+        <p:nvSpPr>
+          <p:cNvPr id="12" name="Shape 10"/>
+          <p:cNvSpPr/>
+          <p:nvPr/>
+        </p:nvSpPr>
+        <p:spPr>
+          <a:xfrm>
+            <a:off x="3374136" y="1389888"/>
+            <a:ext cx="292608" cy="292608"/>
+          </a:xfrm>
+          <a:prstGeom prst="ellipse">
+            <a:avLst/>
+          </a:prstGeom>
+          <a:solidFill>
+            <a:srgbClr val="1A9E8F"/>
+          </a:solidFill>
+          <a:ln/>
+        </p:spPr>
+      </p:sp>
+      <p:sp>
+        <p:nvSpPr>
+          <p:cNvPr id="13" name="Text 11"/>
+          <p:cNvSpPr/>
+          <p:nvPr/>
+        </p:nvSpPr>
+        <p:spPr>
+          <a:xfrm>
+            <a:off x="3374136" y="1376172"/>
+            <a:ext cx="292608" cy="292608"/>
+          </a:xfrm>
+          <a:prstGeom prst="rect">
+            <a:avLst/>
+          </a:prstGeom>
+          <a:noFill/>
+          <a:ln/>
+        </p:spPr>
+        <p:txBody>
+          <a:bodyPr wrap="square" lIns="0" tIns="0" rIns="0" bIns="0" rtlCol="0" anchor="ctr"/>
+          <a:lstStyle/>
+          <a:p>
+            <a:pPr algn="ctr" indent="0" marL="0">
+              <a:buNone/>
+            </a:pPr>
+            <a:r>
+              <a:rPr lang="en-US" sz="1300" b="1" dirty="0">
+                <a:solidFill>
+                  <a:srgbClr val="FFFFFF"/>
+                </a:solidFill>
+                <a:latin typeface="Arial" pitchFamily="34" charset="0"/>
+                <a:ea typeface="Arial" pitchFamily="34" charset="-122"/>
+                <a:cs typeface="Arial" pitchFamily="34" charset="-120"/>
+              </a:rPr>
+              <a:t>2</a:t>
+            </a:r>
+            <a:endParaRPr lang="en-US" sz="1300" dirty="0"/>
+          </a:p>
+        </p:txBody>
+      </p:sp>
+      <p:sp>
+        <p:nvSpPr>
+          <p:cNvPr id="14" name="Text 12"/>
+          <p:cNvSpPr/>
+          <p:nvPr/>
+        </p:nvSpPr>
+        <p:spPr>
+          <a:xfrm>
+            <a:off x="3739896" y="1353312"/>
+            <a:ext cx="2130552" cy="365760"/>
+          </a:xfrm>
+          <a:prstGeom prst="rect">
+            <a:avLst/>
+          </a:prstGeom>
+          <a:noFill/>
+          <a:ln/>
+        </p:spPr>
+        <p:txBody>
+          <a:bodyPr wrap="square" lIns="0" tIns="0" rIns="0" bIns="0" rtlCol="0" anchor="ctr"/>
+          <a:lstStyle/>
+          <a:p>
+            <a:pPr indent="0" marL="0">
+              <a:buNone/>
+            </a:pPr>
+            <a:r>
+              <a:rPr lang="en-US" sz="1000" b="1" dirty="0">
+                <a:solidFill>
+                  <a:srgbClr val="1E293B"/>
+                </a:solidFill>
+                <a:latin typeface="Arial" pitchFamily="34" charset="0"/>
+                <a:ea typeface="Arial" pitchFamily="34" charset="-122"/>
+                <a:cs typeface="Arial" pitchFamily="34" charset="-120"/>
+              </a:rPr>
+              <a:t>Baseline templates</a:t>
+            </a:r>
+            <a:endParaRPr lang="en-US" sz="1000" dirty="0"/>
+          </a:p>
+        </p:txBody>
+      </p:sp>
+      <p:sp>
+        <p:nvSpPr>
+          <p:cNvPr id="15" name="Text 13"/>
+          <p:cNvSpPr/>
+          <p:nvPr/>
+        </p:nvSpPr>
+        <p:spPr>
+          <a:xfrm>
+            <a:off x="3374136" y="1755648"/>
+            <a:ext cx="2478024" cy="530352"/>
+          </a:xfrm>
+          <a:prstGeom prst="rect">
+            <a:avLst/>
+          </a:prstGeom>
+          <a:noFill/>
+          <a:ln/>
+        </p:spPr>
+        <p:txBody>
+          <a:bodyPr wrap="square" lIns="0" tIns="0" rIns="0" bIns="0" rtlCol="0" anchor="ctr"/>
+          <a:lstStyle/>
+          <a:p>
+            <a:pPr indent="0" marL="0">
+              <a:buNone/>
+            </a:pPr>
+            <a:r>
+              <a:rPr lang="en-US" sz="800" dirty="0">
+                <a:solidFill>
+                  <a:srgbClr val="5B6B7C"/>
+                </a:solidFill>
+                <a:latin typeface="Arial" pitchFamily="34" charset="0"/>
+                <a:ea typeface="Arial" pitchFamily="34" charset="-122"/>
+                <a:cs typeface="Arial" pitchFamily="34" charset="-120"/>
+              </a:rPr>
+              <a:t>Per-archetype cEdge templates: FIPS mode, no local mgmt, Umbrella DNS, AES-256-GCM, agency NTP, SNMP off</a:t>
+            </a:r>
+            <a:endParaRPr lang="en-US" sz="800" dirty="0"/>
+          </a:p>
+        </p:txBody>
+      </p:sp>
+      <p:sp>
+        <p:nvSpPr>
+          <p:cNvPr id="16" name="Shape 14"/>
+          <p:cNvSpPr/>
+          <p:nvPr/>
+        </p:nvSpPr>
+        <p:spPr>
+          <a:xfrm>
+            <a:off x="6071616" y="1280160"/>
+            <a:ext cx="2697480" cy="1051560"/>
+          </a:xfrm>
+          <a:prstGeom prst="roundRect">
+            <a:avLst>
+              <a:gd name="adj" fmla="val 6087"/>
+            </a:avLst>
+          </a:prstGeom>
+          <a:solidFill>
+            <a:srgbClr val="FFFFFF"/>
+          </a:solidFill>
+          <a:ln w="9525">
+            <a:solidFill>
+              <a:srgbClr val="C9D4E0"/>
+            </a:solidFill>
+            <a:prstDash val="solid"/>
+          </a:ln>
+          <a:effectLst>
+            <a:outerShdw sx="100000" sy="100000" kx="0" ky="0" algn="bl" rotWithShape="0" blurRad="88900" dist="25400" dir="2700000">
+              <a:srgbClr val="000000">
+                <a:alpha val="14000"/>
+              </a:srgbClr>
+            </a:outerShdw>
+          </a:effectLst>
+        </p:spPr>
+      </p:sp>
+      <p:sp>
+        <p:nvSpPr>
+          <p:cNvPr id="17" name="Shape 15"/>
+          <p:cNvSpPr/>
+          <p:nvPr/>
+        </p:nvSpPr>
+        <p:spPr>
+          <a:xfrm>
+            <a:off x="6181344" y="1389888"/>
+            <a:ext cx="292608" cy="292608"/>
+          </a:xfrm>
+          <a:prstGeom prst="ellipse">
+            <a:avLst/>
+          </a:prstGeom>
+          <a:solidFill>
+            <a:srgbClr val="D4860B"/>
+          </a:solidFill>
+          <a:ln/>
+        </p:spPr>
+      </p:sp>
+      <p:sp>
+        <p:nvSpPr>
+          <p:cNvPr id="18" name="Text 16"/>
+          <p:cNvSpPr/>
+          <p:nvPr/>
+        </p:nvSpPr>
+        <p:spPr>
+          <a:xfrm>
+            <a:off x="6181344" y="1376172"/>
+            <a:ext cx="292608" cy="292608"/>
+          </a:xfrm>
+          <a:prstGeom prst="rect">
+            <a:avLst/>
+          </a:prstGeom>
+          <a:noFill/>
+          <a:ln/>
+        </p:spPr>
+        <p:txBody>
+          <a:bodyPr wrap="square" lIns="0" tIns="0" rIns="0" bIns="0" rtlCol="0" anchor="ctr"/>
+          <a:lstStyle/>
+          <a:p>
+            <a:pPr algn="ctr" indent="0" marL="0">
+              <a:buNone/>
+            </a:pPr>
+            <a:r>
+              <a:rPr lang="en-US" sz="1300" b="1" dirty="0">
+                <a:solidFill>
+                  <a:srgbClr val="FFFFFF"/>
+                </a:solidFill>
+                <a:latin typeface="Arial" pitchFamily="34" charset="0"/>
+                <a:ea typeface="Arial" pitchFamily="34" charset="-122"/>
+                <a:cs typeface="Arial" pitchFamily="34" charset="-120"/>
+              </a:rPr>
+              <a:t>3</a:t>
+            </a:r>
+            <a:endParaRPr lang="en-US" sz="1300" dirty="0"/>
+          </a:p>
+        </p:txBody>
+      </p:sp>
+      <p:sp>
+        <p:nvSpPr>
+          <p:cNvPr id="19" name="Text 17"/>
+          <p:cNvSpPr/>
+          <p:nvPr/>
+        </p:nvSpPr>
+        <p:spPr>
+          <a:xfrm>
+            <a:off x="6547104" y="1353312"/>
+            <a:ext cx="2130552" cy="365760"/>
+          </a:xfrm>
+          <a:prstGeom prst="rect">
+            <a:avLst/>
+          </a:prstGeom>
+          <a:noFill/>
+          <a:ln/>
+        </p:spPr>
+        <p:txBody>
+          <a:bodyPr wrap="square" lIns="0" tIns="0" rIns="0" bIns="0" rtlCol="0" anchor="ctr"/>
+          <a:lstStyle/>
+          <a:p>
+            <a:pPr indent="0" marL="0">
+              <a:buNone/>
+            </a:pPr>
+            <a:r>
+              <a:rPr lang="en-US" sz="1000" b="1" dirty="0">
+                <a:solidFill>
+                  <a:srgbClr val="1E293B"/>
+                </a:solidFill>
+                <a:latin typeface="Arial" pitchFamily="34" charset="0"/>
+                <a:ea typeface="Arial" pitchFamily="34" charset="-122"/>
+                <a:cs typeface="Arial" pitchFamily="34" charset="-120"/>
+              </a:rPr>
+              <a:t>Cloud OnRamp for M365</a:t>
+            </a:r>
+            <a:endParaRPr lang="en-US" sz="1000" dirty="0"/>
+          </a:p>
+        </p:txBody>
+      </p:sp>
+      <p:sp>
+        <p:nvSpPr>
+          <p:cNvPr id="20" name="Text 18"/>
+          <p:cNvSpPr/>
+          <p:nvPr/>
+        </p:nvSpPr>
+        <p:spPr>
+          <a:xfrm>
+            <a:off x="6181344" y="1755648"/>
+            <a:ext cx="2478024" cy="530352"/>
+          </a:xfrm>
+          <a:prstGeom prst="rect">
+            <a:avLst/>
+          </a:prstGeom>
+          <a:noFill/>
+          <a:ln/>
+        </p:spPr>
+        <p:txBody>
+          <a:bodyPr wrap="square" lIns="0" tIns="0" rIns="0" bIns="0" rtlCol="0" anchor="ctr"/>
+          <a:lstStyle/>
+          <a:p>
+            <a:pPr indent="0" marL="0">
+              <a:buNone/>
+            </a:pPr>
+            <a:r>
+              <a:rPr lang="en-US" sz="800" dirty="0">
+                <a:solidFill>
+                  <a:srgbClr val="5B6B7C"/>
+                </a:solidFill>
+                <a:latin typeface="Arial" pitchFamily="34" charset="0"/>
+                <a:ea typeface="Arial" pitchFamily="34" charset="-122"/>
+                <a:cs typeface="Arial" pitchFamily="34" charset="-120"/>
+              </a:rPr>
+              <a:t>Optimize/Allow endpoint lists (GCC); Teams media to best DIA/5G path, never a proxy; graceful MPLS fallback</a:t>
+            </a:r>
+            <a:endParaRPr lang="en-US" sz="800" dirty="0"/>
+          </a:p>
+        </p:txBody>
+      </p:sp>
+      <p:sp>
+        <p:nvSpPr>
+          <p:cNvPr id="21" name="Shape 19"/>
+          <p:cNvSpPr/>
+          <p:nvPr/>
+        </p:nvSpPr>
+        <p:spPr>
+          <a:xfrm>
+            <a:off x="457200" y="2459736"/>
+            <a:ext cx="2697480" cy="1051560"/>
+          </a:xfrm>
+          <a:prstGeom prst="roundRect">
+            <a:avLst>
+              <a:gd name="adj" fmla="val 6087"/>
+            </a:avLst>
+          </a:prstGeom>
+          <a:solidFill>
+            <a:srgbClr val="FFFFFF"/>
+          </a:solidFill>
+          <a:ln w="9525">
+            <a:solidFill>
+              <a:srgbClr val="C9D4E0"/>
+            </a:solidFill>
+            <a:prstDash val="solid"/>
+          </a:ln>
+          <a:effectLst>
+            <a:outerShdw sx="100000" sy="100000" kx="0" ky="0" algn="bl" rotWithShape="0" blurRad="88900" dist="25400" dir="2700000">
+              <a:srgbClr val="000000">
+                <a:alpha val="14000"/>
+              </a:srgbClr>
+            </a:outerShdw>
+          </a:effectLst>
+        </p:spPr>
+      </p:sp>
+      <p:sp>
+        <p:nvSpPr>
+          <p:cNvPr id="22" name="Shape 20"/>
+          <p:cNvSpPr/>
+          <p:nvPr/>
+        </p:nvSpPr>
+        <p:spPr>
+          <a:xfrm>
+            <a:off x="566928" y="2569464"/>
+            <a:ext cx="292608" cy="292608"/>
+          </a:xfrm>
+          <a:prstGeom prst="ellipse">
+            <a:avLst/>
+          </a:prstGeom>
+          <a:solidFill>
+            <a:srgbClr val="C0392B"/>
+          </a:solidFill>
+          <a:ln/>
+        </p:spPr>
+      </p:sp>
+      <p:sp>
+        <p:nvSpPr>
+          <p:cNvPr id="23" name="Text 21"/>
+          <p:cNvSpPr/>
+          <p:nvPr/>
+        </p:nvSpPr>
+        <p:spPr>
+          <a:xfrm>
+            <a:off x="566928" y="2555748"/>
+            <a:ext cx="292608" cy="292608"/>
+          </a:xfrm>
+          <a:prstGeom prst="rect">
+            <a:avLst/>
+          </a:prstGeom>
+          <a:noFill/>
+          <a:ln/>
+        </p:spPr>
+        <p:txBody>
+          <a:bodyPr wrap="square" lIns="0" tIns="0" rIns="0" bIns="0" rtlCol="0" anchor="ctr"/>
+          <a:lstStyle/>
+          <a:p>
+            <a:pPr algn="ctr" indent="0" marL="0">
+              <a:buNone/>
+            </a:pPr>
+            <a:r>
+              <a:rPr lang="en-US" sz="1300" b="1" dirty="0">
+                <a:solidFill>
+                  <a:srgbClr val="FFFFFF"/>
+                </a:solidFill>
+                <a:latin typeface="Arial" pitchFamily="34" charset="0"/>
+                <a:ea typeface="Arial" pitchFamily="34" charset="-122"/>
+                <a:cs typeface="Arial" pitchFamily="34" charset="-120"/>
+              </a:rPr>
+              <a:t>4</a:t>
+            </a:r>
+            <a:endParaRPr lang="en-US" sz="1300" dirty="0"/>
+          </a:p>
+        </p:txBody>
+      </p:sp>
+      <p:sp>
+        <p:nvSpPr>
+          <p:cNvPr id="24" name="Text 22"/>
+          <p:cNvSpPr/>
+          <p:nvPr/>
+        </p:nvSpPr>
+        <p:spPr>
+          <a:xfrm>
+            <a:off x="932688" y="2532888"/>
+            <a:ext cx="2130552" cy="365760"/>
+          </a:xfrm>
+          <a:prstGeom prst="rect">
+            <a:avLst/>
+          </a:prstGeom>
+          <a:noFill/>
+          <a:ln/>
+        </p:spPr>
+        <p:txBody>
+          <a:bodyPr wrap="square" lIns="0" tIns="0" rIns="0" bIns="0" rtlCol="0" anchor="ctr"/>
+          <a:lstStyle/>
+          <a:p>
+            <a:pPr indent="0" marL="0">
+              <a:buNone/>
+            </a:pPr>
+            <a:r>
+              <a:rPr lang="en-US" sz="1000" b="1" dirty="0">
+                <a:solidFill>
+                  <a:srgbClr val="1E293B"/>
+                </a:solidFill>
+                <a:latin typeface="Arial" pitchFamily="34" charset="0"/>
+                <a:ea typeface="Arial" pitchFamily="34" charset="-122"/>
+                <a:cs typeface="Arial" pitchFamily="34" charset="-120"/>
+              </a:rPr>
+              <a:t>Umbrella integration</a:t>
+            </a:r>
+            <a:endParaRPr lang="en-US" sz="1000" dirty="0"/>
+          </a:p>
+        </p:txBody>
+      </p:sp>
+      <p:sp>
+        <p:nvSpPr>
+          <p:cNvPr id="25" name="Text 23"/>
+          <p:cNvSpPr/>
+          <p:nvPr/>
+        </p:nvSpPr>
+        <p:spPr>
+          <a:xfrm>
+            <a:off x="566928" y="2935224"/>
+            <a:ext cx="2478024" cy="530352"/>
+          </a:xfrm>
+          <a:prstGeom prst="rect">
+            <a:avLst/>
+          </a:prstGeom>
+          <a:noFill/>
+          <a:ln/>
+        </p:spPr>
+        <p:txBody>
+          <a:bodyPr wrap="square" lIns="0" tIns="0" rIns="0" bIns="0" rtlCol="0" anchor="ctr"/>
+          <a:lstStyle/>
+          <a:p>
+            <a:pPr indent="0" marL="0">
+              <a:buNone/>
+            </a:pPr>
+            <a:r>
+              <a:rPr lang="en-US" sz="800" dirty="0">
+                <a:solidFill>
+                  <a:srgbClr val="5B6B7C"/>
+                </a:solidFill>
+                <a:latin typeface="Arial" pitchFamily="34" charset="0"/>
+                <a:ea typeface="Arial" pitchFamily="34" charset="-122"/>
+                <a:cs typeface="Arial" pitchFamily="34" charset="-120"/>
+              </a:rPr>
+              <a:t>All branch DNS through Umbrella — no local fallback; malicious domains blocked; M365 tenant restriction on</a:t>
+            </a:r>
+            <a:endParaRPr lang="en-US" sz="800" dirty="0"/>
+          </a:p>
+        </p:txBody>
+      </p:sp>
+      <p:sp>
+        <p:nvSpPr>
+          <p:cNvPr id="26" name="Shape 24"/>
+          <p:cNvSpPr/>
+          <p:nvPr/>
+        </p:nvSpPr>
+        <p:spPr>
+          <a:xfrm>
+            <a:off x="3264408" y="2459736"/>
+            <a:ext cx="2697480" cy="1051560"/>
+          </a:xfrm>
+          <a:prstGeom prst="roundRect">
+            <a:avLst>
+              <a:gd name="adj" fmla="val 6087"/>
+            </a:avLst>
+          </a:prstGeom>
+          <a:solidFill>
+            <a:srgbClr val="FFFFFF"/>
+          </a:solidFill>
+          <a:ln w="9525">
+            <a:solidFill>
+              <a:srgbClr val="C9D4E0"/>
+            </a:solidFill>
+            <a:prstDash val="solid"/>
+          </a:ln>
+          <a:effectLst>
+            <a:outerShdw sx="100000" sy="100000" kx="0" ky="0" algn="bl" rotWithShape="0" blurRad="88900" dist="25400" dir="2700000">
+              <a:srgbClr val="000000">
+                <a:alpha val="14000"/>
+              </a:srgbClr>
+            </a:outerShdw>
+          </a:effectLst>
+        </p:spPr>
+      </p:sp>
+      <p:sp>
+        <p:nvSpPr>
+          <p:cNvPr id="27" name="Shape 25"/>
+          <p:cNvSpPr/>
+          <p:nvPr/>
+        </p:nvSpPr>
+        <p:spPr>
+          <a:xfrm>
+            <a:off x="3374136" y="2569464"/>
+            <a:ext cx="292608" cy="292608"/>
+          </a:xfrm>
+          <a:prstGeom prst="ellipse">
+            <a:avLst/>
+          </a:prstGeom>
+          <a:solidFill>
+            <a:srgbClr val="1F3A5F"/>
+          </a:solidFill>
+          <a:ln/>
+        </p:spPr>
+      </p:sp>
+      <p:sp>
+        <p:nvSpPr>
+          <p:cNvPr id="28" name="Text 26"/>
+          <p:cNvSpPr/>
+          <p:nvPr/>
+        </p:nvSpPr>
+        <p:spPr>
+          <a:xfrm>
+            <a:off x="3374136" y="2555748"/>
+            <a:ext cx="292608" cy="292608"/>
+          </a:xfrm>
+          <a:prstGeom prst="rect">
+            <a:avLst/>
+          </a:prstGeom>
+          <a:noFill/>
+          <a:ln/>
+        </p:spPr>
+        <p:txBody>
+          <a:bodyPr wrap="square" lIns="0" tIns="0" rIns="0" bIns="0" rtlCol="0" anchor="ctr"/>
+          <a:lstStyle/>
+          <a:p>
+            <a:pPr algn="ctr" indent="0" marL="0">
+              <a:buNone/>
+            </a:pPr>
+            <a:r>
+              <a:rPr lang="en-US" sz="1300" b="1" dirty="0">
+                <a:solidFill>
+                  <a:srgbClr val="FFFFFF"/>
+                </a:solidFill>
+                <a:latin typeface="Arial" pitchFamily="34" charset="0"/>
+                <a:ea typeface="Arial" pitchFamily="34" charset="-122"/>
+                <a:cs typeface="Arial" pitchFamily="34" charset="-120"/>
+              </a:rPr>
+              <a:t>5</a:t>
+            </a:r>
+            <a:endParaRPr lang="en-US" sz="1300" dirty="0"/>
+          </a:p>
+        </p:txBody>
+      </p:sp>
+      <p:sp>
+        <p:nvSpPr>
+          <p:cNvPr id="29" name="Text 27"/>
+          <p:cNvSpPr/>
+          <p:nvPr/>
+        </p:nvSpPr>
+        <p:spPr>
+          <a:xfrm>
+            <a:off x="3739896" y="2532888"/>
+            <a:ext cx="2130552" cy="365760"/>
+          </a:xfrm>
+          <a:prstGeom prst="rect">
+            <a:avLst/>
+          </a:prstGeom>
+          <a:noFill/>
+          <a:ln/>
+        </p:spPr>
+        <p:txBody>
+          <a:bodyPr wrap="square" lIns="0" tIns="0" rIns="0" bIns="0" rtlCol="0" anchor="ctr"/>
+          <a:lstStyle/>
+          <a:p>
+            <a:pPr indent="0" marL="0">
+              <a:buNone/>
+            </a:pPr>
+            <a:r>
+              <a:rPr lang="en-US" sz="1000" b="1" dirty="0">
+                <a:solidFill>
+                  <a:srgbClr val="1E293B"/>
+                </a:solidFill>
+                <a:latin typeface="Arial" pitchFamily="34" charset="0"/>
+                <a:ea typeface="Arial" pitchFamily="34" charset="-122"/>
+                <a:cs typeface="Arial" pitchFamily="34" charset="-120"/>
+              </a:rPr>
+              <a:t>SIEM telemetry wiring</a:t>
+            </a:r>
+            <a:endParaRPr lang="en-US" sz="1000" dirty="0"/>
+          </a:p>
+        </p:txBody>
+      </p:sp>
+      <p:sp>
+        <p:nvSpPr>
+          <p:cNvPr id="30" name="Text 28"/>
+          <p:cNvSpPr/>
+          <p:nvPr/>
+        </p:nvSpPr>
+        <p:spPr>
+          <a:xfrm>
+            <a:off x="3374136" y="2935224"/>
+            <a:ext cx="2478024" cy="530352"/>
+          </a:xfrm>
+          <a:prstGeom prst="rect">
+            <a:avLst/>
+          </a:prstGeom>
+          <a:noFill/>
+          <a:ln/>
+        </p:spPr>
+        <p:txBody>
+          <a:bodyPr wrap="square" lIns="0" tIns="0" rIns="0" bIns="0" rtlCol="0" anchor="ctr"/>
+          <a:lstStyle/>
+          <a:p>
+            <a:pPr indent="0" marL="0">
+              <a:buNone/>
+            </a:pPr>
+            <a:r>
+              <a:rPr lang="en-US" sz="800" dirty="0">
+                <a:solidFill>
+                  <a:srgbClr val="5B6B7C"/>
+                </a:solidFill>
+                <a:latin typeface="Arial" pitchFamily="34" charset="0"/>
+                <a:ea typeface="Arial" pitchFamily="34" charset="-122"/>
+                <a:cs typeface="Arial" pitchFamily="34" charset="-120"/>
+              </a:rPr>
+              <a:t>Streaming telemetry to Sentinel: flow events, change audit, path quality, device compliance — AU-12 per flow</a:t>
+            </a:r>
+            <a:endParaRPr lang="en-US" sz="800" dirty="0"/>
+          </a:p>
+        </p:txBody>
+      </p:sp>
+      <p:sp>
+        <p:nvSpPr>
+          <p:cNvPr id="31" name="Shape 29"/>
+          <p:cNvSpPr/>
+          <p:nvPr/>
+        </p:nvSpPr>
+        <p:spPr>
+          <a:xfrm>
+            <a:off x="6071616" y="2459736"/>
+            <a:ext cx="2697480" cy="1051560"/>
+          </a:xfrm>
+          <a:prstGeom prst="roundRect">
+            <a:avLst>
+              <a:gd name="adj" fmla="val 6087"/>
+            </a:avLst>
+          </a:prstGeom>
+          <a:solidFill>
+            <a:srgbClr val="FFFFFF"/>
+          </a:solidFill>
+          <a:ln w="9525">
+            <a:solidFill>
+              <a:srgbClr val="C9D4E0"/>
+            </a:solidFill>
+            <a:prstDash val="solid"/>
+          </a:ln>
+          <a:effectLst>
+            <a:outerShdw sx="100000" sy="100000" kx="0" ky="0" algn="bl" rotWithShape="0" blurRad="88900" dist="25400" dir="2700000">
+              <a:srgbClr val="000000">
+                <a:alpha val="14000"/>
+              </a:srgbClr>
+            </a:outerShdw>
+          </a:effectLst>
+        </p:spPr>
+      </p:sp>
+      <p:sp>
+        <p:nvSpPr>
+          <p:cNvPr id="32" name="Shape 30"/>
+          <p:cNvSpPr/>
+          <p:nvPr/>
+        </p:nvSpPr>
+        <p:spPr>
+          <a:xfrm>
+            <a:off x="6181344" y="2569464"/>
+            <a:ext cx="292608" cy="292608"/>
+          </a:xfrm>
+          <a:prstGeom prst="ellipse">
+            <a:avLst/>
+          </a:prstGeom>
+          <a:solidFill>
+            <a:srgbClr val="1A9E8F"/>
+          </a:solidFill>
+          <a:ln/>
+        </p:spPr>
+      </p:sp>
+      <p:sp>
+        <p:nvSpPr>
+          <p:cNvPr id="33" name="Text 31"/>
+          <p:cNvSpPr/>
+          <p:nvPr/>
+        </p:nvSpPr>
+        <p:spPr>
+          <a:xfrm>
+            <a:off x="6181344" y="2555748"/>
+            <a:ext cx="292608" cy="292608"/>
+          </a:xfrm>
+          <a:prstGeom prst="rect">
+            <a:avLst/>
+          </a:prstGeom>
+          <a:noFill/>
+          <a:ln/>
+        </p:spPr>
+        <p:txBody>
+          <a:bodyPr wrap="square" lIns="0" tIns="0" rIns="0" bIns="0" rtlCol="0" anchor="ctr"/>
+          <a:lstStyle/>
+          <a:p>
+            <a:pPr algn="ctr" indent="0" marL="0">
+              <a:buNone/>
+            </a:pPr>
+            <a:r>
+              <a:rPr lang="en-US" sz="1300" b="1" dirty="0">
+                <a:solidFill>
+                  <a:srgbClr val="FFFFFF"/>
+                </a:solidFill>
+                <a:latin typeface="Arial" pitchFamily="34" charset="0"/>
+                <a:ea typeface="Arial" pitchFamily="34" charset="-122"/>
+                <a:cs typeface="Arial" pitchFamily="34" charset="-120"/>
+              </a:rPr>
+              <a:t>6</a:t>
+            </a:r>
+            <a:endParaRPr lang="en-US" sz="1300" dirty="0"/>
+          </a:p>
+        </p:txBody>
+      </p:sp>
+      <p:sp>
+        <p:nvSpPr>
+          <p:cNvPr id="34" name="Text 32"/>
+          <p:cNvSpPr/>
+          <p:nvPr/>
+        </p:nvSpPr>
+        <p:spPr>
+          <a:xfrm>
+            <a:off x="6547104" y="2532888"/>
+            <a:ext cx="2130552" cy="365760"/>
+          </a:xfrm>
+          <a:prstGeom prst="rect">
+            <a:avLst/>
+          </a:prstGeom>
+          <a:noFill/>
+          <a:ln/>
+        </p:spPr>
+        <p:txBody>
+          <a:bodyPr wrap="square" lIns="0" tIns="0" rIns="0" bIns="0" rtlCol="0" anchor="ctr"/>
+          <a:lstStyle/>
+          <a:p>
+            <a:pPr indent="0" marL="0">
+              <a:buNone/>
+            </a:pPr>
+            <a:r>
+              <a:rPr lang="en-US" sz="1000" b="1" dirty="0">
+                <a:solidFill>
+                  <a:srgbClr val="1E293B"/>
+                </a:solidFill>
+                <a:latin typeface="Arial" pitchFamily="34" charset="0"/>
+                <a:ea typeface="Arial" pitchFamily="34" charset="-122"/>
+                <a:cs typeface="Arial" pitchFamily="34" charset="-120"/>
+              </a:rPr>
+              <a:t>20x KSI validation</a:t>
+            </a:r>
+            <a:endParaRPr lang="en-US" sz="1000" dirty="0"/>
+          </a:p>
+        </p:txBody>
+      </p:sp>
+      <p:sp>
+        <p:nvSpPr>
+          <p:cNvPr id="35" name="Text 33"/>
+          <p:cNvSpPr/>
+          <p:nvPr/>
+        </p:nvSpPr>
+        <p:spPr>
+          <a:xfrm>
+            <a:off x="6181344" y="2935224"/>
+            <a:ext cx="2478024" cy="530352"/>
+          </a:xfrm>
+          <a:prstGeom prst="rect">
+            <a:avLst/>
+          </a:prstGeom>
+          <a:noFill/>
+          <a:ln/>
+        </p:spPr>
+        <p:txBody>
+          <a:bodyPr wrap="square" lIns="0" tIns="0" rIns="0" bIns="0" rtlCol="0" anchor="ctr"/>
+          <a:lstStyle/>
+          <a:p>
+            <a:pPr indent="0" marL="0">
+              <a:buNone/>
+            </a:pPr>
+            <a:r>
+              <a:rPr lang="en-US" sz="800" dirty="0">
+                <a:solidFill>
+                  <a:srgbClr val="5B6B7C"/>
+                </a:solidFill>
+                <a:latin typeface="Arial" pitchFamily="34" charset="0"/>
+                <a:ea typeface="Arial" pitchFamily="34" charset="-122"/>
+                <a:cs typeface="Arial" pitchFamily="34" charset="-120"/>
+              </a:rPr>
+              <a:t>Verify SIEM receives every required structured event; confirm format passes the OSCAL bundle generator</a:t>
+            </a:r>
+            <a:endParaRPr lang="en-US" sz="800" dirty="0"/>
+          </a:p>
+        </p:txBody>
+      </p:sp>
+      <p:sp>
+        <p:nvSpPr>
+          <p:cNvPr id="36" name="Shape 34"/>
+          <p:cNvSpPr/>
+          <p:nvPr/>
+        </p:nvSpPr>
+        <p:spPr>
+          <a:xfrm>
+            <a:off x="457200" y="3703320"/>
+            <a:ext cx="8275320" cy="1097280"/>
+          </a:xfrm>
+          <a:prstGeom prst="roundRect">
+            <a:avLst>
+              <a:gd name="adj" fmla="val 5833"/>
+            </a:avLst>
+          </a:prstGeom>
+          <a:solidFill>
+            <a:srgbClr val="EDF3F9"/>
+          </a:solidFill>
+          <a:ln w="9525">
+            <a:solidFill>
+              <a:srgbClr val="C9D4E0"/>
+            </a:solidFill>
+            <a:prstDash val="solid"/>
+          </a:ln>
+        </p:spPr>
+      </p:sp>
+      <p:sp>
+        <p:nvSpPr>
+          <p:cNvPr id="37" name="Text 35"/>
+          <p:cNvSpPr/>
+          <p:nvPr/>
+        </p:nvSpPr>
+        <p:spPr>
+          <a:xfrm>
+            <a:off x="685800" y="3703320"/>
+            <a:ext cx="7818120" cy="1097280"/>
+          </a:xfrm>
+          <a:prstGeom prst="rect">
+            <a:avLst/>
+          </a:prstGeom>
+          <a:noFill/>
+          <a:ln/>
+        </p:spPr>
+        <p:txBody>
+          <a:bodyPr wrap="square" lIns="0" tIns="0" rIns="0" bIns="0" rtlCol="0" anchor="ctr"/>
+          <a:lstStyle/>
+          <a:p>
+            <a:pPr indent="0" marL="0">
+              <a:buNone/>
+            </a:pPr>
+            <a:r>
+              <a:rPr lang="en-US" sz="1050" b="1" dirty="0">
+                <a:solidFill>
+                  <a:srgbClr val="1F3A5F"/>
+                </a:solidFill>
+                <a:latin typeface="Arial" pitchFamily="34" charset="0"/>
+                <a:ea typeface="Arial" pitchFamily="34" charset="-122"/>
+                <a:cs typeface="Arial" pitchFamily="34" charset="-120"/>
+              </a:rPr>
+              <a:t>Scope honesty, stated in the book itself: </a:t>
+            </a:r>
+            <a:pPr indent="0" marL="0">
+              <a:buNone/>
+            </a:pPr>
+            <a:r>
+              <a:rPr lang="en-US" sz="1050" dirty="0">
+                <a:solidFill>
+                  <a:srgbClr val="1E293B"/>
+                </a:solidFill>
+                <a:latin typeface="Arial" pitchFamily="34" charset="0"/>
+                <a:ea typeface="Arial" pitchFamily="34" charset="-122"/>
+                <a:cs typeface="Arial" pitchFamily="34" charset="-120"/>
+              </a:rPr>
+              <a:t>this sequence is decision-maker orientation, not an engineering runbook. Every deployment needs site surveys, carrier qualification (MAPS enrollment), and template development by certified Catalyst SD-WAN engineers. What the appendix provides is the compliance framing and boundary structure that should govern that engagement from the start.</a:t>
+            </a:r>
+            <a:endParaRPr lang="en-US" sz="1050" dirty="0"/>
+          </a:p>
+        </p:txBody>
+      </p:sp>
+    </p:spTree>
+  </p:cSld>
+  <p:clrMapOvr>
+    <a:masterClrMapping/>
+  </p:clrMapOvr>
+</p:sld>
+</file>
+
+<file path=ppt/slides/slide28.xml><?xml version="1.0" encoding="utf-8"?>
+<p:sld xmlns:a="http://schemas.openxmlformats.org/drawingml/2006/main" xmlns:r="http://schemas.openxmlformats.org/officeDocument/2006/relationships" xmlns:p="http://schemas.openxmlformats.org/presentationml/2006/main">
+  <p:cSld name="Slide 28">
+    <p:bg>
+      <p:bgPr>
+        <a:solidFill>
+          <a:srgbClr val="FFFFFF"/>
+        </a:solidFill>
+      </p:bgPr>
+    </p:bg>
+    <p:spTree>
+      <p:nvGrpSpPr>
+        <p:cNvPr id="1" name=""/>
+        <p:cNvGrpSpPr/>
+        <p:nvPr/>
+      </p:nvGrpSpPr>
+      <p:grpSpPr>
+        <a:xfrm>
+          <a:off x="0" y="0"/>
+          <a:ext cx="0" cy="0"/>
+          <a:chOff x="0" y="0"/>
+          <a:chExt cx="0" cy="0"/>
+        </a:xfrm>
+      </p:grpSpPr>
+      <p:sp>
+        <p:nvSpPr>
+          <p:cNvPr id="2" name="Text 0"/>
+          <p:cNvSpPr/>
+          <p:nvPr/>
+        </p:nvSpPr>
+        <p:spPr>
+          <a:xfrm>
+            <a:off x="502920" y="256032"/>
+            <a:ext cx="8229600" cy="274320"/>
+          </a:xfrm>
+          <a:prstGeom prst="rect">
+            <a:avLst/>
+          </a:prstGeom>
+          <a:noFill/>
+          <a:ln/>
+        </p:spPr>
+        <p:txBody>
+          <a:bodyPr wrap="square" lIns="0" tIns="0" rIns="0" bIns="0" rtlCol="0" anchor="ctr"/>
+          <a:lstStyle/>
+          <a:p>
+            <a:pPr indent="0" marL="0">
+              <a:buNone/>
+            </a:pPr>
+            <a:r>
+              <a:rPr lang="en-US" sz="1100" b="1" spc="200" kern="0" dirty="0">
+                <a:solidFill>
+                  <a:srgbClr val="1A9E8F"/>
+                </a:solidFill>
+                <a:latin typeface="Arial" pitchFamily="34" charset="0"/>
+                <a:ea typeface="Arial" pitchFamily="34" charset="-122"/>
+                <a:cs typeface="Arial" pitchFamily="34" charset="-120"/>
+              </a:rPr>
+              <a:t>WHERE THIS LEAVES US</a:t>
+            </a:r>
+            <a:endParaRPr lang="en-US" sz="1100" dirty="0"/>
+          </a:p>
+        </p:txBody>
+      </p:sp>
+      <p:sp>
+        <p:nvSpPr>
+          <p:cNvPr id="3" name="Text 1"/>
+          <p:cNvSpPr/>
+          <p:nvPr/>
+        </p:nvSpPr>
+        <p:spPr>
+          <a:xfrm>
+            <a:off x="502920" y="512064"/>
+            <a:ext cx="8138160" cy="566928"/>
+          </a:xfrm>
+          <a:prstGeom prst="rect">
+            <a:avLst/>
+          </a:prstGeom>
+          <a:noFill/>
+          <a:ln/>
+        </p:spPr>
+        <p:txBody>
+          <a:bodyPr wrap="square" lIns="0" tIns="0" rIns="0" bIns="0" rtlCol="0" anchor="ctr"/>
+          <a:lstStyle/>
+          <a:p>
+            <a:pPr indent="0" marL="0">
+              <a:buNone/>
+            </a:pPr>
+            <a:r>
+              <a:rPr lang="en-US" sz="2600" b="1" dirty="0">
+                <a:solidFill>
+                  <a:srgbClr val="1F3A5F"/>
+                </a:solidFill>
+                <a:latin typeface="Arial" pitchFamily="34" charset="0"/>
+                <a:ea typeface="Arial" pitchFamily="34" charset="-122"/>
+                <a:cs typeface="Arial" pitchFamily="34" charset="-120"/>
+              </a:rPr>
+              <a:t>The story in one slide — and what leadership must decide</a:t>
+            </a:r>
+            <a:endParaRPr lang="en-US" sz="2600" dirty="0"/>
+          </a:p>
+        </p:txBody>
+      </p:sp>
+      <p:sp>
+        <p:nvSpPr>
+          <p:cNvPr id="4" name="Text 2"/>
+          <p:cNvSpPr/>
+          <p:nvPr/>
+        </p:nvSpPr>
+        <p:spPr>
+          <a:xfrm>
+            <a:off x="502920" y="4864608"/>
+            <a:ext cx="7315200" cy="219456"/>
+          </a:xfrm>
+          <a:prstGeom prst="rect">
+            <a:avLst/>
+          </a:prstGeom>
+          <a:noFill/>
+          <a:ln/>
+        </p:spPr>
+        <p:txBody>
+          <a:bodyPr wrap="square" lIns="0" tIns="0" rIns="0" bIns="0" rtlCol="0" anchor="ctr"/>
+          <a:lstStyle/>
+          <a:p>
+            <a:pPr indent="0" marL="0">
+              <a:buNone/>
+            </a:pPr>
+            <a:r>
+              <a:rPr lang="en-US" sz="800" dirty="0">
+                <a:solidFill>
+                  <a:srgbClr val="5B6B7C"/>
+                </a:solidFill>
+                <a:latin typeface="Arial" pitchFamily="34" charset="0"/>
+                <a:ea typeface="Arial" pitchFamily="34" charset="-122"/>
+                <a:cs typeface="Arial" pitchFamily="34" charset="-120"/>
+              </a:rPr>
+              <a:t>Federal AAN — Book 05 Network Modernization · CSI Team Draft — Internal · FedRAMP Moderate · Date Code 2026-07-07 11:57 ET</a:t>
+            </a:r>
+            <a:endParaRPr lang="en-US" sz="800" dirty="0"/>
+          </a:p>
+        </p:txBody>
+      </p:sp>
+      <p:sp>
+        <p:nvSpPr>
+          <p:cNvPr id="5" name="Text 3"/>
+          <p:cNvSpPr/>
+          <p:nvPr/>
+        </p:nvSpPr>
+        <p:spPr>
+          <a:xfrm>
+            <a:off x="8412480" y="4864608"/>
+            <a:ext cx="320040" cy="219456"/>
+          </a:xfrm>
+          <a:prstGeom prst="rect">
+            <a:avLst/>
+          </a:prstGeom>
+          <a:noFill/>
+          <a:ln/>
+        </p:spPr>
+        <p:txBody>
+          <a:bodyPr wrap="square" lIns="0" tIns="0" rIns="0" bIns="0" rtlCol="0" anchor="ctr"/>
+          <a:lstStyle/>
+          <a:p>
+            <a:pPr algn="r" indent="0" marL="0">
+              <a:buNone/>
+            </a:pPr>
+            <a:r>
+              <a:rPr lang="en-US" sz="800" dirty="0">
+                <a:solidFill>
+                  <a:srgbClr val="5B6B7C"/>
+                </a:solidFill>
+                <a:latin typeface="Arial" pitchFamily="34" charset="0"/>
+                <a:ea typeface="Arial" pitchFamily="34" charset="-122"/>
+                <a:cs typeface="Arial" pitchFamily="34" charset="-120"/>
+              </a:rPr>
+              <a:t>28</a:t>
             </a:r>
             <a:endParaRPr lang="en-US" sz="800" dirty="0"/>
           </a:p>
@@ -27911,7 +29000,7 @@
                 <a:ea typeface="Arial" pitchFamily="34" charset="-122"/>
                 <a:cs typeface="Arial" pitchFamily="34" charset="-120"/>
               </a:rPr>
-              <a:t>Federal AAN — Book 05 Network Modernization · CSI Team Draft — Internal · FedRAMP Moderate · Date Code 2026-07-07 11:36 ET</a:t>
+              <a:t>Federal AAN — Book 05 Network Modernization · CSI Team Draft — Internal · FedRAMP Moderate · Date Code 2026-07-07 11:57 ET</a:t>
             </a:r>
             <a:endParaRPr lang="en-US" sz="800" dirty="0"/>
           </a:p>
@@ -28757,7 +29846,7 @@
                 <a:ea typeface="Arial" pitchFamily="34" charset="-122"/>
                 <a:cs typeface="Arial" pitchFamily="34" charset="-120"/>
               </a:rPr>
-              <a:t>Federal AAN — Book 05 Network Modernization · CSI Team Draft — Internal · FedRAMP Moderate · Date Code 2026-07-07 11:36 ET</a:t>
+              <a:t>Federal AAN — Book 05 Network Modernization · CSI Team Draft — Internal · FedRAMP Moderate · Date Code 2026-07-07 11:57 ET</a:t>
             </a:r>
             <a:endParaRPr lang="en-US" sz="800" dirty="0"/>
           </a:p>
@@ -29603,7 +30692,7 @@
                 <a:ea typeface="Arial" pitchFamily="34" charset="-122"/>
                 <a:cs typeface="Arial" pitchFamily="34" charset="-120"/>
               </a:rPr>
-              <a:t>Federal AAN — Book 05 Network Modernization · CSI Team Draft — Internal · FedRAMP Moderate · Date Code 2026-07-07 11:36 ET</a:t>
+              <a:t>Federal AAN — Book 05 Network Modernization · CSI Team Draft — Internal · FedRAMP Moderate · Date Code 2026-07-07 11:57 ET</a:t>
             </a:r>
             <a:endParaRPr lang="en-US" sz="800" dirty="0"/>
           </a:p>
@@ -30449,7 +31538,7 @@
                 <a:ea typeface="Arial" pitchFamily="34" charset="-122"/>
                 <a:cs typeface="Arial" pitchFamily="34" charset="-120"/>
               </a:rPr>
-              <a:t>Federal AAN — Book 05 Network Modernization · CSI Team Draft — Internal · FedRAMP Moderate · Date Code 2026-07-07 11:36 ET</a:t>
+              <a:t>Federal AAN — Book 05 Network Modernization · CSI Team Draft — Internal · FedRAMP Moderate · Date Code 2026-07-07 11:57 ET</a:t>
             </a:r>
             <a:endParaRPr lang="en-US" sz="800" dirty="0"/>
           </a:p>
@@ -31295,7 +32384,7 @@
                 <a:ea typeface="Arial" pitchFamily="34" charset="-122"/>
                 <a:cs typeface="Arial" pitchFamily="34" charset="-120"/>
               </a:rPr>
-              <a:t>Federal AAN — Book 05 Network Modernization · CSI Team Draft — Internal · FedRAMP Moderate · Date Code 2026-07-07 11:36 ET</a:t>
+              <a:t>Federal AAN — Book 05 Network Modernization · CSI Team Draft — Internal · FedRAMP Moderate · Date Code 2026-07-07 11:57 ET</a:t>
             </a:r>
             <a:endParaRPr lang="en-US" sz="800" dirty="0"/>
           </a:p>
@@ -32142,7 +33231,7 @@
                 <a:ea typeface="Arial" pitchFamily="34" charset="-122"/>
                 <a:cs typeface="Arial" pitchFamily="34" charset="-120"/>
               </a:rPr>
-              <a:t>Federal AAN — Book 05 Network Modernization · CSI Team Draft — Internal · FedRAMP Moderate · Date Code 2026-07-07 11:36 ET</a:t>
+              <a:t>Federal AAN — Book 05 Network Modernization · CSI Team Draft — Internal · FedRAMP Moderate · Date Code 2026-07-07 11:57 ET</a:t>
             </a:r>
             <a:endParaRPr lang="en-US" sz="800" dirty="0"/>
           </a:p>
@@ -33265,7 +34354,7 @@
                 <a:ea typeface="Arial" pitchFamily="34" charset="-122"/>
                 <a:cs typeface="Arial" pitchFamily="34" charset="-120"/>
               </a:rPr>
-              <a:t>Federal AAN — Book 05 Network Modernization · CSI Team Draft — Internal · FedRAMP Moderate · Date Code 2026-07-07 11:36 ET</a:t>
+              <a:t>Federal AAN — Book 05 Network Modernization · CSI Team Draft — Internal · FedRAMP Moderate · Date Code 2026-07-07 11:57 ET</a:t>
             </a:r>
             <a:endParaRPr lang="en-US" sz="800" dirty="0"/>
           </a:p>
